--- a/docs/assets/Sentinel_Solution_Presentation.pptx
+++ b/docs/assets/Sentinel_Solution_Presentation.pptx
@@ -10847,8 +10847,8 @@
         </p:nvSpPr>
         <p:spPr>
           <a:xfrm>
-            <a:off x="548640" y="1508760"/>
-            <a:ext cx="3611880" cy="1508760"/>
+            <a:off x="548640" y="1554480"/>
+            <a:ext cx="3611880" cy="1965960"/>
           </a:xfrm>
           <a:prstGeom prst="roundRect">
             <a:avLst>
@@ -10893,8 +10893,8 @@
         </p:nvSpPr>
         <p:spPr>
           <a:xfrm>
-            <a:off x="777240" y="1737360"/>
-            <a:ext cx="384048" cy="384048"/>
+            <a:off x="804672" y="1828800"/>
+            <a:ext cx="420624" cy="420624"/>
           </a:xfrm>
           <a:prstGeom prst="ellipse">
             <a:avLst/>
@@ -10937,8 +10937,8 @@
         </p:nvSpPr>
         <p:spPr>
           <a:xfrm>
-            <a:off x="1344168" y="1691640"/>
-            <a:ext cx="2606040" cy="457200"/>
+            <a:off x="1417320" y="1773936"/>
+            <a:ext cx="2514600" cy="502920"/>
           </a:xfrm>
           <a:prstGeom prst="rect">
             <a:avLst/>
@@ -10960,7 +10960,7 @@
               </a:spcAft>
             </a:pPr>
             <a:r>
-              <a:rPr sz="1400" b="1" i="0">
+              <a:rPr sz="1500" b="1" i="0">
                 <a:solidFill>
                   <a:srgbClr val="111827"/>
                 </a:solidFill>
@@ -10979,8 +10979,8 @@
         </p:nvSpPr>
         <p:spPr>
           <a:xfrm>
-            <a:off x="777240" y="2286000"/>
-            <a:ext cx="3154680" cy="640080"/>
+            <a:off x="804672" y="2514600"/>
+            <a:ext cx="3099816" cy="822960"/>
           </a:xfrm>
           <a:prstGeom prst="rect">
             <a:avLst/>
@@ -10995,14 +10995,14 @@
           <a:p>
             <a:pPr algn="l">
               <a:lnSpc>
-                <a:spcPct val="120000"/>
+                <a:spcPct val="125000"/>
               </a:lnSpc>
               <a:spcAft>
                 <a:spcPts val="0"/>
               </a:spcAft>
             </a:pPr>
             <a:r>
-              <a:rPr sz="1100" b="0" i="0">
+              <a:rPr sz="1200" b="0" i="0">
                 <a:solidFill>
                   <a:srgbClr val="616E82"/>
                 </a:solidFill>
@@ -11021,8 +11021,8 @@
         </p:nvSpPr>
         <p:spPr>
           <a:xfrm>
-            <a:off x="4297680" y="1508760"/>
-            <a:ext cx="3611880" cy="1508760"/>
+            <a:off x="4297680" y="1554480"/>
+            <a:ext cx="3611880" cy="1965960"/>
           </a:xfrm>
           <a:prstGeom prst="roundRect">
             <a:avLst>
@@ -11067,8 +11067,8 @@
         </p:nvSpPr>
         <p:spPr>
           <a:xfrm>
-            <a:off x="4526280" y="1737360"/>
-            <a:ext cx="384048" cy="384048"/>
+            <a:off x="4553712" y="1828800"/>
+            <a:ext cx="420624" cy="420624"/>
           </a:xfrm>
           <a:prstGeom prst="ellipse">
             <a:avLst/>
@@ -11111,8 +11111,8 @@
         </p:nvSpPr>
         <p:spPr>
           <a:xfrm>
-            <a:off x="5093208" y="1691640"/>
-            <a:ext cx="2606040" cy="457200"/>
+            <a:off x="5166360" y="1773936"/>
+            <a:ext cx="2514600" cy="502920"/>
           </a:xfrm>
           <a:prstGeom prst="rect">
             <a:avLst/>
@@ -11134,7 +11134,7 @@
               </a:spcAft>
             </a:pPr>
             <a:r>
-              <a:rPr sz="1400" b="1" i="0">
+              <a:rPr sz="1500" b="1" i="0">
                 <a:solidFill>
                   <a:srgbClr val="111827"/>
                 </a:solidFill>
@@ -11153,8 +11153,8 @@
         </p:nvSpPr>
         <p:spPr>
           <a:xfrm>
-            <a:off x="4526280" y="2286000"/>
-            <a:ext cx="3154680" cy="640080"/>
+            <a:off x="4553712" y="2514600"/>
+            <a:ext cx="3099816" cy="822960"/>
           </a:xfrm>
           <a:prstGeom prst="rect">
             <a:avLst/>
@@ -11169,14 +11169,14 @@
           <a:p>
             <a:pPr algn="l">
               <a:lnSpc>
-                <a:spcPct val="120000"/>
+                <a:spcPct val="125000"/>
               </a:lnSpc>
               <a:spcAft>
                 <a:spcPts val="0"/>
               </a:spcAft>
             </a:pPr>
             <a:r>
-              <a:rPr sz="1100" b="0" i="0">
+              <a:rPr sz="1200" b="0" i="0">
                 <a:solidFill>
                   <a:srgbClr val="616E82"/>
                 </a:solidFill>
@@ -11195,8 +11195,8 @@
         </p:nvSpPr>
         <p:spPr>
           <a:xfrm>
-            <a:off x="8046720" y="1508760"/>
-            <a:ext cx="3611880" cy="1508760"/>
+            <a:off x="8046720" y="1554480"/>
+            <a:ext cx="3611880" cy="1965960"/>
           </a:xfrm>
           <a:prstGeom prst="roundRect">
             <a:avLst>
@@ -11241,8 +11241,8 @@
         </p:nvSpPr>
         <p:spPr>
           <a:xfrm>
-            <a:off x="8275320" y="1737360"/>
-            <a:ext cx="384048" cy="384048"/>
+            <a:off x="8302752" y="1828800"/>
+            <a:ext cx="420624" cy="420624"/>
           </a:xfrm>
           <a:prstGeom prst="ellipse">
             <a:avLst/>
@@ -11285,8 +11285,8 @@
         </p:nvSpPr>
         <p:spPr>
           <a:xfrm>
-            <a:off x="8842248" y="1691640"/>
-            <a:ext cx="2606040" cy="457200"/>
+            <a:off x="8915400" y="1773936"/>
+            <a:ext cx="2514600" cy="502920"/>
           </a:xfrm>
           <a:prstGeom prst="rect">
             <a:avLst/>
@@ -11308,7 +11308,7 @@
               </a:spcAft>
             </a:pPr>
             <a:r>
-              <a:rPr sz="1400" b="1" i="0">
+              <a:rPr sz="1500" b="1" i="0">
                 <a:solidFill>
                   <a:srgbClr val="111827"/>
                 </a:solidFill>
@@ -11327,8 +11327,8 @@
         </p:nvSpPr>
         <p:spPr>
           <a:xfrm>
-            <a:off x="8275320" y="2286000"/>
-            <a:ext cx="3154680" cy="640080"/>
+            <a:off x="8302752" y="2514600"/>
+            <a:ext cx="3099816" cy="822960"/>
           </a:xfrm>
           <a:prstGeom prst="rect">
             <a:avLst/>
@@ -11343,14 +11343,14 @@
           <a:p>
             <a:pPr algn="l">
               <a:lnSpc>
-                <a:spcPct val="120000"/>
+                <a:spcPct val="125000"/>
               </a:lnSpc>
               <a:spcAft>
                 <a:spcPts val="0"/>
               </a:spcAft>
             </a:pPr>
             <a:r>
-              <a:rPr sz="1100" b="0" i="0">
+              <a:rPr sz="1200" b="0" i="0">
                 <a:solidFill>
                   <a:srgbClr val="616E82"/>
                 </a:solidFill>
@@ -11369,8 +11369,8 @@
         </p:nvSpPr>
         <p:spPr>
           <a:xfrm>
-            <a:off x="548640" y="3154680"/>
-            <a:ext cx="3611880" cy="1508760"/>
+            <a:off x="548640" y="3703320"/>
+            <a:ext cx="3611880" cy="1965960"/>
           </a:xfrm>
           <a:prstGeom prst="roundRect">
             <a:avLst>
@@ -11415,8 +11415,8 @@
         </p:nvSpPr>
         <p:spPr>
           <a:xfrm>
-            <a:off x="777240" y="3383280"/>
-            <a:ext cx="384048" cy="384048"/>
+            <a:off x="804672" y="3977640"/>
+            <a:ext cx="420624" cy="420624"/>
           </a:xfrm>
           <a:prstGeom prst="ellipse">
             <a:avLst/>
@@ -11459,8 +11459,8 @@
         </p:nvSpPr>
         <p:spPr>
           <a:xfrm>
-            <a:off x="1344168" y="3337560"/>
-            <a:ext cx="2606040" cy="457200"/>
+            <a:off x="1417320" y="3922776"/>
+            <a:ext cx="2514600" cy="502920"/>
           </a:xfrm>
           <a:prstGeom prst="rect">
             <a:avLst/>
@@ -11482,7 +11482,7 @@
               </a:spcAft>
             </a:pPr>
             <a:r>
-              <a:rPr sz="1400" b="1" i="0">
+              <a:rPr sz="1500" b="1" i="0">
                 <a:solidFill>
                   <a:srgbClr val="111827"/>
                 </a:solidFill>
@@ -11501,8 +11501,8 @@
         </p:nvSpPr>
         <p:spPr>
           <a:xfrm>
-            <a:off x="777240" y="3931920"/>
-            <a:ext cx="3154680" cy="640080"/>
+            <a:off x="804672" y="4663440"/>
+            <a:ext cx="3099816" cy="822960"/>
           </a:xfrm>
           <a:prstGeom prst="rect">
             <a:avLst/>
@@ -11517,14 +11517,14 @@
           <a:p>
             <a:pPr algn="l">
               <a:lnSpc>
-                <a:spcPct val="120000"/>
+                <a:spcPct val="125000"/>
               </a:lnSpc>
               <a:spcAft>
                 <a:spcPts val="0"/>
               </a:spcAft>
             </a:pPr>
             <a:r>
-              <a:rPr sz="1100" b="0" i="0">
+              <a:rPr sz="1200" b="0" i="0">
                 <a:solidFill>
                   <a:srgbClr val="616E82"/>
                 </a:solidFill>
@@ -11543,8 +11543,8 @@
         </p:nvSpPr>
         <p:spPr>
           <a:xfrm>
-            <a:off x="4297680" y="3154680"/>
-            <a:ext cx="3611880" cy="1508760"/>
+            <a:off x="4297680" y="3703320"/>
+            <a:ext cx="3611880" cy="1965960"/>
           </a:xfrm>
           <a:prstGeom prst="roundRect">
             <a:avLst>
@@ -11589,8 +11589,8 @@
         </p:nvSpPr>
         <p:spPr>
           <a:xfrm>
-            <a:off x="4526280" y="3383280"/>
-            <a:ext cx="384048" cy="384048"/>
+            <a:off x="4553712" y="3977640"/>
+            <a:ext cx="420624" cy="420624"/>
           </a:xfrm>
           <a:prstGeom prst="ellipse">
             <a:avLst/>
@@ -11633,8 +11633,8 @@
         </p:nvSpPr>
         <p:spPr>
           <a:xfrm>
-            <a:off x="5093208" y="3337560"/>
-            <a:ext cx="2606040" cy="457200"/>
+            <a:off x="5166360" y="3922776"/>
+            <a:ext cx="2514600" cy="502920"/>
           </a:xfrm>
           <a:prstGeom prst="rect">
             <a:avLst/>
@@ -11656,7 +11656,7 @@
               </a:spcAft>
             </a:pPr>
             <a:r>
-              <a:rPr sz="1400" b="1" i="0">
+              <a:rPr sz="1500" b="1" i="0">
                 <a:solidFill>
                   <a:srgbClr val="111827"/>
                 </a:solidFill>
@@ -11675,8 +11675,8 @@
         </p:nvSpPr>
         <p:spPr>
           <a:xfrm>
-            <a:off x="4526280" y="3931920"/>
-            <a:ext cx="3154680" cy="640080"/>
+            <a:off x="4553712" y="4663440"/>
+            <a:ext cx="3099816" cy="822960"/>
           </a:xfrm>
           <a:prstGeom prst="rect">
             <a:avLst/>
@@ -11691,14 +11691,14 @@
           <a:p>
             <a:pPr algn="l">
               <a:lnSpc>
-                <a:spcPct val="120000"/>
+                <a:spcPct val="125000"/>
               </a:lnSpc>
               <a:spcAft>
                 <a:spcPts val="0"/>
               </a:spcAft>
             </a:pPr>
             <a:r>
-              <a:rPr sz="1100" b="0" i="0">
+              <a:rPr sz="1200" b="0" i="0">
                 <a:solidFill>
                   <a:srgbClr val="616E82"/>
                 </a:solidFill>
@@ -11717,8 +11717,8 @@
         </p:nvSpPr>
         <p:spPr>
           <a:xfrm>
-            <a:off x="8046720" y="3154680"/>
-            <a:ext cx="3611880" cy="1508760"/>
+            <a:off x="8046720" y="3703320"/>
+            <a:ext cx="3611880" cy="1965960"/>
           </a:xfrm>
           <a:prstGeom prst="roundRect">
             <a:avLst>
@@ -11763,8 +11763,8 @@
         </p:nvSpPr>
         <p:spPr>
           <a:xfrm>
-            <a:off x="8275320" y="3383280"/>
-            <a:ext cx="384048" cy="384048"/>
+            <a:off x="8302752" y="3977640"/>
+            <a:ext cx="420624" cy="420624"/>
           </a:xfrm>
           <a:prstGeom prst="ellipse">
             <a:avLst/>
@@ -11807,8 +11807,8 @@
         </p:nvSpPr>
         <p:spPr>
           <a:xfrm>
-            <a:off x="8842248" y="3337560"/>
-            <a:ext cx="2606040" cy="457200"/>
+            <a:off x="8915400" y="3922776"/>
+            <a:ext cx="2514600" cy="502920"/>
           </a:xfrm>
           <a:prstGeom prst="rect">
             <a:avLst/>
@@ -11830,7 +11830,7 @@
               </a:spcAft>
             </a:pPr>
             <a:r>
-              <a:rPr sz="1400" b="1" i="0">
+              <a:rPr sz="1500" b="1" i="0">
                 <a:solidFill>
                   <a:srgbClr val="111827"/>
                 </a:solidFill>
@@ -11849,8 +11849,8 @@
         </p:nvSpPr>
         <p:spPr>
           <a:xfrm>
-            <a:off x="8275320" y="3931920"/>
-            <a:ext cx="3154680" cy="640080"/>
+            <a:off x="8302752" y="4663440"/>
+            <a:ext cx="3099816" cy="822960"/>
           </a:xfrm>
           <a:prstGeom prst="rect">
             <a:avLst/>
@@ -11865,14 +11865,14 @@
           <a:p>
             <a:pPr algn="l">
               <a:lnSpc>
-                <a:spcPct val="120000"/>
+                <a:spcPct val="125000"/>
               </a:lnSpc>
               <a:spcAft>
                 <a:spcPts val="0"/>
               </a:spcAft>
             </a:pPr>
             <a:r>
-              <a:rPr sz="1100" b="0" i="0">
+              <a:rPr sz="1200" b="0" i="0">
                 <a:solidFill>
                   <a:srgbClr val="616E82"/>
                 </a:solidFill>
@@ -11891,7 +11891,7 @@
         </p:nvSpPr>
         <p:spPr>
           <a:xfrm>
-            <a:off x="548640" y="4892040"/>
+            <a:off x="548640" y="5806440"/>
             <a:ext cx="11064240" cy="365760"/>
           </a:xfrm>
           <a:prstGeom prst="rect">
@@ -16151,8 +16151,8 @@
         </p:nvSpPr>
         <p:spPr>
           <a:xfrm>
-            <a:off x="548640" y="1508760"/>
-            <a:ext cx="3593592" cy="777240"/>
+            <a:off x="548640" y="1554480"/>
+            <a:ext cx="3593592" cy="1097280"/>
           </a:xfrm>
           <a:prstGeom prst="roundRect">
             <a:avLst>
@@ -16197,8 +16197,8 @@
         </p:nvSpPr>
         <p:spPr>
           <a:xfrm>
-            <a:off x="777240" y="1805940"/>
-            <a:ext cx="182880" cy="182880"/>
+            <a:off x="813816" y="2002536"/>
+            <a:ext cx="201168" cy="201168"/>
           </a:xfrm>
           <a:prstGeom prst="ellipse">
             <a:avLst/>
@@ -16241,8 +16241,8 @@
         </p:nvSpPr>
         <p:spPr>
           <a:xfrm>
-            <a:off x="1097280" y="1508760"/>
-            <a:ext cx="2862072" cy="777240"/>
+            <a:off x="1188720" y="1554480"/>
+            <a:ext cx="2770632" cy="1097280"/>
           </a:xfrm>
           <a:prstGeom prst="rect">
             <a:avLst/>
@@ -16257,14 +16257,14 @@
           <a:p>
             <a:pPr algn="l">
               <a:lnSpc>
-                <a:spcPct val="110000"/>
+                <a:spcPct val="115000"/>
               </a:lnSpc>
               <a:spcAft>
                 <a:spcPts val="0"/>
               </a:spcAft>
             </a:pPr>
             <a:r>
-              <a:rPr sz="1300" b="1" i="0">
+              <a:rPr sz="1400" b="1" i="0">
                 <a:solidFill>
                   <a:srgbClr val="111827"/>
                 </a:solidFill>
@@ -16283,8 +16283,8 @@
         </p:nvSpPr>
         <p:spPr>
           <a:xfrm>
-            <a:off x="4279392" y="1508760"/>
-            <a:ext cx="3593592" cy="777240"/>
+            <a:off x="4279392" y="1554480"/>
+            <a:ext cx="3593592" cy="1097280"/>
           </a:xfrm>
           <a:prstGeom prst="roundRect">
             <a:avLst>
@@ -16329,8 +16329,8 @@
         </p:nvSpPr>
         <p:spPr>
           <a:xfrm>
-            <a:off x="4507992" y="1805940"/>
-            <a:ext cx="182880" cy="182880"/>
+            <a:off x="4544568" y="2002536"/>
+            <a:ext cx="201168" cy="201168"/>
           </a:xfrm>
           <a:prstGeom prst="ellipse">
             <a:avLst/>
@@ -16373,8 +16373,8 @@
         </p:nvSpPr>
         <p:spPr>
           <a:xfrm>
-            <a:off x="4828032" y="1508760"/>
-            <a:ext cx="2862072" cy="777240"/>
+            <a:off x="4919472" y="1554480"/>
+            <a:ext cx="2770632" cy="1097280"/>
           </a:xfrm>
           <a:prstGeom prst="rect">
             <a:avLst/>
@@ -16389,14 +16389,14 @@
           <a:p>
             <a:pPr algn="l">
               <a:lnSpc>
-                <a:spcPct val="110000"/>
+                <a:spcPct val="115000"/>
               </a:lnSpc>
               <a:spcAft>
                 <a:spcPts val="0"/>
               </a:spcAft>
             </a:pPr>
             <a:r>
-              <a:rPr sz="1300" b="1" i="0">
+              <a:rPr sz="1400" b="1" i="0">
                 <a:solidFill>
                   <a:srgbClr val="111827"/>
                 </a:solidFill>
@@ -16415,8 +16415,8 @@
         </p:nvSpPr>
         <p:spPr>
           <a:xfrm>
-            <a:off x="8010144" y="1508760"/>
-            <a:ext cx="3593592" cy="777240"/>
+            <a:off x="8010144" y="1554480"/>
+            <a:ext cx="3593592" cy="1097280"/>
           </a:xfrm>
           <a:prstGeom prst="roundRect">
             <a:avLst>
@@ -16461,8 +16461,8 @@
         </p:nvSpPr>
         <p:spPr>
           <a:xfrm>
-            <a:off x="8238744" y="1805940"/>
-            <a:ext cx="182880" cy="182880"/>
+            <a:off x="8275320" y="2002536"/>
+            <a:ext cx="201168" cy="201168"/>
           </a:xfrm>
           <a:prstGeom prst="ellipse">
             <a:avLst/>
@@ -16505,8 +16505,8 @@
         </p:nvSpPr>
         <p:spPr>
           <a:xfrm>
-            <a:off x="8558784" y="1508760"/>
-            <a:ext cx="2862072" cy="777240"/>
+            <a:off x="8650224" y="1554480"/>
+            <a:ext cx="2770632" cy="1097280"/>
           </a:xfrm>
           <a:prstGeom prst="rect">
             <a:avLst/>
@@ -16521,14 +16521,14 @@
           <a:p>
             <a:pPr algn="l">
               <a:lnSpc>
-                <a:spcPct val="110000"/>
+                <a:spcPct val="115000"/>
               </a:lnSpc>
               <a:spcAft>
                 <a:spcPts val="0"/>
               </a:spcAft>
             </a:pPr>
             <a:r>
-              <a:rPr sz="1300" b="1" i="0">
+              <a:rPr sz="1400" b="1" i="0">
                 <a:solidFill>
                   <a:srgbClr val="111827"/>
                 </a:solidFill>
@@ -16547,8 +16547,8 @@
         </p:nvSpPr>
         <p:spPr>
           <a:xfrm>
-            <a:off x="548640" y="2423160"/>
-            <a:ext cx="3593592" cy="777240"/>
+            <a:off x="548640" y="2834640"/>
+            <a:ext cx="3593592" cy="1097280"/>
           </a:xfrm>
           <a:prstGeom prst="roundRect">
             <a:avLst>
@@ -16593,8 +16593,8 @@
         </p:nvSpPr>
         <p:spPr>
           <a:xfrm>
-            <a:off x="777240" y="2720340"/>
-            <a:ext cx="182880" cy="182880"/>
+            <a:off x="813816" y="3282696"/>
+            <a:ext cx="201168" cy="201168"/>
           </a:xfrm>
           <a:prstGeom prst="ellipse">
             <a:avLst/>
@@ -16637,8 +16637,8 @@
         </p:nvSpPr>
         <p:spPr>
           <a:xfrm>
-            <a:off x="1097280" y="2423160"/>
-            <a:ext cx="2862072" cy="777240"/>
+            <a:off x="1188720" y="2834640"/>
+            <a:ext cx="2770632" cy="1097280"/>
           </a:xfrm>
           <a:prstGeom prst="rect">
             <a:avLst/>
@@ -16653,14 +16653,14 @@
           <a:p>
             <a:pPr algn="l">
               <a:lnSpc>
-                <a:spcPct val="110000"/>
+                <a:spcPct val="115000"/>
               </a:lnSpc>
               <a:spcAft>
                 <a:spcPts val="0"/>
               </a:spcAft>
             </a:pPr>
             <a:r>
-              <a:rPr sz="1300" b="1" i="0">
+              <a:rPr sz="1400" b="1" i="0">
                 <a:solidFill>
                   <a:srgbClr val="111827"/>
                 </a:solidFill>
@@ -16679,8 +16679,8 @@
         </p:nvSpPr>
         <p:spPr>
           <a:xfrm>
-            <a:off x="4279392" y="2423160"/>
-            <a:ext cx="3593592" cy="777240"/>
+            <a:off x="4279392" y="2834640"/>
+            <a:ext cx="3593592" cy="1097280"/>
           </a:xfrm>
           <a:prstGeom prst="roundRect">
             <a:avLst>
@@ -16725,8 +16725,8 @@
         </p:nvSpPr>
         <p:spPr>
           <a:xfrm>
-            <a:off x="4507992" y="2720340"/>
-            <a:ext cx="182880" cy="182880"/>
+            <a:off x="4544568" y="3282696"/>
+            <a:ext cx="201168" cy="201168"/>
           </a:xfrm>
           <a:prstGeom prst="ellipse">
             <a:avLst/>
@@ -16769,8 +16769,8 @@
         </p:nvSpPr>
         <p:spPr>
           <a:xfrm>
-            <a:off x="4828032" y="2423160"/>
-            <a:ext cx="2862072" cy="777240"/>
+            <a:off x="4919472" y="2834640"/>
+            <a:ext cx="2770632" cy="1097280"/>
           </a:xfrm>
           <a:prstGeom prst="rect">
             <a:avLst/>
@@ -16785,14 +16785,14 @@
           <a:p>
             <a:pPr algn="l">
               <a:lnSpc>
-                <a:spcPct val="110000"/>
+                <a:spcPct val="115000"/>
               </a:lnSpc>
               <a:spcAft>
                 <a:spcPts val="0"/>
               </a:spcAft>
             </a:pPr>
             <a:r>
-              <a:rPr sz="1300" b="1" i="0">
+              <a:rPr sz="1400" b="1" i="0">
                 <a:solidFill>
                   <a:srgbClr val="111827"/>
                 </a:solidFill>
@@ -16811,8 +16811,8 @@
         </p:nvSpPr>
         <p:spPr>
           <a:xfrm>
-            <a:off x="8010144" y="2423160"/>
-            <a:ext cx="3593592" cy="777240"/>
+            <a:off x="8010144" y="2834640"/>
+            <a:ext cx="3593592" cy="1097280"/>
           </a:xfrm>
           <a:prstGeom prst="roundRect">
             <a:avLst>
@@ -16857,8 +16857,8 @@
         </p:nvSpPr>
         <p:spPr>
           <a:xfrm>
-            <a:off x="8238744" y="2720340"/>
-            <a:ext cx="182880" cy="182880"/>
+            <a:off x="8275320" y="3282696"/>
+            <a:ext cx="201168" cy="201168"/>
           </a:xfrm>
           <a:prstGeom prst="ellipse">
             <a:avLst/>
@@ -16901,8 +16901,8 @@
         </p:nvSpPr>
         <p:spPr>
           <a:xfrm>
-            <a:off x="8558784" y="2423160"/>
-            <a:ext cx="2862072" cy="777240"/>
+            <a:off x="8650224" y="2834640"/>
+            <a:ext cx="2770632" cy="1097280"/>
           </a:xfrm>
           <a:prstGeom prst="rect">
             <a:avLst/>
@@ -16917,14 +16917,14 @@
           <a:p>
             <a:pPr algn="l">
               <a:lnSpc>
-                <a:spcPct val="110000"/>
+                <a:spcPct val="115000"/>
               </a:lnSpc>
               <a:spcAft>
                 <a:spcPts val="0"/>
               </a:spcAft>
             </a:pPr>
             <a:r>
-              <a:rPr sz="1300" b="1" i="0">
+              <a:rPr sz="1400" b="1" i="0">
                 <a:solidFill>
                   <a:srgbClr val="111827"/>
                 </a:solidFill>
@@ -16943,8 +16943,8 @@
         </p:nvSpPr>
         <p:spPr>
           <a:xfrm>
-            <a:off x="548640" y="3337560"/>
-            <a:ext cx="3593592" cy="777240"/>
+            <a:off x="548640" y="4114800"/>
+            <a:ext cx="3593592" cy="1097280"/>
           </a:xfrm>
           <a:prstGeom prst="roundRect">
             <a:avLst>
@@ -16989,8 +16989,8 @@
         </p:nvSpPr>
         <p:spPr>
           <a:xfrm>
-            <a:off x="777240" y="3634740"/>
-            <a:ext cx="182880" cy="182880"/>
+            <a:off x="813816" y="4562856"/>
+            <a:ext cx="201168" cy="201168"/>
           </a:xfrm>
           <a:prstGeom prst="ellipse">
             <a:avLst/>
@@ -17033,8 +17033,8 @@
         </p:nvSpPr>
         <p:spPr>
           <a:xfrm>
-            <a:off x="1097280" y="3337560"/>
-            <a:ext cx="2862072" cy="777240"/>
+            <a:off x="1188720" y="4114800"/>
+            <a:ext cx="2770632" cy="1097280"/>
           </a:xfrm>
           <a:prstGeom prst="rect">
             <a:avLst/>
@@ -17049,14 +17049,14 @@
           <a:p>
             <a:pPr algn="l">
               <a:lnSpc>
-                <a:spcPct val="110000"/>
+                <a:spcPct val="115000"/>
               </a:lnSpc>
               <a:spcAft>
                 <a:spcPts val="0"/>
               </a:spcAft>
             </a:pPr>
             <a:r>
-              <a:rPr sz="1300" b="1" i="0">
+              <a:rPr sz="1400" b="1" i="0">
                 <a:solidFill>
                   <a:srgbClr val="111827"/>
                 </a:solidFill>
@@ -17075,8 +17075,8 @@
         </p:nvSpPr>
         <p:spPr>
           <a:xfrm>
-            <a:off x="4279392" y="3337560"/>
-            <a:ext cx="3593592" cy="777240"/>
+            <a:off x="4279392" y="4114800"/>
+            <a:ext cx="3593592" cy="1097280"/>
           </a:xfrm>
           <a:prstGeom prst="roundRect">
             <a:avLst>
@@ -17121,8 +17121,8 @@
         </p:nvSpPr>
         <p:spPr>
           <a:xfrm>
-            <a:off x="4507992" y="3634740"/>
-            <a:ext cx="182880" cy="182880"/>
+            <a:off x="4544568" y="4562856"/>
+            <a:ext cx="201168" cy="201168"/>
           </a:xfrm>
           <a:prstGeom prst="ellipse">
             <a:avLst/>
@@ -17165,8 +17165,8 @@
         </p:nvSpPr>
         <p:spPr>
           <a:xfrm>
-            <a:off x="4828032" y="3337560"/>
-            <a:ext cx="2862072" cy="777240"/>
+            <a:off x="4919472" y="4114800"/>
+            <a:ext cx="2770632" cy="1097280"/>
           </a:xfrm>
           <a:prstGeom prst="rect">
             <a:avLst/>
@@ -17181,14 +17181,14 @@
           <a:p>
             <a:pPr algn="l">
               <a:lnSpc>
-                <a:spcPct val="110000"/>
+                <a:spcPct val="115000"/>
               </a:lnSpc>
               <a:spcAft>
                 <a:spcPts val="0"/>
               </a:spcAft>
             </a:pPr>
             <a:r>
-              <a:rPr sz="1300" b="1" i="0">
+              <a:rPr sz="1400" b="1" i="0">
                 <a:solidFill>
                   <a:srgbClr val="111827"/>
                 </a:solidFill>
@@ -17207,8 +17207,8 @@
         </p:nvSpPr>
         <p:spPr>
           <a:xfrm>
-            <a:off x="8010144" y="3337560"/>
-            <a:ext cx="3593592" cy="777240"/>
+            <a:off x="8010144" y="4114800"/>
+            <a:ext cx="3593592" cy="1097280"/>
           </a:xfrm>
           <a:prstGeom prst="roundRect">
             <a:avLst>
@@ -17253,8 +17253,8 @@
         </p:nvSpPr>
         <p:spPr>
           <a:xfrm>
-            <a:off x="8238744" y="3634740"/>
-            <a:ext cx="182880" cy="182880"/>
+            <a:off x="8275320" y="4562856"/>
+            <a:ext cx="201168" cy="201168"/>
           </a:xfrm>
           <a:prstGeom prst="ellipse">
             <a:avLst/>
@@ -17297,8 +17297,8 @@
         </p:nvSpPr>
         <p:spPr>
           <a:xfrm>
-            <a:off x="8558784" y="3337560"/>
-            <a:ext cx="2862072" cy="777240"/>
+            <a:off x="8650224" y="4114800"/>
+            <a:ext cx="2770632" cy="1097280"/>
           </a:xfrm>
           <a:prstGeom prst="rect">
             <a:avLst/>
@@ -17313,14 +17313,14 @@
           <a:p>
             <a:pPr algn="l">
               <a:lnSpc>
-                <a:spcPct val="110000"/>
+                <a:spcPct val="115000"/>
               </a:lnSpc>
               <a:spcAft>
                 <a:spcPts val="0"/>
               </a:spcAft>
             </a:pPr>
             <a:r>
-              <a:rPr sz="1300" b="1" i="0">
+              <a:rPr sz="1400" b="1" i="0">
                 <a:solidFill>
                   <a:srgbClr val="111827"/>
                 </a:solidFill>
@@ -17339,8 +17339,8 @@
         </p:nvSpPr>
         <p:spPr>
           <a:xfrm>
-            <a:off x="548640" y="5166360"/>
-            <a:ext cx="11064240" cy="457200"/>
+            <a:off x="548640" y="5806440"/>
+            <a:ext cx="11064240" cy="365760"/>
           </a:xfrm>
           <a:prstGeom prst="rect">
             <a:avLst/>
@@ -17362,7 +17362,7 @@
               </a:spcAft>
             </a:pPr>
             <a:r>
-              <a:rPr sz="1350" b="1" i="0">
+              <a:rPr sz="1400" b="1" i="0">
                 <a:solidFill>
                   <a:srgbClr val="12A16B"/>
                 </a:solidFill>
@@ -17971,8 +17971,8 @@
         </p:nvSpPr>
         <p:spPr>
           <a:xfrm>
-            <a:off x="822960" y="2286000"/>
-            <a:ext cx="3063240" cy="3291840"/>
+            <a:off x="822960" y="2423160"/>
+            <a:ext cx="3063240" cy="3200400"/>
           </a:xfrm>
           <a:prstGeom prst="rect">
             <a:avLst/>
@@ -17987,14 +17987,14 @@
           <a:p>
             <a:pPr>
               <a:lnSpc>
-                <a:spcPct val="125000"/>
+                <a:spcPct val="130000"/>
               </a:lnSpc>
               <a:spcAft>
-                <a:spcPts val="1800"/>
+                <a:spcPts val="4200"/>
               </a:spcAft>
             </a:pPr>
             <a:r>
-              <a:rPr sz="1300" b="1">
+              <a:rPr sz="1450" b="1">
                 <a:solidFill>
                   <a:srgbClr val="2F7AF2"/>
                 </a:solidFill>
@@ -18003,7 +18003,7 @@
               <a:t>—  </a:t>
             </a:r>
             <a:r>
-              <a:rPr sz="1300">
+              <a:rPr sz="1450">
                 <a:solidFill>
                   <a:srgbClr val="111827"/>
                 </a:solidFill>
@@ -18015,14 +18015,14 @@
           <a:p>
             <a:pPr>
               <a:lnSpc>
-                <a:spcPct val="125000"/>
+                <a:spcPct val="130000"/>
               </a:lnSpc>
               <a:spcAft>
-                <a:spcPts val="1800"/>
+                <a:spcPts val="4200"/>
               </a:spcAft>
             </a:pPr>
             <a:r>
-              <a:rPr sz="1300" b="1">
+              <a:rPr sz="1450" b="1">
                 <a:solidFill>
                   <a:srgbClr val="2F7AF2"/>
                 </a:solidFill>
@@ -18031,7 +18031,7 @@
               <a:t>—  </a:t>
             </a:r>
             <a:r>
-              <a:rPr sz="1300">
+              <a:rPr sz="1450">
                 <a:solidFill>
                   <a:srgbClr val="111827"/>
                 </a:solidFill>
@@ -18043,14 +18043,14 @@
           <a:p>
             <a:pPr>
               <a:lnSpc>
-                <a:spcPct val="125000"/>
+                <a:spcPct val="130000"/>
               </a:lnSpc>
               <a:spcAft>
-                <a:spcPts val="1800"/>
+                <a:spcPts val="4200"/>
               </a:spcAft>
             </a:pPr>
             <a:r>
-              <a:rPr sz="1300" b="1">
+              <a:rPr sz="1450" b="1">
                 <a:solidFill>
                   <a:srgbClr val="2F7AF2"/>
                 </a:solidFill>
@@ -18059,7 +18059,7 @@
               <a:t>—  </a:t>
             </a:r>
             <a:r>
-              <a:rPr sz="1300">
+              <a:rPr sz="1450">
                 <a:solidFill>
                   <a:srgbClr val="111827"/>
                 </a:solidFill>
@@ -18210,8 +18210,8 @@
         </p:nvSpPr>
         <p:spPr>
           <a:xfrm>
-            <a:off x="4572000" y="2286000"/>
-            <a:ext cx="3063240" cy="3291840"/>
+            <a:off x="4572000" y="2423160"/>
+            <a:ext cx="3063240" cy="3200400"/>
           </a:xfrm>
           <a:prstGeom prst="rect">
             <a:avLst/>
@@ -18226,14 +18226,14 @@
           <a:p>
             <a:pPr>
               <a:lnSpc>
-                <a:spcPct val="125000"/>
+                <a:spcPct val="130000"/>
               </a:lnSpc>
               <a:spcAft>
-                <a:spcPts val="1800"/>
+                <a:spcPts val="4200"/>
               </a:spcAft>
             </a:pPr>
             <a:r>
-              <a:rPr sz="1300" b="1">
+              <a:rPr sz="1450" b="1">
                 <a:solidFill>
                   <a:srgbClr val="2F7AF2"/>
                 </a:solidFill>
@@ -18242,7 +18242,7 @@
               <a:t>—  </a:t>
             </a:r>
             <a:r>
-              <a:rPr sz="1300">
+              <a:rPr sz="1450">
                 <a:solidFill>
                   <a:srgbClr val="111827"/>
                 </a:solidFill>
@@ -18254,14 +18254,14 @@
           <a:p>
             <a:pPr>
               <a:lnSpc>
-                <a:spcPct val="125000"/>
+                <a:spcPct val="130000"/>
               </a:lnSpc>
               <a:spcAft>
-                <a:spcPts val="1800"/>
+                <a:spcPts val="4200"/>
               </a:spcAft>
             </a:pPr>
             <a:r>
-              <a:rPr sz="1300" b="1">
+              <a:rPr sz="1450" b="1">
                 <a:solidFill>
                   <a:srgbClr val="2F7AF2"/>
                 </a:solidFill>
@@ -18270,7 +18270,7 @@
               <a:t>—  </a:t>
             </a:r>
             <a:r>
-              <a:rPr sz="1300">
+              <a:rPr sz="1450">
                 <a:solidFill>
                   <a:srgbClr val="111827"/>
                 </a:solidFill>
@@ -18282,14 +18282,14 @@
           <a:p>
             <a:pPr>
               <a:lnSpc>
-                <a:spcPct val="125000"/>
+                <a:spcPct val="130000"/>
               </a:lnSpc>
               <a:spcAft>
-                <a:spcPts val="1800"/>
+                <a:spcPts val="4200"/>
               </a:spcAft>
             </a:pPr>
             <a:r>
-              <a:rPr sz="1300" b="1">
+              <a:rPr sz="1450" b="1">
                 <a:solidFill>
                   <a:srgbClr val="2F7AF2"/>
                 </a:solidFill>
@@ -18298,7 +18298,7 @@
               <a:t>—  </a:t>
             </a:r>
             <a:r>
-              <a:rPr sz="1300">
+              <a:rPr sz="1450">
                 <a:solidFill>
                   <a:srgbClr val="111827"/>
                 </a:solidFill>
@@ -18449,8 +18449,8 @@
         </p:nvSpPr>
         <p:spPr>
           <a:xfrm>
-            <a:off x="8321040" y="2286000"/>
-            <a:ext cx="3063240" cy="3291840"/>
+            <a:off x="8321040" y="2423160"/>
+            <a:ext cx="3063240" cy="3200400"/>
           </a:xfrm>
           <a:prstGeom prst="rect">
             <a:avLst/>
@@ -18465,14 +18465,14 @@
           <a:p>
             <a:pPr>
               <a:lnSpc>
-                <a:spcPct val="125000"/>
+                <a:spcPct val="130000"/>
               </a:lnSpc>
               <a:spcAft>
-                <a:spcPts val="1800"/>
+                <a:spcPts val="4200"/>
               </a:spcAft>
             </a:pPr>
             <a:r>
-              <a:rPr sz="1300" b="1">
+              <a:rPr sz="1450" b="1">
                 <a:solidFill>
                   <a:srgbClr val="2F7AF2"/>
                 </a:solidFill>
@@ -18481,7 +18481,7 @@
               <a:t>—  </a:t>
             </a:r>
             <a:r>
-              <a:rPr sz="1300">
+              <a:rPr sz="1450">
                 <a:solidFill>
                   <a:srgbClr val="111827"/>
                 </a:solidFill>
@@ -18493,14 +18493,14 @@
           <a:p>
             <a:pPr>
               <a:lnSpc>
-                <a:spcPct val="125000"/>
+                <a:spcPct val="130000"/>
               </a:lnSpc>
               <a:spcAft>
-                <a:spcPts val="1800"/>
+                <a:spcPts val="4200"/>
               </a:spcAft>
             </a:pPr>
             <a:r>
-              <a:rPr sz="1300" b="1">
+              <a:rPr sz="1450" b="1">
                 <a:solidFill>
                   <a:srgbClr val="2F7AF2"/>
                 </a:solidFill>
@@ -18509,7 +18509,7 @@
               <a:t>—  </a:t>
             </a:r>
             <a:r>
-              <a:rPr sz="1300">
+              <a:rPr sz="1450">
                 <a:solidFill>
                   <a:srgbClr val="111827"/>
                 </a:solidFill>
@@ -18521,14 +18521,14 @@
           <a:p>
             <a:pPr>
               <a:lnSpc>
-                <a:spcPct val="125000"/>
+                <a:spcPct val="130000"/>
               </a:lnSpc>
               <a:spcAft>
-                <a:spcPts val="1800"/>
+                <a:spcPts val="4200"/>
               </a:spcAft>
             </a:pPr>
             <a:r>
-              <a:rPr sz="1300" b="1">
+              <a:rPr sz="1450" b="1">
                 <a:solidFill>
                   <a:srgbClr val="2F7AF2"/>
                 </a:solidFill>
@@ -18537,7 +18537,7 @@
               <a:t>—  </a:t>
             </a:r>
             <a:r>
-              <a:rPr sz="1300">
+              <a:rPr sz="1450">
                 <a:solidFill>
                   <a:srgbClr val="111827"/>
                 </a:solidFill>
@@ -23291,7 +23291,7 @@
         <p:spPr>
           <a:xfrm>
             <a:off x="548640" y="1554480"/>
-            <a:ext cx="11064240" cy="566928"/>
+            <a:ext cx="3593592" cy="1207008"/>
           </a:xfrm>
           <a:prstGeom prst="roundRect">
             <a:avLst>
@@ -23337,7 +23337,7 @@
         <p:spPr>
           <a:xfrm>
             <a:off x="548640" y="1554480"/>
-            <a:ext cx="64008" cy="566928"/>
+            <a:ext cx="64008" cy="1207008"/>
           </a:xfrm>
           <a:prstGeom prst="rect">
             <a:avLst/>
@@ -23380,8 +23380,8 @@
         </p:nvSpPr>
         <p:spPr>
           <a:xfrm>
-            <a:off x="777240" y="1627632"/>
-            <a:ext cx="6949440" cy="438912"/>
+            <a:off x="804672" y="1719072"/>
+            <a:ext cx="3136392" cy="822960"/>
           </a:xfrm>
           <a:prstGeom prst="rect">
             <a:avLst/>
@@ -23389,21 +23389,21 @@
           <a:noFill/>
         </p:spPr>
         <p:txBody>
-          <a:bodyPr wrap="square" anchor="ctr" lIns="0" rIns="0" tIns="0" bIns="0">
+          <a:bodyPr wrap="square" anchor="t" lIns="0" rIns="0" tIns="0" bIns="0">
             <a:spAutoFit/>
           </a:bodyPr>
           <a:lstStyle/>
           <a:p>
             <a:pPr algn="l">
               <a:lnSpc>
-                <a:spcPct val="105000"/>
+                <a:spcPct val="115000"/>
               </a:lnSpc>
               <a:spcAft>
                 <a:spcPts val="0"/>
               </a:spcAft>
             </a:pPr>
             <a:r>
-              <a:rPr sz="1250" b="1" i="0">
+              <a:rPr sz="1300" b="1" i="0">
                 <a:solidFill>
                   <a:srgbClr val="111827"/>
                 </a:solidFill>
@@ -23422,1442 +23422,8 @@
         </p:nvSpPr>
         <p:spPr>
           <a:xfrm>
-            <a:off x="7818120" y="1627632"/>
-            <a:ext cx="3657600" cy="438912"/>
-          </a:xfrm>
-          <a:prstGeom prst="rect">
-            <a:avLst/>
-          </a:prstGeom>
-          <a:noFill/>
-        </p:spPr>
-        <p:txBody>
-          <a:bodyPr wrap="square" anchor="ctr" lIns="0" rIns="0" tIns="0" bIns="0">
-            <a:spAutoFit/>
-          </a:bodyPr>
-          <a:lstStyle/>
-          <a:p>
-            <a:pPr algn="r">
-              <a:lnSpc>
-                <a:spcPct val="105000"/>
-              </a:lnSpc>
-              <a:spcAft>
-                <a:spcPts val="0"/>
-              </a:spcAft>
-            </a:pPr>
-            <a:r>
-              <a:rPr sz="1100" b="0" i="1">
-                <a:solidFill>
-                  <a:srgbClr val="616E82"/>
-                </a:solidFill>
-                <a:latin typeface="Segoe UI Semilight"/>
-              </a:rPr>
-              <a:t>sentinel.gujarat.gov.in</a:t>
-            </a:r>
-          </a:p>
-        </p:txBody>
-      </p:sp>
-      <p:sp>
-        <p:nvSpPr>
-          <p:cNvPr id="16" name="Rounded Rectangle 15"/>
-          <p:cNvSpPr/>
-          <p:nvPr/>
-        </p:nvSpPr>
-        <p:spPr>
-          <a:xfrm>
-            <a:off x="548640" y="2212848"/>
-            <a:ext cx="11064240" cy="566928"/>
-          </a:xfrm>
-          <a:prstGeom prst="roundRect">
-            <a:avLst>
-              <a:gd name="adj" fmla="val 8000"/>
-            </a:avLst>
-          </a:prstGeom>
-          <a:solidFill>
-            <a:srgbClr val="F4F6FA"/>
-          </a:solidFill>
-          <a:ln>
-            <a:noFill/>
-          </a:ln>
-          <a:effectLst/>
-        </p:spPr>
-        <p:style>
-          <a:lnRef idx="1">
-            <a:schemeClr val="accent1"/>
-          </a:lnRef>
-          <a:fillRef idx="3">
-            <a:schemeClr val="accent1"/>
-          </a:fillRef>
-          <a:effectRef idx="2">
-            <a:schemeClr val="accent1"/>
-          </a:effectRef>
-          <a:fontRef idx="minor">
-            <a:schemeClr val="lt1"/>
-          </a:fontRef>
-        </p:style>
-        <p:txBody>
-          <a:bodyPr rtlCol="0" anchor="ctr"/>
-          <a:lstStyle/>
-          <a:p>
-            <a:pPr algn="ctr"/>
-          </a:p>
-        </p:txBody>
-      </p:sp>
-      <p:sp>
-        <p:nvSpPr>
-          <p:cNvPr id="17" name="Rectangle 16"/>
-          <p:cNvSpPr/>
-          <p:nvPr/>
-        </p:nvSpPr>
-        <p:spPr>
-          <a:xfrm>
-            <a:off x="548640" y="2212848"/>
-            <a:ext cx="64008" cy="566928"/>
-          </a:xfrm>
-          <a:prstGeom prst="rect">
-            <a:avLst/>
-          </a:prstGeom>
-          <a:solidFill>
-            <a:srgbClr val="2F7AF2"/>
-          </a:solidFill>
-          <a:ln>
-            <a:noFill/>
-          </a:ln>
-          <a:effectLst/>
-        </p:spPr>
-        <p:style>
-          <a:lnRef idx="1">
-            <a:schemeClr val="accent1"/>
-          </a:lnRef>
-          <a:fillRef idx="3">
-            <a:schemeClr val="accent1"/>
-          </a:fillRef>
-          <a:effectRef idx="2">
-            <a:schemeClr val="accent1"/>
-          </a:effectRef>
-          <a:fontRef idx="minor">
-            <a:schemeClr val="lt1"/>
-          </a:fontRef>
-        </p:style>
-        <p:txBody>
-          <a:bodyPr rtlCol="0" anchor="ctr"/>
-          <a:lstStyle/>
-          <a:p>
-            <a:pPr algn="ctr"/>
-          </a:p>
-        </p:txBody>
-      </p:sp>
-      <p:sp>
-        <p:nvSpPr>
-          <p:cNvPr id="18" name="TextBox 17"/>
-          <p:cNvSpPr txBox="1"/>
-          <p:nvPr/>
-        </p:nvSpPr>
-        <p:spPr>
-          <a:xfrm>
-            <a:off x="777240" y="2286000"/>
-            <a:ext cx="6949440" cy="438912"/>
-          </a:xfrm>
-          <a:prstGeom prst="rect">
-            <a:avLst/>
-          </a:prstGeom>
-          <a:noFill/>
-        </p:spPr>
-        <p:txBody>
-          <a:bodyPr wrap="square" anchor="ctr" lIns="0" rIns="0" tIns="0" bIns="0">
-            <a:spAutoFit/>
-          </a:bodyPr>
-          <a:lstStyle/>
-          <a:p>
-            <a:pPr algn="l">
-              <a:lnSpc>
-                <a:spcPct val="105000"/>
-              </a:lnSpc>
-              <a:spcAft>
-                <a:spcPts val="0"/>
-              </a:spcAft>
-            </a:pPr>
-            <a:r>
-              <a:rPr sz="1250" b="1" i="0">
-                <a:solidFill>
-                  <a:srgbClr val="111827"/>
-                </a:solidFill>
-                <a:latin typeface="Segoe UI Semibold"/>
-              </a:rPr>
-              <a:t>Only 3.8% of ANPR-detected violations reach enforcement</a:t>
-            </a:r>
-          </a:p>
-        </p:txBody>
-      </p:sp>
-      <p:sp>
-        <p:nvSpPr>
-          <p:cNvPr id="19" name="TextBox 18"/>
-          <p:cNvSpPr txBox="1"/>
-          <p:nvPr/>
-        </p:nvSpPr>
-        <p:spPr>
-          <a:xfrm>
-            <a:off x="7818120" y="2286000"/>
-            <a:ext cx="3657600" cy="438912"/>
-          </a:xfrm>
-          <a:prstGeom prst="rect">
-            <a:avLst/>
-          </a:prstGeom>
-          <a:noFill/>
-        </p:spPr>
-        <p:txBody>
-          <a:bodyPr wrap="square" anchor="ctr" lIns="0" rIns="0" tIns="0" bIns="0">
-            <a:spAutoFit/>
-          </a:bodyPr>
-          <a:lstStyle/>
-          <a:p>
-            <a:pPr algn="r">
-              <a:lnSpc>
-                <a:spcPct val="105000"/>
-              </a:lnSpc>
-              <a:spcAft>
-                <a:spcPts val="0"/>
-              </a:spcAft>
-            </a:pPr>
-            <a:r>
-              <a:rPr sz="1100" b="0" i="1">
-                <a:solidFill>
-                  <a:srgbClr val="616E82"/>
-                </a:solidFill>
-                <a:latin typeface="Segoe UI Semilight"/>
-              </a:rPr>
-              <a:t>CAG audit, 2025</a:t>
-            </a:r>
-          </a:p>
-        </p:txBody>
-      </p:sp>
-      <p:sp>
-        <p:nvSpPr>
-          <p:cNvPr id="20" name="Rounded Rectangle 19"/>
-          <p:cNvSpPr/>
-          <p:nvPr/>
-        </p:nvSpPr>
-        <p:spPr>
-          <a:xfrm>
-            <a:off x="548640" y="2871216"/>
-            <a:ext cx="11064240" cy="566928"/>
-          </a:xfrm>
-          <a:prstGeom prst="roundRect">
-            <a:avLst>
-              <a:gd name="adj" fmla="val 8000"/>
-            </a:avLst>
-          </a:prstGeom>
-          <a:solidFill>
-            <a:srgbClr val="F4F6FA"/>
-          </a:solidFill>
-          <a:ln>
-            <a:noFill/>
-          </a:ln>
-          <a:effectLst/>
-        </p:spPr>
-        <p:style>
-          <a:lnRef idx="1">
-            <a:schemeClr val="accent1"/>
-          </a:lnRef>
-          <a:fillRef idx="3">
-            <a:schemeClr val="accent1"/>
-          </a:fillRef>
-          <a:effectRef idx="2">
-            <a:schemeClr val="accent1"/>
-          </a:effectRef>
-          <a:fontRef idx="minor">
-            <a:schemeClr val="lt1"/>
-          </a:fontRef>
-        </p:style>
-        <p:txBody>
-          <a:bodyPr rtlCol="0" anchor="ctr"/>
-          <a:lstStyle/>
-          <a:p>
-            <a:pPr algn="ctr"/>
-          </a:p>
-        </p:txBody>
-      </p:sp>
-      <p:sp>
-        <p:nvSpPr>
-          <p:cNvPr id="21" name="Rectangle 20"/>
-          <p:cNvSpPr/>
-          <p:nvPr/>
-        </p:nvSpPr>
-        <p:spPr>
-          <a:xfrm>
-            <a:off x="548640" y="2871216"/>
-            <a:ext cx="64008" cy="566928"/>
-          </a:xfrm>
-          <a:prstGeom prst="rect">
-            <a:avLst/>
-          </a:prstGeom>
-          <a:solidFill>
-            <a:srgbClr val="2F7AF2"/>
-          </a:solidFill>
-          <a:ln>
-            <a:noFill/>
-          </a:ln>
-          <a:effectLst/>
-        </p:spPr>
-        <p:style>
-          <a:lnRef idx="1">
-            <a:schemeClr val="accent1"/>
-          </a:lnRef>
-          <a:fillRef idx="3">
-            <a:schemeClr val="accent1"/>
-          </a:fillRef>
-          <a:effectRef idx="2">
-            <a:schemeClr val="accent1"/>
-          </a:effectRef>
-          <a:fontRef idx="minor">
-            <a:schemeClr val="lt1"/>
-          </a:fontRef>
-        </p:style>
-        <p:txBody>
-          <a:bodyPr rtlCol="0" anchor="ctr"/>
-          <a:lstStyle/>
-          <a:p>
-            <a:pPr algn="ctr"/>
-          </a:p>
-        </p:txBody>
-      </p:sp>
-      <p:sp>
-        <p:nvSpPr>
-          <p:cNvPr id="22" name="TextBox 21"/>
-          <p:cNvSpPr txBox="1"/>
-          <p:nvPr/>
-        </p:nvSpPr>
-        <p:spPr>
-          <a:xfrm>
-            <a:off x="777240" y="2944368"/>
-            <a:ext cx="6949440" cy="438912"/>
-          </a:xfrm>
-          <a:prstGeom prst="rect">
-            <a:avLst/>
-          </a:prstGeom>
-          <a:noFill/>
-        </p:spPr>
-        <p:txBody>
-          <a:bodyPr wrap="square" anchor="ctr" lIns="0" rIns="0" tIns="0" bIns="0">
-            <a:spAutoFit/>
-          </a:bodyPr>
-          <a:lstStyle/>
-          <a:p>
-            <a:pPr algn="l">
-              <a:lnSpc>
-                <a:spcPct val="105000"/>
-              </a:lnSpc>
-              <a:spcAft>
-                <a:spcPts val="0"/>
-              </a:spcAft>
-            </a:pPr>
-            <a:r>
-              <a:rPr sz="1250" b="1" i="0">
-                <a:solidFill>
-                  <a:srgbClr val="111827"/>
-                </a:solidFill>
-                <a:latin typeface="Segoe UI Semibold"/>
-              </a:rPr>
-              <a:t>Appearance-link false-positive rate (41.87%), measured on real sandbox data</a:t>
-            </a:r>
-          </a:p>
-        </p:txBody>
-      </p:sp>
-      <p:sp>
-        <p:nvSpPr>
-          <p:cNvPr id="23" name="TextBox 22"/>
-          <p:cNvSpPr txBox="1"/>
-          <p:nvPr/>
-        </p:nvSpPr>
-        <p:spPr>
-          <a:xfrm>
-            <a:off x="7818120" y="2944368"/>
-            <a:ext cx="3657600" cy="438912"/>
-          </a:xfrm>
-          <a:prstGeom prst="rect">
-            <a:avLst/>
-          </a:prstGeom>
-          <a:noFill/>
-        </p:spPr>
-        <p:txBody>
-          <a:bodyPr wrap="square" anchor="ctr" lIns="0" rIns="0" tIns="0" bIns="0">
-            <a:spAutoFit/>
-          </a:bodyPr>
-          <a:lstStyle/>
-          <a:p>
-            <a:pPr algn="r">
-              <a:lnSpc>
-                <a:spcPct val="105000"/>
-              </a:lnSpc>
-              <a:spcAft>
-                <a:spcPts val="0"/>
-              </a:spcAft>
-            </a:pPr>
-            <a:r>
-              <a:rPr sz="1100" b="0" i="1">
-                <a:solidFill>
-                  <a:srgbClr val="616E82"/>
-                </a:solidFill>
-                <a:latin typeface="Segoe UI Semilight"/>
-              </a:rPr>
-              <a:t>calibrate_embedding_threshold.py, project test</a:t>
-            </a:r>
-          </a:p>
-        </p:txBody>
-      </p:sp>
-      <p:sp>
-        <p:nvSpPr>
-          <p:cNvPr id="24" name="Rounded Rectangle 23"/>
-          <p:cNvSpPr/>
-          <p:nvPr/>
-        </p:nvSpPr>
-        <p:spPr>
-          <a:xfrm>
-            <a:off x="548640" y="3529584"/>
-            <a:ext cx="11064240" cy="566928"/>
-          </a:xfrm>
-          <a:prstGeom prst="roundRect">
-            <a:avLst>
-              <a:gd name="adj" fmla="val 8000"/>
-            </a:avLst>
-          </a:prstGeom>
-          <a:solidFill>
-            <a:srgbClr val="F4F6FA"/>
-          </a:solidFill>
-          <a:ln>
-            <a:noFill/>
-          </a:ln>
-          <a:effectLst/>
-        </p:spPr>
-        <p:style>
-          <a:lnRef idx="1">
-            <a:schemeClr val="accent1"/>
-          </a:lnRef>
-          <a:fillRef idx="3">
-            <a:schemeClr val="accent1"/>
-          </a:fillRef>
-          <a:effectRef idx="2">
-            <a:schemeClr val="accent1"/>
-          </a:effectRef>
-          <a:fontRef idx="minor">
-            <a:schemeClr val="lt1"/>
-          </a:fontRef>
-        </p:style>
-        <p:txBody>
-          <a:bodyPr rtlCol="0" anchor="ctr"/>
-          <a:lstStyle/>
-          <a:p>
-            <a:pPr algn="ctr"/>
-          </a:p>
-        </p:txBody>
-      </p:sp>
-      <p:sp>
-        <p:nvSpPr>
-          <p:cNvPr id="25" name="Rectangle 24"/>
-          <p:cNvSpPr/>
-          <p:nvPr/>
-        </p:nvSpPr>
-        <p:spPr>
-          <a:xfrm>
-            <a:off x="548640" y="3529584"/>
-            <a:ext cx="64008" cy="566928"/>
-          </a:xfrm>
-          <a:prstGeom prst="rect">
-            <a:avLst/>
-          </a:prstGeom>
-          <a:solidFill>
-            <a:srgbClr val="2F7AF2"/>
-          </a:solidFill>
-          <a:ln>
-            <a:noFill/>
-          </a:ln>
-          <a:effectLst/>
-        </p:spPr>
-        <p:style>
-          <a:lnRef idx="1">
-            <a:schemeClr val="accent1"/>
-          </a:lnRef>
-          <a:fillRef idx="3">
-            <a:schemeClr val="accent1"/>
-          </a:fillRef>
-          <a:effectRef idx="2">
-            <a:schemeClr val="accent1"/>
-          </a:effectRef>
-          <a:fontRef idx="minor">
-            <a:schemeClr val="lt1"/>
-          </a:fontRef>
-        </p:style>
-        <p:txBody>
-          <a:bodyPr rtlCol="0" anchor="ctr"/>
-          <a:lstStyle/>
-          <a:p>
-            <a:pPr algn="ctr"/>
-          </a:p>
-        </p:txBody>
-      </p:sp>
-      <p:sp>
-        <p:nvSpPr>
-          <p:cNvPr id="26" name="TextBox 25"/>
-          <p:cNvSpPr txBox="1"/>
-          <p:nvPr/>
-        </p:nvSpPr>
-        <p:spPr>
-          <a:xfrm>
-            <a:off x="777240" y="3602736"/>
-            <a:ext cx="6949440" cy="438912"/>
-          </a:xfrm>
-          <a:prstGeom prst="rect">
-            <a:avLst/>
-          </a:prstGeom>
-          <a:noFill/>
-        </p:spPr>
-        <p:txBody>
-          <a:bodyPr wrap="square" anchor="ctr" lIns="0" rIns="0" tIns="0" bIns="0">
-            <a:spAutoFit/>
-          </a:bodyPr>
-          <a:lstStyle/>
-          <a:p>
-            <a:pPr algn="l">
-              <a:lnSpc>
-                <a:spcPct val="105000"/>
-              </a:lnSpc>
-              <a:spcAft>
-                <a:spcPts val="0"/>
-              </a:spcAft>
-            </a:pPr>
-            <a:r>
-              <a:rPr sz="1250" b="1" i="0">
-                <a:solidFill>
-                  <a:srgbClr val="111827"/>
-                </a:solidFill>
-                <a:latin typeface="Segoe UI Semibold"/>
-              </a:rPr>
-              <a:t>VISWAS / NETRAM / TRINETRA scale (7,000+ cameras, 34 district centres)</a:t>
-            </a:r>
-          </a:p>
-        </p:txBody>
-      </p:sp>
-      <p:sp>
-        <p:nvSpPr>
-          <p:cNvPr id="27" name="TextBox 26"/>
-          <p:cNvSpPr txBox="1"/>
-          <p:nvPr/>
-        </p:nvSpPr>
-        <p:spPr>
-          <a:xfrm>
-            <a:off x="7818120" y="3602736"/>
-            <a:ext cx="3657600" cy="438912"/>
-          </a:xfrm>
-          <a:prstGeom prst="rect">
-            <a:avLst/>
-          </a:prstGeom>
-          <a:noFill/>
-        </p:spPr>
-        <p:txBody>
-          <a:bodyPr wrap="square" anchor="ctr" lIns="0" rIns="0" tIns="0" bIns="0">
-            <a:spAutoFit/>
-          </a:bodyPr>
-          <a:lstStyle/>
-          <a:p>
-            <a:pPr algn="r">
-              <a:lnSpc>
-                <a:spcPct val="105000"/>
-              </a:lnSpc>
-              <a:spcAft>
-                <a:spcPts val="0"/>
-              </a:spcAft>
-            </a:pPr>
-            <a:r>
-              <a:rPr sz="1100" b="0" i="1">
-                <a:solidFill>
-                  <a:srgbClr val="616E82"/>
-                </a:solidFill>
-                <a:latin typeface="Segoe UI Semilight"/>
-              </a:rPr>
-              <a:t>Gujarat Home Dept. public statements</a:t>
-            </a:r>
-          </a:p>
-        </p:txBody>
-      </p:sp>
-      <p:sp>
-        <p:nvSpPr>
-          <p:cNvPr id="28" name="Rounded Rectangle 27"/>
-          <p:cNvSpPr/>
-          <p:nvPr/>
-        </p:nvSpPr>
-        <p:spPr>
-          <a:xfrm>
-            <a:off x="548640" y="4187952"/>
-            <a:ext cx="11064240" cy="566928"/>
-          </a:xfrm>
-          <a:prstGeom prst="roundRect">
-            <a:avLst>
-              <a:gd name="adj" fmla="val 8000"/>
-            </a:avLst>
-          </a:prstGeom>
-          <a:solidFill>
-            <a:srgbClr val="F4F6FA"/>
-          </a:solidFill>
-          <a:ln>
-            <a:noFill/>
-          </a:ln>
-          <a:effectLst/>
-        </p:spPr>
-        <p:style>
-          <a:lnRef idx="1">
-            <a:schemeClr val="accent1"/>
-          </a:lnRef>
-          <a:fillRef idx="3">
-            <a:schemeClr val="accent1"/>
-          </a:fillRef>
-          <a:effectRef idx="2">
-            <a:schemeClr val="accent1"/>
-          </a:effectRef>
-          <a:fontRef idx="minor">
-            <a:schemeClr val="lt1"/>
-          </a:fontRef>
-        </p:style>
-        <p:txBody>
-          <a:bodyPr rtlCol="0" anchor="ctr"/>
-          <a:lstStyle/>
-          <a:p>
-            <a:pPr algn="ctr"/>
-          </a:p>
-        </p:txBody>
-      </p:sp>
-      <p:sp>
-        <p:nvSpPr>
-          <p:cNvPr id="29" name="Rectangle 28"/>
-          <p:cNvSpPr/>
-          <p:nvPr/>
-        </p:nvSpPr>
-        <p:spPr>
-          <a:xfrm>
-            <a:off x="548640" y="4187952"/>
-            <a:ext cx="64008" cy="566928"/>
-          </a:xfrm>
-          <a:prstGeom prst="rect">
-            <a:avLst/>
-          </a:prstGeom>
-          <a:solidFill>
-            <a:srgbClr val="2F7AF2"/>
-          </a:solidFill>
-          <a:ln>
-            <a:noFill/>
-          </a:ln>
-          <a:effectLst/>
-        </p:spPr>
-        <p:style>
-          <a:lnRef idx="1">
-            <a:schemeClr val="accent1"/>
-          </a:lnRef>
-          <a:fillRef idx="3">
-            <a:schemeClr val="accent1"/>
-          </a:fillRef>
-          <a:effectRef idx="2">
-            <a:schemeClr val="accent1"/>
-          </a:effectRef>
-          <a:fontRef idx="minor">
-            <a:schemeClr val="lt1"/>
-          </a:fontRef>
-        </p:style>
-        <p:txBody>
-          <a:bodyPr rtlCol="0" anchor="ctr"/>
-          <a:lstStyle/>
-          <a:p>
-            <a:pPr algn="ctr"/>
-          </a:p>
-        </p:txBody>
-      </p:sp>
-      <p:sp>
-        <p:nvSpPr>
-          <p:cNvPr id="30" name="TextBox 29"/>
-          <p:cNvSpPr txBox="1"/>
-          <p:nvPr/>
-        </p:nvSpPr>
-        <p:spPr>
-          <a:xfrm>
-            <a:off x="777240" y="4261104"/>
-            <a:ext cx="6949440" cy="438912"/>
-          </a:xfrm>
-          <a:prstGeom prst="rect">
-            <a:avLst/>
-          </a:prstGeom>
-          <a:noFill/>
-        </p:spPr>
-        <p:txBody>
-          <a:bodyPr wrap="square" anchor="ctr" lIns="0" rIns="0" tIns="0" bIns="0">
-            <a:spAutoFit/>
-          </a:bodyPr>
-          <a:lstStyle/>
-          <a:p>
-            <a:pPr algn="l">
-              <a:lnSpc>
-                <a:spcPct val="105000"/>
-              </a:lnSpc>
-              <a:spcAft>
-                <a:spcPts val="0"/>
-              </a:spcAft>
-            </a:pPr>
-            <a:r>
-              <a:rPr sz="1250" b="1" i="0">
-                <a:solidFill>
-                  <a:srgbClr val="111827"/>
-                </a:solidFill>
-                <a:latin typeface="Segoe UI Semibold"/>
-              </a:rPr>
-              <a:t>Commercial ANPR/tracking precedent</a:t>
-            </a:r>
-          </a:p>
-        </p:txBody>
-      </p:sp>
-      <p:sp>
-        <p:nvSpPr>
-          <p:cNvPr id="31" name="TextBox 30"/>
-          <p:cNvSpPr txBox="1"/>
-          <p:nvPr/>
-        </p:nvSpPr>
-        <p:spPr>
-          <a:xfrm>
-            <a:off x="7818120" y="4261104"/>
-            <a:ext cx="3657600" cy="438912"/>
-          </a:xfrm>
-          <a:prstGeom prst="rect">
-            <a:avLst/>
-          </a:prstGeom>
-          <a:noFill/>
-        </p:spPr>
-        <p:txBody>
-          <a:bodyPr wrap="square" anchor="ctr" lIns="0" rIns="0" tIns="0" bIns="0">
-            <a:spAutoFit/>
-          </a:bodyPr>
-          <a:lstStyle/>
-          <a:p>
-            <a:pPr algn="r">
-              <a:lnSpc>
-                <a:spcPct val="105000"/>
-              </a:lnSpc>
-              <a:spcAft>
-                <a:spcPts val="0"/>
-              </a:spcAft>
-            </a:pPr>
-            <a:r>
-              <a:rPr sz="1100" b="0" i="1">
-                <a:solidFill>
-                  <a:srgbClr val="616E82"/>
-                </a:solidFill>
-                <a:latin typeface="Segoe UI Semilight"/>
-              </a:rPr>
-              <a:t>Staqu JARVIS, Videonetics, Vehant, Innefu</a:t>
-            </a:r>
-          </a:p>
-        </p:txBody>
-      </p:sp>
-      <p:sp>
-        <p:nvSpPr>
-          <p:cNvPr id="32" name="Rounded Rectangle 31"/>
-          <p:cNvSpPr/>
-          <p:nvPr/>
-        </p:nvSpPr>
-        <p:spPr>
-          <a:xfrm>
-            <a:off x="548640" y="4846320"/>
-            <a:ext cx="11064240" cy="566928"/>
-          </a:xfrm>
-          <a:prstGeom prst="roundRect">
-            <a:avLst>
-              <a:gd name="adj" fmla="val 8000"/>
-            </a:avLst>
-          </a:prstGeom>
-          <a:solidFill>
-            <a:srgbClr val="F4F6FA"/>
-          </a:solidFill>
-          <a:ln>
-            <a:noFill/>
-          </a:ln>
-          <a:effectLst/>
-        </p:spPr>
-        <p:style>
-          <a:lnRef idx="1">
-            <a:schemeClr val="accent1"/>
-          </a:lnRef>
-          <a:fillRef idx="3">
-            <a:schemeClr val="accent1"/>
-          </a:fillRef>
-          <a:effectRef idx="2">
-            <a:schemeClr val="accent1"/>
-          </a:effectRef>
-          <a:fontRef idx="minor">
-            <a:schemeClr val="lt1"/>
-          </a:fontRef>
-        </p:style>
-        <p:txBody>
-          <a:bodyPr rtlCol="0" anchor="ctr"/>
-          <a:lstStyle/>
-          <a:p>
-            <a:pPr algn="ctr"/>
-          </a:p>
-        </p:txBody>
-      </p:sp>
-      <p:sp>
-        <p:nvSpPr>
-          <p:cNvPr id="33" name="Rectangle 32"/>
-          <p:cNvSpPr/>
-          <p:nvPr/>
-        </p:nvSpPr>
-        <p:spPr>
-          <a:xfrm>
-            <a:off x="548640" y="4846320"/>
-            <a:ext cx="64008" cy="566928"/>
-          </a:xfrm>
-          <a:prstGeom prst="rect">
-            <a:avLst/>
-          </a:prstGeom>
-          <a:solidFill>
-            <a:srgbClr val="2F7AF2"/>
-          </a:solidFill>
-          <a:ln>
-            <a:noFill/>
-          </a:ln>
-          <a:effectLst/>
-        </p:spPr>
-        <p:style>
-          <a:lnRef idx="1">
-            <a:schemeClr val="accent1"/>
-          </a:lnRef>
-          <a:fillRef idx="3">
-            <a:schemeClr val="accent1"/>
-          </a:fillRef>
-          <a:effectRef idx="2">
-            <a:schemeClr val="accent1"/>
-          </a:effectRef>
-          <a:fontRef idx="minor">
-            <a:schemeClr val="lt1"/>
-          </a:fontRef>
-        </p:style>
-        <p:txBody>
-          <a:bodyPr rtlCol="0" anchor="ctr"/>
-          <a:lstStyle/>
-          <a:p>
-            <a:pPr algn="ctr"/>
-          </a:p>
-        </p:txBody>
-      </p:sp>
-      <p:sp>
-        <p:nvSpPr>
-          <p:cNvPr id="34" name="TextBox 33"/>
-          <p:cNvSpPr txBox="1"/>
-          <p:nvPr/>
-        </p:nvSpPr>
-        <p:spPr>
-          <a:xfrm>
-            <a:off x="777240" y="4919472"/>
-            <a:ext cx="6949440" cy="438912"/>
-          </a:xfrm>
-          <a:prstGeom prst="rect">
-            <a:avLst/>
-          </a:prstGeom>
-          <a:noFill/>
-        </p:spPr>
-        <p:txBody>
-          <a:bodyPr wrap="square" anchor="ctr" lIns="0" rIns="0" tIns="0" bIns="0">
-            <a:spAutoFit/>
-          </a:bodyPr>
-          <a:lstStyle/>
-          <a:p>
-            <a:pPr algn="l">
-              <a:lnSpc>
-                <a:spcPct val="105000"/>
-              </a:lnSpc>
-              <a:spcAft>
-                <a:spcPts val="0"/>
-              </a:spcAft>
-            </a:pPr>
-            <a:r>
-              <a:rPr sz="1250" b="1" i="0">
-                <a:solidFill>
-                  <a:srgbClr val="111827"/>
-                </a:solidFill>
-                <a:latin typeface="Segoe UI Semibold"/>
-              </a:rPr>
-              <a:t>Field ANPR accuracy vs. lab benchmarks (71% misread rate cited)</a:t>
-            </a:r>
-          </a:p>
-        </p:txBody>
-      </p:sp>
-      <p:sp>
-        <p:nvSpPr>
-          <p:cNvPr id="35" name="TextBox 34"/>
-          <p:cNvSpPr txBox="1"/>
-          <p:nvPr/>
-        </p:nvSpPr>
-        <p:spPr>
-          <a:xfrm>
-            <a:off x="7818120" y="4919472"/>
-            <a:ext cx="3657600" cy="438912"/>
-          </a:xfrm>
-          <a:prstGeom prst="rect">
-            <a:avLst/>
-          </a:prstGeom>
-          <a:noFill/>
-        </p:spPr>
-        <p:txBody>
-          <a:bodyPr wrap="square" anchor="ctr" lIns="0" rIns="0" tIns="0" bIns="0">
-            <a:spAutoFit/>
-          </a:bodyPr>
-          <a:lstStyle/>
-          <a:p>
-            <a:pPr algn="r">
-              <a:lnSpc>
-                <a:spcPct val="105000"/>
-              </a:lnSpc>
-              <a:spcAft>
-                <a:spcPts val="0"/>
-              </a:spcAft>
-            </a:pPr>
-            <a:r>
-              <a:rPr sz="1100" b="0" i="1">
-                <a:solidFill>
-                  <a:srgbClr val="616E82"/>
-                </a:solidFill>
-                <a:latin typeface="Segoe UI Semilight"/>
-              </a:rPr>
-              <a:t>Business Insider / Gizmodo, Aug 2026; Davis Vanguard, Aug 2026</a:t>
-            </a:r>
-          </a:p>
-        </p:txBody>
-      </p:sp>
-      <p:sp>
-        <p:nvSpPr>
-          <p:cNvPr id="36" name="Rounded Rectangle 35"/>
-          <p:cNvSpPr/>
-          <p:nvPr/>
-        </p:nvSpPr>
-        <p:spPr>
-          <a:xfrm>
-            <a:off x="548640" y="5504688"/>
-            <a:ext cx="11064240" cy="566928"/>
-          </a:xfrm>
-          <a:prstGeom prst="roundRect">
-            <a:avLst>
-              <a:gd name="adj" fmla="val 8000"/>
-            </a:avLst>
-          </a:prstGeom>
-          <a:solidFill>
-            <a:srgbClr val="F4F6FA"/>
-          </a:solidFill>
-          <a:ln>
-            <a:noFill/>
-          </a:ln>
-          <a:effectLst/>
-        </p:spPr>
-        <p:style>
-          <a:lnRef idx="1">
-            <a:schemeClr val="accent1"/>
-          </a:lnRef>
-          <a:fillRef idx="3">
-            <a:schemeClr val="accent1"/>
-          </a:fillRef>
-          <a:effectRef idx="2">
-            <a:schemeClr val="accent1"/>
-          </a:effectRef>
-          <a:fontRef idx="minor">
-            <a:schemeClr val="lt1"/>
-          </a:fontRef>
-        </p:style>
-        <p:txBody>
-          <a:bodyPr rtlCol="0" anchor="ctr"/>
-          <a:lstStyle/>
-          <a:p>
-            <a:pPr algn="ctr"/>
-          </a:p>
-        </p:txBody>
-      </p:sp>
-      <p:sp>
-        <p:nvSpPr>
-          <p:cNvPr id="37" name="Rectangle 36"/>
-          <p:cNvSpPr/>
-          <p:nvPr/>
-        </p:nvSpPr>
-        <p:spPr>
-          <a:xfrm>
-            <a:off x="548640" y="5504688"/>
-            <a:ext cx="64008" cy="566928"/>
-          </a:xfrm>
-          <a:prstGeom prst="rect">
-            <a:avLst/>
-          </a:prstGeom>
-          <a:solidFill>
-            <a:srgbClr val="2F7AF2"/>
-          </a:solidFill>
-          <a:ln>
-            <a:noFill/>
-          </a:ln>
-          <a:effectLst/>
-        </p:spPr>
-        <p:style>
-          <a:lnRef idx="1">
-            <a:schemeClr val="accent1"/>
-          </a:lnRef>
-          <a:fillRef idx="3">
-            <a:schemeClr val="accent1"/>
-          </a:fillRef>
-          <a:effectRef idx="2">
-            <a:schemeClr val="accent1"/>
-          </a:effectRef>
-          <a:fontRef idx="minor">
-            <a:schemeClr val="lt1"/>
-          </a:fontRef>
-        </p:style>
-        <p:txBody>
-          <a:bodyPr rtlCol="0" anchor="ctr"/>
-          <a:lstStyle/>
-          <a:p>
-            <a:pPr algn="ctr"/>
-          </a:p>
-        </p:txBody>
-      </p:sp>
-      <p:sp>
-        <p:nvSpPr>
-          <p:cNvPr id="38" name="TextBox 37"/>
-          <p:cNvSpPr txBox="1"/>
-          <p:nvPr/>
-        </p:nvSpPr>
-        <p:spPr>
-          <a:xfrm>
-            <a:off x="777240" y="5577840"/>
-            <a:ext cx="6949440" cy="438912"/>
-          </a:xfrm>
-          <a:prstGeom prst="rect">
-            <a:avLst/>
-          </a:prstGeom>
-          <a:noFill/>
-        </p:spPr>
-        <p:txBody>
-          <a:bodyPr wrap="square" anchor="ctr" lIns="0" rIns="0" tIns="0" bIns="0">
-            <a:spAutoFit/>
-          </a:bodyPr>
-          <a:lstStyle/>
-          <a:p>
-            <a:pPr algn="l">
-              <a:lnSpc>
-                <a:spcPct val="105000"/>
-              </a:lnSpc>
-              <a:spcAft>
-                <a:spcPts val="0"/>
-              </a:spcAft>
-            </a:pPr>
-            <a:r>
-              <a:rPr sz="1250" b="1" i="0">
-                <a:solidFill>
-                  <a:srgbClr val="111827"/>
-                </a:solidFill>
-                <a:latin typeface="Segoe UI Semibold"/>
-              </a:rPr>
-              <a:t>Indian-traffic detector benchmark, evaluated not integrated</a:t>
-            </a:r>
-          </a:p>
-        </p:txBody>
-      </p:sp>
-      <p:sp>
-        <p:nvSpPr>
-          <p:cNvPr id="39" name="TextBox 38"/>
-          <p:cNvSpPr txBox="1"/>
-          <p:nvPr/>
-        </p:nvSpPr>
-        <p:spPr>
-          <a:xfrm>
-            <a:off x="7818120" y="5577840"/>
-            <a:ext cx="3657600" cy="438912"/>
-          </a:xfrm>
-          <a:prstGeom prst="rect">
-            <a:avLst/>
-          </a:prstGeom>
-          <a:noFill/>
-        </p:spPr>
-        <p:txBody>
-          <a:bodyPr wrap="square" anchor="ctr" lIns="0" rIns="0" tIns="0" bIns="0">
-            <a:spAutoFit/>
-          </a:bodyPr>
-          <a:lstStyle/>
-          <a:p>
-            <a:pPr algn="r">
-              <a:lnSpc>
-                <a:spcPct val="105000"/>
-              </a:lnSpc>
-              <a:spcAft>
-                <a:spcPts val="0"/>
-              </a:spcAft>
-            </a:pPr>
-            <a:r>
-              <a:rPr sz="1100" b="0" i="1">
-                <a:solidFill>
-                  <a:srgbClr val="616E82"/>
-                </a:solidFill>
-                <a:latin typeface="Segoe UI Semilight"/>
-              </a:rPr>
-              <a:t>IISc AI for Integrated Mobility — UVH-26, arXiv 2511.02563</a:t>
-            </a:r>
-          </a:p>
-        </p:txBody>
-      </p:sp>
-      <p:sp>
-        <p:nvSpPr>
-          <p:cNvPr id="40" name="Rounded Rectangle 39"/>
-          <p:cNvSpPr/>
-          <p:nvPr/>
-        </p:nvSpPr>
-        <p:spPr>
-          <a:xfrm>
-            <a:off x="548640" y="6163056"/>
-            <a:ext cx="11064240" cy="566928"/>
-          </a:xfrm>
-          <a:prstGeom prst="roundRect">
-            <a:avLst>
-              <a:gd name="adj" fmla="val 8000"/>
-            </a:avLst>
-          </a:prstGeom>
-          <a:solidFill>
-            <a:srgbClr val="F4F6FA"/>
-          </a:solidFill>
-          <a:ln>
-            <a:noFill/>
-          </a:ln>
-          <a:effectLst/>
-        </p:spPr>
-        <p:style>
-          <a:lnRef idx="1">
-            <a:schemeClr val="accent1"/>
-          </a:lnRef>
-          <a:fillRef idx="3">
-            <a:schemeClr val="accent1"/>
-          </a:fillRef>
-          <a:effectRef idx="2">
-            <a:schemeClr val="accent1"/>
-          </a:effectRef>
-          <a:fontRef idx="minor">
-            <a:schemeClr val="lt1"/>
-          </a:fontRef>
-        </p:style>
-        <p:txBody>
-          <a:bodyPr rtlCol="0" anchor="ctr"/>
-          <a:lstStyle/>
-          <a:p>
-            <a:pPr algn="ctr"/>
-          </a:p>
-        </p:txBody>
-      </p:sp>
-      <p:sp>
-        <p:nvSpPr>
-          <p:cNvPr id="41" name="Rectangle 40"/>
-          <p:cNvSpPr/>
-          <p:nvPr/>
-        </p:nvSpPr>
-        <p:spPr>
-          <a:xfrm>
-            <a:off x="548640" y="6163056"/>
-            <a:ext cx="64008" cy="566928"/>
-          </a:xfrm>
-          <a:prstGeom prst="rect">
-            <a:avLst/>
-          </a:prstGeom>
-          <a:solidFill>
-            <a:srgbClr val="2F7AF2"/>
-          </a:solidFill>
-          <a:ln>
-            <a:noFill/>
-          </a:ln>
-          <a:effectLst/>
-        </p:spPr>
-        <p:style>
-          <a:lnRef idx="1">
-            <a:schemeClr val="accent1"/>
-          </a:lnRef>
-          <a:fillRef idx="3">
-            <a:schemeClr val="accent1"/>
-          </a:fillRef>
-          <a:effectRef idx="2">
-            <a:schemeClr val="accent1"/>
-          </a:effectRef>
-          <a:fontRef idx="minor">
-            <a:schemeClr val="lt1"/>
-          </a:fontRef>
-        </p:style>
-        <p:txBody>
-          <a:bodyPr rtlCol="0" anchor="ctr"/>
-          <a:lstStyle/>
-          <a:p>
-            <a:pPr algn="ctr"/>
-          </a:p>
-        </p:txBody>
-      </p:sp>
-      <p:sp>
-        <p:nvSpPr>
-          <p:cNvPr id="42" name="TextBox 41"/>
-          <p:cNvSpPr txBox="1"/>
-          <p:nvPr/>
-        </p:nvSpPr>
-        <p:spPr>
-          <a:xfrm>
-            <a:off x="777240" y="6236208"/>
-            <a:ext cx="6949440" cy="438912"/>
-          </a:xfrm>
-          <a:prstGeom prst="rect">
-            <a:avLst/>
-          </a:prstGeom>
-          <a:noFill/>
-        </p:spPr>
-        <p:txBody>
-          <a:bodyPr wrap="square" anchor="ctr" lIns="0" rIns="0" tIns="0" bIns="0">
-            <a:spAutoFit/>
-          </a:bodyPr>
-          <a:lstStyle/>
-          <a:p>
-            <a:pPr algn="l">
-              <a:lnSpc>
-                <a:spcPct val="105000"/>
-              </a:lnSpc>
-              <a:spcAft>
-                <a:spcPts val="0"/>
-              </a:spcAft>
-            </a:pPr>
-            <a:r>
-              <a:rPr sz="1250" b="1" i="0">
-                <a:solidFill>
-                  <a:srgbClr val="111827"/>
-                </a:solidFill>
-                <a:latin typeface="Segoe UI Semibold"/>
-              </a:rPr>
-              <a:t>Data-protection design posture</a:t>
-            </a:r>
-          </a:p>
-        </p:txBody>
-      </p:sp>
-      <p:sp>
-        <p:nvSpPr>
-          <p:cNvPr id="43" name="TextBox 42"/>
-          <p:cNvSpPr txBox="1"/>
-          <p:nvPr/>
-        </p:nvSpPr>
-        <p:spPr>
-          <a:xfrm>
-            <a:off x="7818120" y="6236208"/>
-            <a:ext cx="3657600" cy="438912"/>
-          </a:xfrm>
-          <a:prstGeom prst="rect">
-            <a:avLst/>
-          </a:prstGeom>
-          <a:noFill/>
-        </p:spPr>
-        <p:txBody>
-          <a:bodyPr wrap="square" anchor="ctr" lIns="0" rIns="0" tIns="0" bIns="0">
-            <a:spAutoFit/>
-          </a:bodyPr>
-          <a:lstStyle/>
-          <a:p>
-            <a:pPr algn="r">
-              <a:lnSpc>
-                <a:spcPct val="105000"/>
-              </a:lnSpc>
-              <a:spcAft>
-                <a:spcPts val="0"/>
-              </a:spcAft>
-            </a:pPr>
-            <a:r>
-              <a:rPr sz="1100" b="0" i="1">
-                <a:solidFill>
-                  <a:srgbClr val="616E82"/>
-                </a:solidFill>
-                <a:latin typeface="Segoe UI Semilight"/>
-              </a:rPr>
-              <a:t>Digital Personal Data Protection Act, 2023 — Section 17</a:t>
-            </a:r>
-          </a:p>
-        </p:txBody>
-      </p:sp>
-      <p:sp>
-        <p:nvSpPr>
-          <p:cNvPr id="44" name="Rounded Rectangle 43"/>
-          <p:cNvSpPr/>
-          <p:nvPr/>
-        </p:nvSpPr>
-        <p:spPr>
-          <a:xfrm>
-            <a:off x="548640" y="6821424"/>
-            <a:ext cx="11064240" cy="566928"/>
-          </a:xfrm>
-          <a:prstGeom prst="roundRect">
-            <a:avLst>
-              <a:gd name="adj" fmla="val 8000"/>
-            </a:avLst>
-          </a:prstGeom>
-          <a:solidFill>
-            <a:srgbClr val="F4F6FA"/>
-          </a:solidFill>
-          <a:ln>
-            <a:noFill/>
-          </a:ln>
-          <a:effectLst/>
-        </p:spPr>
-        <p:style>
-          <a:lnRef idx="1">
-            <a:schemeClr val="accent1"/>
-          </a:lnRef>
-          <a:fillRef idx="3">
-            <a:schemeClr val="accent1"/>
-          </a:fillRef>
-          <a:effectRef idx="2">
-            <a:schemeClr val="accent1"/>
-          </a:effectRef>
-          <a:fontRef idx="minor">
-            <a:schemeClr val="lt1"/>
-          </a:fontRef>
-        </p:style>
-        <p:txBody>
-          <a:bodyPr rtlCol="0" anchor="ctr"/>
-          <a:lstStyle/>
-          <a:p>
-            <a:pPr algn="ctr"/>
-          </a:p>
-        </p:txBody>
-      </p:sp>
-      <p:sp>
-        <p:nvSpPr>
-          <p:cNvPr id="45" name="Rectangle 44"/>
-          <p:cNvSpPr/>
-          <p:nvPr/>
-        </p:nvSpPr>
-        <p:spPr>
-          <a:xfrm>
-            <a:off x="548640" y="6821424"/>
-            <a:ext cx="64008" cy="566928"/>
-          </a:xfrm>
-          <a:prstGeom prst="rect">
-            <a:avLst/>
-          </a:prstGeom>
-          <a:solidFill>
-            <a:srgbClr val="2F7AF2"/>
-          </a:solidFill>
-          <a:ln>
-            <a:noFill/>
-          </a:ln>
-          <a:effectLst/>
-        </p:spPr>
-        <p:style>
-          <a:lnRef idx="1">
-            <a:schemeClr val="accent1"/>
-          </a:lnRef>
-          <a:fillRef idx="3">
-            <a:schemeClr val="accent1"/>
-          </a:fillRef>
-          <a:effectRef idx="2">
-            <a:schemeClr val="accent1"/>
-          </a:effectRef>
-          <a:fontRef idx="minor">
-            <a:schemeClr val="lt1"/>
-          </a:fontRef>
-        </p:style>
-        <p:txBody>
-          <a:bodyPr rtlCol="0" anchor="ctr"/>
-          <a:lstStyle/>
-          <a:p>
-            <a:pPr algn="ctr"/>
-          </a:p>
-        </p:txBody>
-      </p:sp>
-      <p:sp>
-        <p:nvSpPr>
-          <p:cNvPr id="46" name="TextBox 45"/>
-          <p:cNvSpPr txBox="1"/>
-          <p:nvPr/>
-        </p:nvSpPr>
-        <p:spPr>
-          <a:xfrm>
-            <a:off x="777240" y="6894576"/>
-            <a:ext cx="6949440" cy="438912"/>
-          </a:xfrm>
-          <a:prstGeom prst="rect">
-            <a:avLst/>
-          </a:prstGeom>
-          <a:noFill/>
-        </p:spPr>
-        <p:txBody>
-          <a:bodyPr wrap="square" anchor="ctr" lIns="0" rIns="0" tIns="0" bIns="0">
-            <a:spAutoFit/>
-          </a:bodyPr>
-          <a:lstStyle/>
-          <a:p>
-            <a:pPr algn="l">
-              <a:lnSpc>
-                <a:spcPct val="105000"/>
-              </a:lnSpc>
-              <a:spcAft>
-                <a:spcPts val="0"/>
-              </a:spcAft>
-            </a:pPr>
-            <a:r>
-              <a:rPr sz="1250" b="1" i="0">
-                <a:solidFill>
-                  <a:srgbClr val="111827"/>
-                </a:solidFill>
-                <a:latin typeface="Segoe UI Semibold"/>
-              </a:rPr>
-              <a:t>UK National ANPR retention precedent</a:t>
-            </a:r>
-          </a:p>
-        </p:txBody>
-      </p:sp>
-      <p:sp>
-        <p:nvSpPr>
-          <p:cNvPr id="47" name="TextBox 46"/>
-          <p:cNvSpPr txBox="1"/>
-          <p:nvPr/>
-        </p:nvSpPr>
-        <p:spPr>
-          <a:xfrm>
-            <a:off x="7818120" y="6894576"/>
-            <a:ext cx="3657600" cy="438912"/>
-          </a:xfrm>
-          <a:prstGeom prst="rect">
-            <a:avLst/>
-          </a:prstGeom>
-          <a:noFill/>
-        </p:spPr>
-        <p:txBody>
-          <a:bodyPr wrap="square" anchor="ctr" lIns="0" rIns="0" tIns="0" bIns="0">
-            <a:spAutoFit/>
-          </a:bodyPr>
-          <a:lstStyle/>
-          <a:p>
-            <a:pPr algn="r">
-              <a:lnSpc>
-                <a:spcPct val="105000"/>
-              </a:lnSpc>
-              <a:spcAft>
-                <a:spcPts val="0"/>
-              </a:spcAft>
-            </a:pPr>
-            <a:r>
-              <a:rPr sz="1100" b="0" i="1">
-                <a:solidFill>
-                  <a:srgbClr val="616E82"/>
-                </a:solidFill>
-                <a:latin typeface="Segoe UI Semilight"/>
-              </a:rPr>
-              <a:t>cited in RESEARCH_EXISTING_SYSTEMS.md §6</a:t>
-            </a:r>
-          </a:p>
-        </p:txBody>
-      </p:sp>
-      <p:sp>
-        <p:nvSpPr>
-          <p:cNvPr id="48" name="TextBox 47"/>
-          <p:cNvSpPr txBox="1"/>
-          <p:nvPr/>
-        </p:nvSpPr>
-        <p:spPr>
-          <a:xfrm>
-            <a:off x="548640" y="7552944"/>
-            <a:ext cx="11064240" cy="365760"/>
+            <a:off x="804672" y="2377440"/>
+            <a:ext cx="3136392" cy="292608"/>
           </a:xfrm>
           <a:prstGeom prst="rect">
             <a:avLst/>
@@ -24879,7 +23445,1441 @@
               </a:spcAft>
             </a:pPr>
             <a:r>
-              <a:rPr sz="1150" b="0" i="1">
+              <a:rPr sz="1050" b="0" i="1">
+                <a:solidFill>
+                  <a:srgbClr val="616E82"/>
+                </a:solidFill>
+                <a:latin typeface="Segoe UI Semilight"/>
+              </a:rPr>
+              <a:t>sentinel.gujarat.gov.in</a:t>
+            </a:r>
+          </a:p>
+        </p:txBody>
+      </p:sp>
+      <p:sp>
+        <p:nvSpPr>
+          <p:cNvPr id="16" name="Rounded Rectangle 15"/>
+          <p:cNvSpPr/>
+          <p:nvPr/>
+        </p:nvSpPr>
+        <p:spPr>
+          <a:xfrm>
+            <a:off x="548640" y="2926080"/>
+            <a:ext cx="3593592" cy="1207008"/>
+          </a:xfrm>
+          <a:prstGeom prst="roundRect">
+            <a:avLst>
+              <a:gd name="adj" fmla="val 8000"/>
+            </a:avLst>
+          </a:prstGeom>
+          <a:solidFill>
+            <a:srgbClr val="F4F6FA"/>
+          </a:solidFill>
+          <a:ln>
+            <a:noFill/>
+          </a:ln>
+          <a:effectLst/>
+        </p:spPr>
+        <p:style>
+          <a:lnRef idx="1">
+            <a:schemeClr val="accent1"/>
+          </a:lnRef>
+          <a:fillRef idx="3">
+            <a:schemeClr val="accent1"/>
+          </a:fillRef>
+          <a:effectRef idx="2">
+            <a:schemeClr val="accent1"/>
+          </a:effectRef>
+          <a:fontRef idx="minor">
+            <a:schemeClr val="lt1"/>
+          </a:fontRef>
+        </p:style>
+        <p:txBody>
+          <a:bodyPr rtlCol="0" anchor="ctr"/>
+          <a:lstStyle/>
+          <a:p>
+            <a:pPr algn="ctr"/>
+          </a:p>
+        </p:txBody>
+      </p:sp>
+      <p:sp>
+        <p:nvSpPr>
+          <p:cNvPr id="17" name="Rectangle 16"/>
+          <p:cNvSpPr/>
+          <p:nvPr/>
+        </p:nvSpPr>
+        <p:spPr>
+          <a:xfrm>
+            <a:off x="548640" y="2926080"/>
+            <a:ext cx="64008" cy="1207008"/>
+          </a:xfrm>
+          <a:prstGeom prst="rect">
+            <a:avLst/>
+          </a:prstGeom>
+          <a:solidFill>
+            <a:srgbClr val="2F7AF2"/>
+          </a:solidFill>
+          <a:ln>
+            <a:noFill/>
+          </a:ln>
+          <a:effectLst/>
+        </p:spPr>
+        <p:style>
+          <a:lnRef idx="1">
+            <a:schemeClr val="accent1"/>
+          </a:lnRef>
+          <a:fillRef idx="3">
+            <a:schemeClr val="accent1"/>
+          </a:fillRef>
+          <a:effectRef idx="2">
+            <a:schemeClr val="accent1"/>
+          </a:effectRef>
+          <a:fontRef idx="minor">
+            <a:schemeClr val="lt1"/>
+          </a:fontRef>
+        </p:style>
+        <p:txBody>
+          <a:bodyPr rtlCol="0" anchor="ctr"/>
+          <a:lstStyle/>
+          <a:p>
+            <a:pPr algn="ctr"/>
+          </a:p>
+        </p:txBody>
+      </p:sp>
+      <p:sp>
+        <p:nvSpPr>
+          <p:cNvPr id="18" name="TextBox 17"/>
+          <p:cNvSpPr txBox="1"/>
+          <p:nvPr/>
+        </p:nvSpPr>
+        <p:spPr>
+          <a:xfrm>
+            <a:off x="804672" y="3090672"/>
+            <a:ext cx="3136392" cy="822960"/>
+          </a:xfrm>
+          <a:prstGeom prst="rect">
+            <a:avLst/>
+          </a:prstGeom>
+          <a:noFill/>
+        </p:spPr>
+        <p:txBody>
+          <a:bodyPr wrap="square" anchor="t" lIns="0" rIns="0" tIns="0" bIns="0">
+            <a:spAutoFit/>
+          </a:bodyPr>
+          <a:lstStyle/>
+          <a:p>
+            <a:pPr algn="l">
+              <a:lnSpc>
+                <a:spcPct val="115000"/>
+              </a:lnSpc>
+              <a:spcAft>
+                <a:spcPts val="0"/>
+              </a:spcAft>
+            </a:pPr>
+            <a:r>
+              <a:rPr sz="1300" b="1" i="0">
+                <a:solidFill>
+                  <a:srgbClr val="111827"/>
+                </a:solidFill>
+                <a:latin typeface="Segoe UI Semibold"/>
+              </a:rPr>
+              <a:t>Only 3.8% of ANPR-detected violations reach enforcement</a:t>
+            </a:r>
+          </a:p>
+        </p:txBody>
+      </p:sp>
+      <p:sp>
+        <p:nvSpPr>
+          <p:cNvPr id="19" name="TextBox 18"/>
+          <p:cNvSpPr txBox="1"/>
+          <p:nvPr/>
+        </p:nvSpPr>
+        <p:spPr>
+          <a:xfrm>
+            <a:off x="804672" y="3749040"/>
+            <a:ext cx="3136392" cy="292608"/>
+          </a:xfrm>
+          <a:prstGeom prst="rect">
+            <a:avLst/>
+          </a:prstGeom>
+          <a:noFill/>
+        </p:spPr>
+        <p:txBody>
+          <a:bodyPr wrap="square" anchor="t" lIns="0" rIns="0" tIns="0" bIns="0">
+            <a:spAutoFit/>
+          </a:bodyPr>
+          <a:lstStyle/>
+          <a:p>
+            <a:pPr algn="l">
+              <a:lnSpc>
+                <a:spcPct val="100000"/>
+              </a:lnSpc>
+              <a:spcAft>
+                <a:spcPts val="0"/>
+              </a:spcAft>
+            </a:pPr>
+            <a:r>
+              <a:rPr sz="1050" b="0" i="1">
+                <a:solidFill>
+                  <a:srgbClr val="616E82"/>
+                </a:solidFill>
+                <a:latin typeface="Segoe UI Semilight"/>
+              </a:rPr>
+              <a:t>CAG audit, 2025</a:t>
+            </a:r>
+          </a:p>
+        </p:txBody>
+      </p:sp>
+      <p:sp>
+        <p:nvSpPr>
+          <p:cNvPr id="20" name="Rounded Rectangle 19"/>
+          <p:cNvSpPr/>
+          <p:nvPr/>
+        </p:nvSpPr>
+        <p:spPr>
+          <a:xfrm>
+            <a:off x="548640" y="4297680"/>
+            <a:ext cx="3593592" cy="1207008"/>
+          </a:xfrm>
+          <a:prstGeom prst="roundRect">
+            <a:avLst>
+              <a:gd name="adj" fmla="val 8000"/>
+            </a:avLst>
+          </a:prstGeom>
+          <a:solidFill>
+            <a:srgbClr val="F4F6FA"/>
+          </a:solidFill>
+          <a:ln>
+            <a:noFill/>
+          </a:ln>
+          <a:effectLst/>
+        </p:spPr>
+        <p:style>
+          <a:lnRef idx="1">
+            <a:schemeClr val="accent1"/>
+          </a:lnRef>
+          <a:fillRef idx="3">
+            <a:schemeClr val="accent1"/>
+          </a:fillRef>
+          <a:effectRef idx="2">
+            <a:schemeClr val="accent1"/>
+          </a:effectRef>
+          <a:fontRef idx="minor">
+            <a:schemeClr val="lt1"/>
+          </a:fontRef>
+        </p:style>
+        <p:txBody>
+          <a:bodyPr rtlCol="0" anchor="ctr"/>
+          <a:lstStyle/>
+          <a:p>
+            <a:pPr algn="ctr"/>
+          </a:p>
+        </p:txBody>
+      </p:sp>
+      <p:sp>
+        <p:nvSpPr>
+          <p:cNvPr id="21" name="Rectangle 20"/>
+          <p:cNvSpPr/>
+          <p:nvPr/>
+        </p:nvSpPr>
+        <p:spPr>
+          <a:xfrm>
+            <a:off x="548640" y="4297680"/>
+            <a:ext cx="64008" cy="1207008"/>
+          </a:xfrm>
+          <a:prstGeom prst="rect">
+            <a:avLst/>
+          </a:prstGeom>
+          <a:solidFill>
+            <a:srgbClr val="2F7AF2"/>
+          </a:solidFill>
+          <a:ln>
+            <a:noFill/>
+          </a:ln>
+          <a:effectLst/>
+        </p:spPr>
+        <p:style>
+          <a:lnRef idx="1">
+            <a:schemeClr val="accent1"/>
+          </a:lnRef>
+          <a:fillRef idx="3">
+            <a:schemeClr val="accent1"/>
+          </a:fillRef>
+          <a:effectRef idx="2">
+            <a:schemeClr val="accent1"/>
+          </a:effectRef>
+          <a:fontRef idx="minor">
+            <a:schemeClr val="lt1"/>
+          </a:fontRef>
+        </p:style>
+        <p:txBody>
+          <a:bodyPr rtlCol="0" anchor="ctr"/>
+          <a:lstStyle/>
+          <a:p>
+            <a:pPr algn="ctr"/>
+          </a:p>
+        </p:txBody>
+      </p:sp>
+      <p:sp>
+        <p:nvSpPr>
+          <p:cNvPr id="22" name="TextBox 21"/>
+          <p:cNvSpPr txBox="1"/>
+          <p:nvPr/>
+        </p:nvSpPr>
+        <p:spPr>
+          <a:xfrm>
+            <a:off x="804672" y="4462272"/>
+            <a:ext cx="3136392" cy="822960"/>
+          </a:xfrm>
+          <a:prstGeom prst="rect">
+            <a:avLst/>
+          </a:prstGeom>
+          <a:noFill/>
+        </p:spPr>
+        <p:txBody>
+          <a:bodyPr wrap="square" anchor="t" lIns="0" rIns="0" tIns="0" bIns="0">
+            <a:spAutoFit/>
+          </a:bodyPr>
+          <a:lstStyle/>
+          <a:p>
+            <a:pPr algn="l">
+              <a:lnSpc>
+                <a:spcPct val="115000"/>
+              </a:lnSpc>
+              <a:spcAft>
+                <a:spcPts val="0"/>
+              </a:spcAft>
+            </a:pPr>
+            <a:r>
+              <a:rPr sz="1300" b="1" i="0">
+                <a:solidFill>
+                  <a:srgbClr val="111827"/>
+                </a:solidFill>
+                <a:latin typeface="Segoe UI Semibold"/>
+              </a:rPr>
+              <a:t>Appearance-link false-positive rate (41.87%), measured on real sandbox data</a:t>
+            </a:r>
+          </a:p>
+        </p:txBody>
+      </p:sp>
+      <p:sp>
+        <p:nvSpPr>
+          <p:cNvPr id="23" name="TextBox 22"/>
+          <p:cNvSpPr txBox="1"/>
+          <p:nvPr/>
+        </p:nvSpPr>
+        <p:spPr>
+          <a:xfrm>
+            <a:off x="804672" y="5120640"/>
+            <a:ext cx="3136392" cy="292608"/>
+          </a:xfrm>
+          <a:prstGeom prst="rect">
+            <a:avLst/>
+          </a:prstGeom>
+          <a:noFill/>
+        </p:spPr>
+        <p:txBody>
+          <a:bodyPr wrap="square" anchor="t" lIns="0" rIns="0" tIns="0" bIns="0">
+            <a:spAutoFit/>
+          </a:bodyPr>
+          <a:lstStyle/>
+          <a:p>
+            <a:pPr algn="l">
+              <a:lnSpc>
+                <a:spcPct val="100000"/>
+              </a:lnSpc>
+              <a:spcAft>
+                <a:spcPts val="0"/>
+              </a:spcAft>
+            </a:pPr>
+            <a:r>
+              <a:rPr sz="1050" b="0" i="1">
+                <a:solidFill>
+                  <a:srgbClr val="616E82"/>
+                </a:solidFill>
+                <a:latin typeface="Segoe UI Semilight"/>
+              </a:rPr>
+              <a:t>calibrate_embedding_threshold.py, project test</a:t>
+            </a:r>
+          </a:p>
+        </p:txBody>
+      </p:sp>
+      <p:sp>
+        <p:nvSpPr>
+          <p:cNvPr id="24" name="Rounded Rectangle 23"/>
+          <p:cNvSpPr/>
+          <p:nvPr/>
+        </p:nvSpPr>
+        <p:spPr>
+          <a:xfrm>
+            <a:off x="4279392" y="1554480"/>
+            <a:ext cx="3593592" cy="1207008"/>
+          </a:xfrm>
+          <a:prstGeom prst="roundRect">
+            <a:avLst>
+              <a:gd name="adj" fmla="val 8000"/>
+            </a:avLst>
+          </a:prstGeom>
+          <a:solidFill>
+            <a:srgbClr val="F4F6FA"/>
+          </a:solidFill>
+          <a:ln>
+            <a:noFill/>
+          </a:ln>
+          <a:effectLst/>
+        </p:spPr>
+        <p:style>
+          <a:lnRef idx="1">
+            <a:schemeClr val="accent1"/>
+          </a:lnRef>
+          <a:fillRef idx="3">
+            <a:schemeClr val="accent1"/>
+          </a:fillRef>
+          <a:effectRef idx="2">
+            <a:schemeClr val="accent1"/>
+          </a:effectRef>
+          <a:fontRef idx="minor">
+            <a:schemeClr val="lt1"/>
+          </a:fontRef>
+        </p:style>
+        <p:txBody>
+          <a:bodyPr rtlCol="0" anchor="ctr"/>
+          <a:lstStyle/>
+          <a:p>
+            <a:pPr algn="ctr"/>
+          </a:p>
+        </p:txBody>
+      </p:sp>
+      <p:sp>
+        <p:nvSpPr>
+          <p:cNvPr id="25" name="Rectangle 24"/>
+          <p:cNvSpPr/>
+          <p:nvPr/>
+        </p:nvSpPr>
+        <p:spPr>
+          <a:xfrm>
+            <a:off x="4279392" y="1554480"/>
+            <a:ext cx="64008" cy="1207008"/>
+          </a:xfrm>
+          <a:prstGeom prst="rect">
+            <a:avLst/>
+          </a:prstGeom>
+          <a:solidFill>
+            <a:srgbClr val="2F7AF2"/>
+          </a:solidFill>
+          <a:ln>
+            <a:noFill/>
+          </a:ln>
+          <a:effectLst/>
+        </p:spPr>
+        <p:style>
+          <a:lnRef idx="1">
+            <a:schemeClr val="accent1"/>
+          </a:lnRef>
+          <a:fillRef idx="3">
+            <a:schemeClr val="accent1"/>
+          </a:fillRef>
+          <a:effectRef idx="2">
+            <a:schemeClr val="accent1"/>
+          </a:effectRef>
+          <a:fontRef idx="minor">
+            <a:schemeClr val="lt1"/>
+          </a:fontRef>
+        </p:style>
+        <p:txBody>
+          <a:bodyPr rtlCol="0" anchor="ctr"/>
+          <a:lstStyle/>
+          <a:p>
+            <a:pPr algn="ctr"/>
+          </a:p>
+        </p:txBody>
+      </p:sp>
+      <p:sp>
+        <p:nvSpPr>
+          <p:cNvPr id="26" name="TextBox 25"/>
+          <p:cNvSpPr txBox="1"/>
+          <p:nvPr/>
+        </p:nvSpPr>
+        <p:spPr>
+          <a:xfrm>
+            <a:off x="4535424" y="1719072"/>
+            <a:ext cx="3136392" cy="822960"/>
+          </a:xfrm>
+          <a:prstGeom prst="rect">
+            <a:avLst/>
+          </a:prstGeom>
+          <a:noFill/>
+        </p:spPr>
+        <p:txBody>
+          <a:bodyPr wrap="square" anchor="t" lIns="0" rIns="0" tIns="0" bIns="0">
+            <a:spAutoFit/>
+          </a:bodyPr>
+          <a:lstStyle/>
+          <a:p>
+            <a:pPr algn="l">
+              <a:lnSpc>
+                <a:spcPct val="115000"/>
+              </a:lnSpc>
+              <a:spcAft>
+                <a:spcPts val="0"/>
+              </a:spcAft>
+            </a:pPr>
+            <a:r>
+              <a:rPr sz="1300" b="1" i="0">
+                <a:solidFill>
+                  <a:srgbClr val="111827"/>
+                </a:solidFill>
+                <a:latin typeface="Segoe UI Semibold"/>
+              </a:rPr>
+              <a:t>VISWAS / NETRAM / TRINETRA scale (7,000+ cameras, 34 district centres)</a:t>
+            </a:r>
+          </a:p>
+        </p:txBody>
+      </p:sp>
+      <p:sp>
+        <p:nvSpPr>
+          <p:cNvPr id="27" name="TextBox 26"/>
+          <p:cNvSpPr txBox="1"/>
+          <p:nvPr/>
+        </p:nvSpPr>
+        <p:spPr>
+          <a:xfrm>
+            <a:off x="4535424" y="2377440"/>
+            <a:ext cx="3136392" cy="292608"/>
+          </a:xfrm>
+          <a:prstGeom prst="rect">
+            <a:avLst/>
+          </a:prstGeom>
+          <a:noFill/>
+        </p:spPr>
+        <p:txBody>
+          <a:bodyPr wrap="square" anchor="t" lIns="0" rIns="0" tIns="0" bIns="0">
+            <a:spAutoFit/>
+          </a:bodyPr>
+          <a:lstStyle/>
+          <a:p>
+            <a:pPr algn="l">
+              <a:lnSpc>
+                <a:spcPct val="100000"/>
+              </a:lnSpc>
+              <a:spcAft>
+                <a:spcPts val="0"/>
+              </a:spcAft>
+            </a:pPr>
+            <a:r>
+              <a:rPr sz="1050" b="0" i="1">
+                <a:solidFill>
+                  <a:srgbClr val="616E82"/>
+                </a:solidFill>
+                <a:latin typeface="Segoe UI Semilight"/>
+              </a:rPr>
+              <a:t>Gujarat Home Dept. public statements</a:t>
+            </a:r>
+          </a:p>
+        </p:txBody>
+      </p:sp>
+      <p:sp>
+        <p:nvSpPr>
+          <p:cNvPr id="28" name="Rounded Rectangle 27"/>
+          <p:cNvSpPr/>
+          <p:nvPr/>
+        </p:nvSpPr>
+        <p:spPr>
+          <a:xfrm>
+            <a:off x="4279392" y="2926080"/>
+            <a:ext cx="3593592" cy="1207008"/>
+          </a:xfrm>
+          <a:prstGeom prst="roundRect">
+            <a:avLst>
+              <a:gd name="adj" fmla="val 8000"/>
+            </a:avLst>
+          </a:prstGeom>
+          <a:solidFill>
+            <a:srgbClr val="F4F6FA"/>
+          </a:solidFill>
+          <a:ln>
+            <a:noFill/>
+          </a:ln>
+          <a:effectLst/>
+        </p:spPr>
+        <p:style>
+          <a:lnRef idx="1">
+            <a:schemeClr val="accent1"/>
+          </a:lnRef>
+          <a:fillRef idx="3">
+            <a:schemeClr val="accent1"/>
+          </a:fillRef>
+          <a:effectRef idx="2">
+            <a:schemeClr val="accent1"/>
+          </a:effectRef>
+          <a:fontRef idx="minor">
+            <a:schemeClr val="lt1"/>
+          </a:fontRef>
+        </p:style>
+        <p:txBody>
+          <a:bodyPr rtlCol="0" anchor="ctr"/>
+          <a:lstStyle/>
+          <a:p>
+            <a:pPr algn="ctr"/>
+          </a:p>
+        </p:txBody>
+      </p:sp>
+      <p:sp>
+        <p:nvSpPr>
+          <p:cNvPr id="29" name="Rectangle 28"/>
+          <p:cNvSpPr/>
+          <p:nvPr/>
+        </p:nvSpPr>
+        <p:spPr>
+          <a:xfrm>
+            <a:off x="4279392" y="2926080"/>
+            <a:ext cx="64008" cy="1207008"/>
+          </a:xfrm>
+          <a:prstGeom prst="rect">
+            <a:avLst/>
+          </a:prstGeom>
+          <a:solidFill>
+            <a:srgbClr val="2F7AF2"/>
+          </a:solidFill>
+          <a:ln>
+            <a:noFill/>
+          </a:ln>
+          <a:effectLst/>
+        </p:spPr>
+        <p:style>
+          <a:lnRef idx="1">
+            <a:schemeClr val="accent1"/>
+          </a:lnRef>
+          <a:fillRef idx="3">
+            <a:schemeClr val="accent1"/>
+          </a:fillRef>
+          <a:effectRef idx="2">
+            <a:schemeClr val="accent1"/>
+          </a:effectRef>
+          <a:fontRef idx="minor">
+            <a:schemeClr val="lt1"/>
+          </a:fontRef>
+        </p:style>
+        <p:txBody>
+          <a:bodyPr rtlCol="0" anchor="ctr"/>
+          <a:lstStyle/>
+          <a:p>
+            <a:pPr algn="ctr"/>
+          </a:p>
+        </p:txBody>
+      </p:sp>
+      <p:sp>
+        <p:nvSpPr>
+          <p:cNvPr id="30" name="TextBox 29"/>
+          <p:cNvSpPr txBox="1"/>
+          <p:nvPr/>
+        </p:nvSpPr>
+        <p:spPr>
+          <a:xfrm>
+            <a:off x="4535424" y="3090672"/>
+            <a:ext cx="3136392" cy="822960"/>
+          </a:xfrm>
+          <a:prstGeom prst="rect">
+            <a:avLst/>
+          </a:prstGeom>
+          <a:noFill/>
+        </p:spPr>
+        <p:txBody>
+          <a:bodyPr wrap="square" anchor="t" lIns="0" rIns="0" tIns="0" bIns="0">
+            <a:spAutoFit/>
+          </a:bodyPr>
+          <a:lstStyle/>
+          <a:p>
+            <a:pPr algn="l">
+              <a:lnSpc>
+                <a:spcPct val="115000"/>
+              </a:lnSpc>
+              <a:spcAft>
+                <a:spcPts val="0"/>
+              </a:spcAft>
+            </a:pPr>
+            <a:r>
+              <a:rPr sz="1300" b="1" i="0">
+                <a:solidFill>
+                  <a:srgbClr val="111827"/>
+                </a:solidFill>
+                <a:latin typeface="Segoe UI Semibold"/>
+              </a:rPr>
+              <a:t>Commercial ANPR/tracking precedent</a:t>
+            </a:r>
+          </a:p>
+        </p:txBody>
+      </p:sp>
+      <p:sp>
+        <p:nvSpPr>
+          <p:cNvPr id="31" name="TextBox 30"/>
+          <p:cNvSpPr txBox="1"/>
+          <p:nvPr/>
+        </p:nvSpPr>
+        <p:spPr>
+          <a:xfrm>
+            <a:off x="4535424" y="3749040"/>
+            <a:ext cx="3136392" cy="292608"/>
+          </a:xfrm>
+          <a:prstGeom prst="rect">
+            <a:avLst/>
+          </a:prstGeom>
+          <a:noFill/>
+        </p:spPr>
+        <p:txBody>
+          <a:bodyPr wrap="square" anchor="t" lIns="0" rIns="0" tIns="0" bIns="0">
+            <a:spAutoFit/>
+          </a:bodyPr>
+          <a:lstStyle/>
+          <a:p>
+            <a:pPr algn="l">
+              <a:lnSpc>
+                <a:spcPct val="100000"/>
+              </a:lnSpc>
+              <a:spcAft>
+                <a:spcPts val="0"/>
+              </a:spcAft>
+            </a:pPr>
+            <a:r>
+              <a:rPr sz="1050" b="0" i="1">
+                <a:solidFill>
+                  <a:srgbClr val="616E82"/>
+                </a:solidFill>
+                <a:latin typeface="Segoe UI Semilight"/>
+              </a:rPr>
+              <a:t>Staqu JARVIS, Videonetics, Vehant, Innefu</a:t>
+            </a:r>
+          </a:p>
+        </p:txBody>
+      </p:sp>
+      <p:sp>
+        <p:nvSpPr>
+          <p:cNvPr id="32" name="Rounded Rectangle 31"/>
+          <p:cNvSpPr/>
+          <p:nvPr/>
+        </p:nvSpPr>
+        <p:spPr>
+          <a:xfrm>
+            <a:off x="4279392" y="4297680"/>
+            <a:ext cx="3593592" cy="1207008"/>
+          </a:xfrm>
+          <a:prstGeom prst="roundRect">
+            <a:avLst>
+              <a:gd name="adj" fmla="val 8000"/>
+            </a:avLst>
+          </a:prstGeom>
+          <a:solidFill>
+            <a:srgbClr val="F4F6FA"/>
+          </a:solidFill>
+          <a:ln>
+            <a:noFill/>
+          </a:ln>
+          <a:effectLst/>
+        </p:spPr>
+        <p:style>
+          <a:lnRef idx="1">
+            <a:schemeClr val="accent1"/>
+          </a:lnRef>
+          <a:fillRef idx="3">
+            <a:schemeClr val="accent1"/>
+          </a:fillRef>
+          <a:effectRef idx="2">
+            <a:schemeClr val="accent1"/>
+          </a:effectRef>
+          <a:fontRef idx="minor">
+            <a:schemeClr val="lt1"/>
+          </a:fontRef>
+        </p:style>
+        <p:txBody>
+          <a:bodyPr rtlCol="0" anchor="ctr"/>
+          <a:lstStyle/>
+          <a:p>
+            <a:pPr algn="ctr"/>
+          </a:p>
+        </p:txBody>
+      </p:sp>
+      <p:sp>
+        <p:nvSpPr>
+          <p:cNvPr id="33" name="Rectangle 32"/>
+          <p:cNvSpPr/>
+          <p:nvPr/>
+        </p:nvSpPr>
+        <p:spPr>
+          <a:xfrm>
+            <a:off x="4279392" y="4297680"/>
+            <a:ext cx="64008" cy="1207008"/>
+          </a:xfrm>
+          <a:prstGeom prst="rect">
+            <a:avLst/>
+          </a:prstGeom>
+          <a:solidFill>
+            <a:srgbClr val="2F7AF2"/>
+          </a:solidFill>
+          <a:ln>
+            <a:noFill/>
+          </a:ln>
+          <a:effectLst/>
+        </p:spPr>
+        <p:style>
+          <a:lnRef idx="1">
+            <a:schemeClr val="accent1"/>
+          </a:lnRef>
+          <a:fillRef idx="3">
+            <a:schemeClr val="accent1"/>
+          </a:fillRef>
+          <a:effectRef idx="2">
+            <a:schemeClr val="accent1"/>
+          </a:effectRef>
+          <a:fontRef idx="minor">
+            <a:schemeClr val="lt1"/>
+          </a:fontRef>
+        </p:style>
+        <p:txBody>
+          <a:bodyPr rtlCol="0" anchor="ctr"/>
+          <a:lstStyle/>
+          <a:p>
+            <a:pPr algn="ctr"/>
+          </a:p>
+        </p:txBody>
+      </p:sp>
+      <p:sp>
+        <p:nvSpPr>
+          <p:cNvPr id="34" name="TextBox 33"/>
+          <p:cNvSpPr txBox="1"/>
+          <p:nvPr/>
+        </p:nvSpPr>
+        <p:spPr>
+          <a:xfrm>
+            <a:off x="4535424" y="4462272"/>
+            <a:ext cx="3136392" cy="822960"/>
+          </a:xfrm>
+          <a:prstGeom prst="rect">
+            <a:avLst/>
+          </a:prstGeom>
+          <a:noFill/>
+        </p:spPr>
+        <p:txBody>
+          <a:bodyPr wrap="square" anchor="t" lIns="0" rIns="0" tIns="0" bIns="0">
+            <a:spAutoFit/>
+          </a:bodyPr>
+          <a:lstStyle/>
+          <a:p>
+            <a:pPr algn="l">
+              <a:lnSpc>
+                <a:spcPct val="115000"/>
+              </a:lnSpc>
+              <a:spcAft>
+                <a:spcPts val="0"/>
+              </a:spcAft>
+            </a:pPr>
+            <a:r>
+              <a:rPr sz="1300" b="1" i="0">
+                <a:solidFill>
+                  <a:srgbClr val="111827"/>
+                </a:solidFill>
+                <a:latin typeface="Segoe UI Semibold"/>
+              </a:rPr>
+              <a:t>Field ANPR accuracy vs. lab benchmarks (71% misread rate cited)</a:t>
+            </a:r>
+          </a:p>
+        </p:txBody>
+      </p:sp>
+      <p:sp>
+        <p:nvSpPr>
+          <p:cNvPr id="35" name="TextBox 34"/>
+          <p:cNvSpPr txBox="1"/>
+          <p:nvPr/>
+        </p:nvSpPr>
+        <p:spPr>
+          <a:xfrm>
+            <a:off x="4535424" y="5120640"/>
+            <a:ext cx="3136392" cy="292608"/>
+          </a:xfrm>
+          <a:prstGeom prst="rect">
+            <a:avLst/>
+          </a:prstGeom>
+          <a:noFill/>
+        </p:spPr>
+        <p:txBody>
+          <a:bodyPr wrap="square" anchor="t" lIns="0" rIns="0" tIns="0" bIns="0">
+            <a:spAutoFit/>
+          </a:bodyPr>
+          <a:lstStyle/>
+          <a:p>
+            <a:pPr algn="l">
+              <a:lnSpc>
+                <a:spcPct val="100000"/>
+              </a:lnSpc>
+              <a:spcAft>
+                <a:spcPts val="0"/>
+              </a:spcAft>
+            </a:pPr>
+            <a:r>
+              <a:rPr sz="1050" b="0" i="1">
+                <a:solidFill>
+                  <a:srgbClr val="616E82"/>
+                </a:solidFill>
+                <a:latin typeface="Segoe UI Semilight"/>
+              </a:rPr>
+              <a:t>Business Insider / Gizmodo, Aug 2026; Davis Vanguard, Aug 2026</a:t>
+            </a:r>
+          </a:p>
+        </p:txBody>
+      </p:sp>
+      <p:sp>
+        <p:nvSpPr>
+          <p:cNvPr id="36" name="Rounded Rectangle 35"/>
+          <p:cNvSpPr/>
+          <p:nvPr/>
+        </p:nvSpPr>
+        <p:spPr>
+          <a:xfrm>
+            <a:off x="8010144" y="1554480"/>
+            <a:ext cx="3593592" cy="1207008"/>
+          </a:xfrm>
+          <a:prstGeom prst="roundRect">
+            <a:avLst>
+              <a:gd name="adj" fmla="val 8000"/>
+            </a:avLst>
+          </a:prstGeom>
+          <a:solidFill>
+            <a:srgbClr val="F4F6FA"/>
+          </a:solidFill>
+          <a:ln>
+            <a:noFill/>
+          </a:ln>
+          <a:effectLst/>
+        </p:spPr>
+        <p:style>
+          <a:lnRef idx="1">
+            <a:schemeClr val="accent1"/>
+          </a:lnRef>
+          <a:fillRef idx="3">
+            <a:schemeClr val="accent1"/>
+          </a:fillRef>
+          <a:effectRef idx="2">
+            <a:schemeClr val="accent1"/>
+          </a:effectRef>
+          <a:fontRef idx="minor">
+            <a:schemeClr val="lt1"/>
+          </a:fontRef>
+        </p:style>
+        <p:txBody>
+          <a:bodyPr rtlCol="0" anchor="ctr"/>
+          <a:lstStyle/>
+          <a:p>
+            <a:pPr algn="ctr"/>
+          </a:p>
+        </p:txBody>
+      </p:sp>
+      <p:sp>
+        <p:nvSpPr>
+          <p:cNvPr id="37" name="Rectangle 36"/>
+          <p:cNvSpPr/>
+          <p:nvPr/>
+        </p:nvSpPr>
+        <p:spPr>
+          <a:xfrm>
+            <a:off x="8010144" y="1554480"/>
+            <a:ext cx="64008" cy="1207008"/>
+          </a:xfrm>
+          <a:prstGeom prst="rect">
+            <a:avLst/>
+          </a:prstGeom>
+          <a:solidFill>
+            <a:srgbClr val="2F7AF2"/>
+          </a:solidFill>
+          <a:ln>
+            <a:noFill/>
+          </a:ln>
+          <a:effectLst/>
+        </p:spPr>
+        <p:style>
+          <a:lnRef idx="1">
+            <a:schemeClr val="accent1"/>
+          </a:lnRef>
+          <a:fillRef idx="3">
+            <a:schemeClr val="accent1"/>
+          </a:fillRef>
+          <a:effectRef idx="2">
+            <a:schemeClr val="accent1"/>
+          </a:effectRef>
+          <a:fontRef idx="minor">
+            <a:schemeClr val="lt1"/>
+          </a:fontRef>
+        </p:style>
+        <p:txBody>
+          <a:bodyPr rtlCol="0" anchor="ctr"/>
+          <a:lstStyle/>
+          <a:p>
+            <a:pPr algn="ctr"/>
+          </a:p>
+        </p:txBody>
+      </p:sp>
+      <p:sp>
+        <p:nvSpPr>
+          <p:cNvPr id="38" name="TextBox 37"/>
+          <p:cNvSpPr txBox="1"/>
+          <p:nvPr/>
+        </p:nvSpPr>
+        <p:spPr>
+          <a:xfrm>
+            <a:off x="8266176" y="1719072"/>
+            <a:ext cx="3136392" cy="822960"/>
+          </a:xfrm>
+          <a:prstGeom prst="rect">
+            <a:avLst/>
+          </a:prstGeom>
+          <a:noFill/>
+        </p:spPr>
+        <p:txBody>
+          <a:bodyPr wrap="square" anchor="t" lIns="0" rIns="0" tIns="0" bIns="0">
+            <a:spAutoFit/>
+          </a:bodyPr>
+          <a:lstStyle/>
+          <a:p>
+            <a:pPr algn="l">
+              <a:lnSpc>
+                <a:spcPct val="115000"/>
+              </a:lnSpc>
+              <a:spcAft>
+                <a:spcPts val="0"/>
+              </a:spcAft>
+            </a:pPr>
+            <a:r>
+              <a:rPr sz="1300" b="1" i="0">
+                <a:solidFill>
+                  <a:srgbClr val="111827"/>
+                </a:solidFill>
+                <a:latin typeface="Segoe UI Semibold"/>
+              </a:rPr>
+              <a:t>Indian-traffic detector benchmark, evaluated not integrated</a:t>
+            </a:r>
+          </a:p>
+        </p:txBody>
+      </p:sp>
+      <p:sp>
+        <p:nvSpPr>
+          <p:cNvPr id="39" name="TextBox 38"/>
+          <p:cNvSpPr txBox="1"/>
+          <p:nvPr/>
+        </p:nvSpPr>
+        <p:spPr>
+          <a:xfrm>
+            <a:off x="8266176" y="2377440"/>
+            <a:ext cx="3136392" cy="292608"/>
+          </a:xfrm>
+          <a:prstGeom prst="rect">
+            <a:avLst/>
+          </a:prstGeom>
+          <a:noFill/>
+        </p:spPr>
+        <p:txBody>
+          <a:bodyPr wrap="square" anchor="t" lIns="0" rIns="0" tIns="0" bIns="0">
+            <a:spAutoFit/>
+          </a:bodyPr>
+          <a:lstStyle/>
+          <a:p>
+            <a:pPr algn="l">
+              <a:lnSpc>
+                <a:spcPct val="100000"/>
+              </a:lnSpc>
+              <a:spcAft>
+                <a:spcPts val="0"/>
+              </a:spcAft>
+            </a:pPr>
+            <a:r>
+              <a:rPr sz="1050" b="0" i="1">
+                <a:solidFill>
+                  <a:srgbClr val="616E82"/>
+                </a:solidFill>
+                <a:latin typeface="Segoe UI Semilight"/>
+              </a:rPr>
+              <a:t>IISc AI for Integrated Mobility — UVH-26, arXiv 2511.02563</a:t>
+            </a:r>
+          </a:p>
+        </p:txBody>
+      </p:sp>
+      <p:sp>
+        <p:nvSpPr>
+          <p:cNvPr id="40" name="Rounded Rectangle 39"/>
+          <p:cNvSpPr/>
+          <p:nvPr/>
+        </p:nvSpPr>
+        <p:spPr>
+          <a:xfrm>
+            <a:off x="8010144" y="2926080"/>
+            <a:ext cx="3593592" cy="1207008"/>
+          </a:xfrm>
+          <a:prstGeom prst="roundRect">
+            <a:avLst>
+              <a:gd name="adj" fmla="val 8000"/>
+            </a:avLst>
+          </a:prstGeom>
+          <a:solidFill>
+            <a:srgbClr val="F4F6FA"/>
+          </a:solidFill>
+          <a:ln>
+            <a:noFill/>
+          </a:ln>
+          <a:effectLst/>
+        </p:spPr>
+        <p:style>
+          <a:lnRef idx="1">
+            <a:schemeClr val="accent1"/>
+          </a:lnRef>
+          <a:fillRef idx="3">
+            <a:schemeClr val="accent1"/>
+          </a:fillRef>
+          <a:effectRef idx="2">
+            <a:schemeClr val="accent1"/>
+          </a:effectRef>
+          <a:fontRef idx="minor">
+            <a:schemeClr val="lt1"/>
+          </a:fontRef>
+        </p:style>
+        <p:txBody>
+          <a:bodyPr rtlCol="0" anchor="ctr"/>
+          <a:lstStyle/>
+          <a:p>
+            <a:pPr algn="ctr"/>
+          </a:p>
+        </p:txBody>
+      </p:sp>
+      <p:sp>
+        <p:nvSpPr>
+          <p:cNvPr id="41" name="Rectangle 40"/>
+          <p:cNvSpPr/>
+          <p:nvPr/>
+        </p:nvSpPr>
+        <p:spPr>
+          <a:xfrm>
+            <a:off x="8010144" y="2926080"/>
+            <a:ext cx="64008" cy="1207008"/>
+          </a:xfrm>
+          <a:prstGeom prst="rect">
+            <a:avLst/>
+          </a:prstGeom>
+          <a:solidFill>
+            <a:srgbClr val="2F7AF2"/>
+          </a:solidFill>
+          <a:ln>
+            <a:noFill/>
+          </a:ln>
+          <a:effectLst/>
+        </p:spPr>
+        <p:style>
+          <a:lnRef idx="1">
+            <a:schemeClr val="accent1"/>
+          </a:lnRef>
+          <a:fillRef idx="3">
+            <a:schemeClr val="accent1"/>
+          </a:fillRef>
+          <a:effectRef idx="2">
+            <a:schemeClr val="accent1"/>
+          </a:effectRef>
+          <a:fontRef idx="minor">
+            <a:schemeClr val="lt1"/>
+          </a:fontRef>
+        </p:style>
+        <p:txBody>
+          <a:bodyPr rtlCol="0" anchor="ctr"/>
+          <a:lstStyle/>
+          <a:p>
+            <a:pPr algn="ctr"/>
+          </a:p>
+        </p:txBody>
+      </p:sp>
+      <p:sp>
+        <p:nvSpPr>
+          <p:cNvPr id="42" name="TextBox 41"/>
+          <p:cNvSpPr txBox="1"/>
+          <p:nvPr/>
+        </p:nvSpPr>
+        <p:spPr>
+          <a:xfrm>
+            <a:off x="8266176" y="3090672"/>
+            <a:ext cx="3136392" cy="822960"/>
+          </a:xfrm>
+          <a:prstGeom prst="rect">
+            <a:avLst/>
+          </a:prstGeom>
+          <a:noFill/>
+        </p:spPr>
+        <p:txBody>
+          <a:bodyPr wrap="square" anchor="t" lIns="0" rIns="0" tIns="0" bIns="0">
+            <a:spAutoFit/>
+          </a:bodyPr>
+          <a:lstStyle/>
+          <a:p>
+            <a:pPr algn="l">
+              <a:lnSpc>
+                <a:spcPct val="115000"/>
+              </a:lnSpc>
+              <a:spcAft>
+                <a:spcPts val="0"/>
+              </a:spcAft>
+            </a:pPr>
+            <a:r>
+              <a:rPr sz="1300" b="1" i="0">
+                <a:solidFill>
+                  <a:srgbClr val="111827"/>
+                </a:solidFill>
+                <a:latin typeface="Segoe UI Semibold"/>
+              </a:rPr>
+              <a:t>Data-protection design posture</a:t>
+            </a:r>
+          </a:p>
+        </p:txBody>
+      </p:sp>
+      <p:sp>
+        <p:nvSpPr>
+          <p:cNvPr id="43" name="TextBox 42"/>
+          <p:cNvSpPr txBox="1"/>
+          <p:nvPr/>
+        </p:nvSpPr>
+        <p:spPr>
+          <a:xfrm>
+            <a:off x="8266176" y="3749040"/>
+            <a:ext cx="3136392" cy="292608"/>
+          </a:xfrm>
+          <a:prstGeom prst="rect">
+            <a:avLst/>
+          </a:prstGeom>
+          <a:noFill/>
+        </p:spPr>
+        <p:txBody>
+          <a:bodyPr wrap="square" anchor="t" lIns="0" rIns="0" tIns="0" bIns="0">
+            <a:spAutoFit/>
+          </a:bodyPr>
+          <a:lstStyle/>
+          <a:p>
+            <a:pPr algn="l">
+              <a:lnSpc>
+                <a:spcPct val="100000"/>
+              </a:lnSpc>
+              <a:spcAft>
+                <a:spcPts val="0"/>
+              </a:spcAft>
+            </a:pPr>
+            <a:r>
+              <a:rPr sz="1050" b="0" i="1">
+                <a:solidFill>
+                  <a:srgbClr val="616E82"/>
+                </a:solidFill>
+                <a:latin typeface="Segoe UI Semilight"/>
+              </a:rPr>
+              <a:t>Digital Personal Data Protection Act, 2023 — Section 17</a:t>
+            </a:r>
+          </a:p>
+        </p:txBody>
+      </p:sp>
+      <p:sp>
+        <p:nvSpPr>
+          <p:cNvPr id="44" name="Rounded Rectangle 43"/>
+          <p:cNvSpPr/>
+          <p:nvPr/>
+        </p:nvSpPr>
+        <p:spPr>
+          <a:xfrm>
+            <a:off x="8010144" y="4297680"/>
+            <a:ext cx="3593592" cy="1207008"/>
+          </a:xfrm>
+          <a:prstGeom prst="roundRect">
+            <a:avLst>
+              <a:gd name="adj" fmla="val 8000"/>
+            </a:avLst>
+          </a:prstGeom>
+          <a:solidFill>
+            <a:srgbClr val="F4F6FA"/>
+          </a:solidFill>
+          <a:ln>
+            <a:noFill/>
+          </a:ln>
+          <a:effectLst/>
+        </p:spPr>
+        <p:style>
+          <a:lnRef idx="1">
+            <a:schemeClr val="accent1"/>
+          </a:lnRef>
+          <a:fillRef idx="3">
+            <a:schemeClr val="accent1"/>
+          </a:fillRef>
+          <a:effectRef idx="2">
+            <a:schemeClr val="accent1"/>
+          </a:effectRef>
+          <a:fontRef idx="minor">
+            <a:schemeClr val="lt1"/>
+          </a:fontRef>
+        </p:style>
+        <p:txBody>
+          <a:bodyPr rtlCol="0" anchor="ctr"/>
+          <a:lstStyle/>
+          <a:p>
+            <a:pPr algn="ctr"/>
+          </a:p>
+        </p:txBody>
+      </p:sp>
+      <p:sp>
+        <p:nvSpPr>
+          <p:cNvPr id="45" name="Rectangle 44"/>
+          <p:cNvSpPr/>
+          <p:nvPr/>
+        </p:nvSpPr>
+        <p:spPr>
+          <a:xfrm>
+            <a:off x="8010144" y="4297680"/>
+            <a:ext cx="64008" cy="1207008"/>
+          </a:xfrm>
+          <a:prstGeom prst="rect">
+            <a:avLst/>
+          </a:prstGeom>
+          <a:solidFill>
+            <a:srgbClr val="2F7AF2"/>
+          </a:solidFill>
+          <a:ln>
+            <a:noFill/>
+          </a:ln>
+          <a:effectLst/>
+        </p:spPr>
+        <p:style>
+          <a:lnRef idx="1">
+            <a:schemeClr val="accent1"/>
+          </a:lnRef>
+          <a:fillRef idx="3">
+            <a:schemeClr val="accent1"/>
+          </a:fillRef>
+          <a:effectRef idx="2">
+            <a:schemeClr val="accent1"/>
+          </a:effectRef>
+          <a:fontRef idx="minor">
+            <a:schemeClr val="lt1"/>
+          </a:fontRef>
+        </p:style>
+        <p:txBody>
+          <a:bodyPr rtlCol="0" anchor="ctr"/>
+          <a:lstStyle/>
+          <a:p>
+            <a:pPr algn="ctr"/>
+          </a:p>
+        </p:txBody>
+      </p:sp>
+      <p:sp>
+        <p:nvSpPr>
+          <p:cNvPr id="46" name="TextBox 45"/>
+          <p:cNvSpPr txBox="1"/>
+          <p:nvPr/>
+        </p:nvSpPr>
+        <p:spPr>
+          <a:xfrm>
+            <a:off x="8266176" y="4462272"/>
+            <a:ext cx="3136392" cy="822960"/>
+          </a:xfrm>
+          <a:prstGeom prst="rect">
+            <a:avLst/>
+          </a:prstGeom>
+          <a:noFill/>
+        </p:spPr>
+        <p:txBody>
+          <a:bodyPr wrap="square" anchor="t" lIns="0" rIns="0" tIns="0" bIns="0">
+            <a:spAutoFit/>
+          </a:bodyPr>
+          <a:lstStyle/>
+          <a:p>
+            <a:pPr algn="l">
+              <a:lnSpc>
+                <a:spcPct val="115000"/>
+              </a:lnSpc>
+              <a:spcAft>
+                <a:spcPts val="0"/>
+              </a:spcAft>
+            </a:pPr>
+            <a:r>
+              <a:rPr sz="1300" b="1" i="0">
+                <a:solidFill>
+                  <a:srgbClr val="111827"/>
+                </a:solidFill>
+                <a:latin typeface="Segoe UI Semibold"/>
+              </a:rPr>
+              <a:t>UK National ANPR retention precedent</a:t>
+            </a:r>
+          </a:p>
+        </p:txBody>
+      </p:sp>
+      <p:sp>
+        <p:nvSpPr>
+          <p:cNvPr id="47" name="TextBox 46"/>
+          <p:cNvSpPr txBox="1"/>
+          <p:nvPr/>
+        </p:nvSpPr>
+        <p:spPr>
+          <a:xfrm>
+            <a:off x="8266176" y="5120640"/>
+            <a:ext cx="3136392" cy="292608"/>
+          </a:xfrm>
+          <a:prstGeom prst="rect">
+            <a:avLst/>
+          </a:prstGeom>
+          <a:noFill/>
+        </p:spPr>
+        <p:txBody>
+          <a:bodyPr wrap="square" anchor="t" lIns="0" rIns="0" tIns="0" bIns="0">
+            <a:spAutoFit/>
+          </a:bodyPr>
+          <a:lstStyle/>
+          <a:p>
+            <a:pPr algn="l">
+              <a:lnSpc>
+                <a:spcPct val="100000"/>
+              </a:lnSpc>
+              <a:spcAft>
+                <a:spcPts val="0"/>
+              </a:spcAft>
+            </a:pPr>
+            <a:r>
+              <a:rPr sz="1050" b="0" i="1">
+                <a:solidFill>
+                  <a:srgbClr val="616E82"/>
+                </a:solidFill>
+                <a:latin typeface="Segoe UI Semilight"/>
+              </a:rPr>
+              <a:t>cited in RESEARCH_EXISTING_SYSTEMS.md §6</a:t>
+            </a:r>
+          </a:p>
+        </p:txBody>
+      </p:sp>
+      <p:sp>
+        <p:nvSpPr>
+          <p:cNvPr id="48" name="TextBox 47"/>
+          <p:cNvSpPr txBox="1"/>
+          <p:nvPr/>
+        </p:nvSpPr>
+        <p:spPr>
+          <a:xfrm>
+            <a:off x="548640" y="5989320"/>
+            <a:ext cx="11064240" cy="292608"/>
+          </a:xfrm>
+          <a:prstGeom prst="rect">
+            <a:avLst/>
+          </a:prstGeom>
+          <a:noFill/>
+        </p:spPr>
+        <p:txBody>
+          <a:bodyPr wrap="square" anchor="t" lIns="0" rIns="0" tIns="0" bIns="0">
+            <a:spAutoFit/>
+          </a:bodyPr>
+          <a:lstStyle/>
+          <a:p>
+            <a:pPr algn="l">
+              <a:lnSpc>
+                <a:spcPct val="100000"/>
+              </a:lnSpc>
+              <a:spcAft>
+                <a:spcPts val="0"/>
+              </a:spcAft>
+            </a:pPr>
+            <a:r>
+              <a:rPr sz="1100" b="0" i="1">
                 <a:solidFill>
                   <a:srgbClr val="616E82"/>
                 </a:solidFill>
@@ -26495,8 +26495,8 @@
         </p:nvSpPr>
         <p:spPr>
           <a:xfrm>
-            <a:off x="548640" y="1508760"/>
-            <a:ext cx="2606040" cy="1828800"/>
+            <a:off x="548640" y="1554480"/>
+            <a:ext cx="2606040" cy="2468880"/>
           </a:xfrm>
           <a:prstGeom prst="roundRect">
             <a:avLst>
@@ -26541,8 +26541,8 @@
         </p:nvSpPr>
         <p:spPr>
           <a:xfrm>
-            <a:off x="548640" y="1737360"/>
-            <a:ext cx="2606040" cy="731520"/>
+            <a:off x="548640" y="1874519"/>
+            <a:ext cx="2606040" cy="777240"/>
           </a:xfrm>
           <a:prstGeom prst="rect">
             <a:avLst/>
@@ -26564,7 +26564,7 @@
               </a:spcAft>
             </a:pPr>
             <a:r>
-              <a:rPr sz="4000" b="1" i="0">
+              <a:rPr sz="4400" b="1" i="0">
                 <a:solidFill>
                   <a:srgbClr val="2F7AF2"/>
                 </a:solidFill>
@@ -26583,8 +26583,8 @@
         </p:nvSpPr>
         <p:spPr>
           <a:xfrm>
-            <a:off x="685800" y="2468880"/>
-            <a:ext cx="2331720" cy="731520"/>
+            <a:off x="731520" y="2788920"/>
+            <a:ext cx="2240280" cy="914400"/>
           </a:xfrm>
           <a:prstGeom prst="rect">
             <a:avLst/>
@@ -26599,14 +26599,14 @@
           <a:p>
             <a:pPr algn="ctr">
               <a:lnSpc>
-                <a:spcPct val="115000"/>
+                <a:spcPct val="125000"/>
               </a:lnSpc>
               <a:spcAft>
                 <a:spcPts val="0"/>
               </a:spcAft>
             </a:pPr>
             <a:r>
-              <a:rPr sz="1200" b="0" i="0">
+              <a:rPr sz="1300" b="0" i="0">
                 <a:solidFill>
                   <a:srgbClr val="C7D3E3"/>
                 </a:solidFill>
@@ -26618,14 +26618,14 @@
           <a:p>
             <a:pPr algn="ctr">
               <a:lnSpc>
-                <a:spcPct val="115000"/>
+                <a:spcPct val="125000"/>
               </a:lnSpc>
               <a:spcAft>
                 <a:spcPts val="0"/>
               </a:spcAft>
             </a:pPr>
             <a:r>
-              <a:rPr sz="1200" b="0" i="0">
+              <a:rPr sz="1300" b="0" i="0">
                 <a:solidFill>
                   <a:srgbClr val="C7D3E3"/>
                 </a:solidFill>
@@ -26644,8 +26644,8 @@
         </p:nvSpPr>
         <p:spPr>
           <a:xfrm>
-            <a:off x="3291840" y="1508760"/>
-            <a:ext cx="2606040" cy="1828800"/>
+            <a:off x="3291840" y="1554480"/>
+            <a:ext cx="2606040" cy="2468880"/>
           </a:xfrm>
           <a:prstGeom prst="roundRect">
             <a:avLst>
@@ -26690,8 +26690,8 @@
         </p:nvSpPr>
         <p:spPr>
           <a:xfrm>
-            <a:off x="3291840" y="1737360"/>
-            <a:ext cx="2606040" cy="731520"/>
+            <a:off x="3291840" y="1874519"/>
+            <a:ext cx="2606040" cy="777240"/>
           </a:xfrm>
           <a:prstGeom prst="rect">
             <a:avLst/>
@@ -26713,7 +26713,7 @@
               </a:spcAft>
             </a:pPr>
             <a:r>
-              <a:rPr sz="4000" b="1" i="0">
+              <a:rPr sz="4400" b="1" i="0">
                 <a:solidFill>
                   <a:srgbClr val="2F7AF2"/>
                 </a:solidFill>
@@ -26732,8 +26732,8 @@
         </p:nvSpPr>
         <p:spPr>
           <a:xfrm>
-            <a:off x="3429000" y="2468880"/>
-            <a:ext cx="2331720" cy="731520"/>
+            <a:off x="3474720" y="2788920"/>
+            <a:ext cx="2240280" cy="914400"/>
           </a:xfrm>
           <a:prstGeom prst="rect">
             <a:avLst/>
@@ -26748,14 +26748,14 @@
           <a:p>
             <a:pPr algn="ctr">
               <a:lnSpc>
-                <a:spcPct val="115000"/>
+                <a:spcPct val="125000"/>
               </a:lnSpc>
               <a:spcAft>
                 <a:spcPts val="0"/>
               </a:spcAft>
             </a:pPr>
             <a:r>
-              <a:rPr sz="1200" b="0" i="0">
+              <a:rPr sz="1300" b="0" i="0">
                 <a:solidFill>
                   <a:srgbClr val="C7D3E3"/>
                 </a:solidFill>
@@ -26767,14 +26767,14 @@
           <a:p>
             <a:pPr algn="ctr">
               <a:lnSpc>
-                <a:spcPct val="115000"/>
+                <a:spcPct val="125000"/>
               </a:lnSpc>
               <a:spcAft>
                 <a:spcPts val="0"/>
               </a:spcAft>
             </a:pPr>
             <a:r>
-              <a:rPr sz="1200" b="0" i="0">
+              <a:rPr sz="1300" b="0" i="0">
                 <a:solidFill>
                   <a:srgbClr val="C7D3E3"/>
                 </a:solidFill>
@@ -26793,8 +26793,8 @@
         </p:nvSpPr>
         <p:spPr>
           <a:xfrm>
-            <a:off x="6035040" y="1508760"/>
-            <a:ext cx="2606040" cy="1828800"/>
+            <a:off x="6035040" y="1554480"/>
+            <a:ext cx="2606040" cy="2468880"/>
           </a:xfrm>
           <a:prstGeom prst="roundRect">
             <a:avLst>
@@ -26839,8 +26839,8 @@
         </p:nvSpPr>
         <p:spPr>
           <a:xfrm>
-            <a:off x="6035040" y="1737360"/>
-            <a:ext cx="2606040" cy="731520"/>
+            <a:off x="6035040" y="1874519"/>
+            <a:ext cx="2606040" cy="777240"/>
           </a:xfrm>
           <a:prstGeom prst="rect">
             <a:avLst/>
@@ -26862,7 +26862,7 @@
               </a:spcAft>
             </a:pPr>
             <a:r>
-              <a:rPr sz="4000" b="1" i="0">
+              <a:rPr sz="4400" b="1" i="0">
                 <a:solidFill>
                   <a:srgbClr val="2F7AF2"/>
                 </a:solidFill>
@@ -26881,8 +26881,8 @@
         </p:nvSpPr>
         <p:spPr>
           <a:xfrm>
-            <a:off x="6172200" y="2468880"/>
-            <a:ext cx="2331720" cy="731520"/>
+            <a:off x="6217920" y="2788920"/>
+            <a:ext cx="2240280" cy="914400"/>
           </a:xfrm>
           <a:prstGeom prst="rect">
             <a:avLst/>
@@ -26897,14 +26897,14 @@
           <a:p>
             <a:pPr algn="ctr">
               <a:lnSpc>
-                <a:spcPct val="115000"/>
+                <a:spcPct val="125000"/>
               </a:lnSpc>
               <a:spcAft>
                 <a:spcPts val="0"/>
               </a:spcAft>
             </a:pPr>
             <a:r>
-              <a:rPr sz="1200" b="0" i="0">
+              <a:rPr sz="1300" b="0" i="0">
                 <a:solidFill>
                   <a:srgbClr val="C7D3E3"/>
                 </a:solidFill>
@@ -26916,14 +26916,14 @@
           <a:p>
             <a:pPr algn="ctr">
               <a:lnSpc>
-                <a:spcPct val="115000"/>
+                <a:spcPct val="125000"/>
               </a:lnSpc>
               <a:spcAft>
                 <a:spcPts val="0"/>
               </a:spcAft>
             </a:pPr>
             <a:r>
-              <a:rPr sz="1200" b="0" i="0">
+              <a:rPr sz="1300" b="0" i="0">
                 <a:solidFill>
                   <a:srgbClr val="C7D3E3"/>
                 </a:solidFill>
@@ -26942,8 +26942,8 @@
         </p:nvSpPr>
         <p:spPr>
           <a:xfrm>
-            <a:off x="8778240" y="1508760"/>
-            <a:ext cx="2606040" cy="1828800"/>
+            <a:off x="8778240" y="1554480"/>
+            <a:ext cx="2606040" cy="2468880"/>
           </a:xfrm>
           <a:prstGeom prst="roundRect">
             <a:avLst>
@@ -26988,8 +26988,8 @@
         </p:nvSpPr>
         <p:spPr>
           <a:xfrm>
-            <a:off x="8778240" y="1737360"/>
-            <a:ext cx="2606040" cy="731520"/>
+            <a:off x="8778240" y="1874519"/>
+            <a:ext cx="2606040" cy="777240"/>
           </a:xfrm>
           <a:prstGeom prst="rect">
             <a:avLst/>
@@ -27011,7 +27011,7 @@
               </a:spcAft>
             </a:pPr>
             <a:r>
-              <a:rPr sz="4000" b="1" i="0">
+              <a:rPr sz="4400" b="1" i="0">
                 <a:solidFill>
                   <a:srgbClr val="F29A1E"/>
                 </a:solidFill>
@@ -27030,8 +27030,8 @@
         </p:nvSpPr>
         <p:spPr>
           <a:xfrm>
-            <a:off x="8915400" y="2468880"/>
-            <a:ext cx="2331720" cy="731520"/>
+            <a:off x="8961120" y="2788920"/>
+            <a:ext cx="2240280" cy="914400"/>
           </a:xfrm>
           <a:prstGeom prst="rect">
             <a:avLst/>
@@ -27046,14 +27046,14 @@
           <a:p>
             <a:pPr algn="ctr">
               <a:lnSpc>
-                <a:spcPct val="115000"/>
+                <a:spcPct val="125000"/>
               </a:lnSpc>
               <a:spcAft>
                 <a:spcPts val="0"/>
               </a:spcAft>
             </a:pPr>
             <a:r>
-              <a:rPr sz="1200" b="0" i="0">
+              <a:rPr sz="1300" b="0" i="0">
                 <a:solidFill>
                   <a:srgbClr val="C7D3E3"/>
                 </a:solidFill>
@@ -27065,14 +27065,14 @@
           <a:p>
             <a:pPr algn="ctr">
               <a:lnSpc>
-                <a:spcPct val="115000"/>
+                <a:spcPct val="125000"/>
               </a:lnSpc>
               <a:spcAft>
                 <a:spcPts val="0"/>
               </a:spcAft>
             </a:pPr>
             <a:r>
-              <a:rPr sz="1200" b="0" i="0">
+              <a:rPr sz="1300" b="0" i="0">
                 <a:solidFill>
                   <a:srgbClr val="C7D3E3"/>
                 </a:solidFill>
@@ -27091,7 +27091,7 @@
         </p:nvSpPr>
         <p:spPr>
           <a:xfrm>
-            <a:off x="548640" y="3703320"/>
+            <a:off x="548640" y="4434840"/>
             <a:ext cx="11064240" cy="365760"/>
           </a:xfrm>
           <a:prstGeom prst="rect">
@@ -27114,7 +27114,7 @@
               </a:spcAft>
             </a:pPr>
             <a:r>
-              <a:rPr sz="1500" b="1" i="0">
+              <a:rPr sz="1600" b="1" i="0">
                 <a:solidFill>
                   <a:srgbClr val="0D1628"/>
                 </a:solidFill>
@@ -27133,8 +27133,8 @@
         </p:nvSpPr>
         <p:spPr>
           <a:xfrm>
-            <a:off x="548640" y="4160520"/>
-            <a:ext cx="2014423" cy="502920"/>
+            <a:off x="548640" y="4937760"/>
+            <a:ext cx="2199132" cy="658368"/>
           </a:xfrm>
           <a:prstGeom prst="roundRect">
             <a:avLst>
@@ -27181,8 +27181,8 @@
         </p:nvSpPr>
         <p:spPr>
           <a:xfrm>
-            <a:off x="548640" y="4160520"/>
-            <a:ext cx="2014423" cy="502920"/>
+            <a:off x="548640" y="4937760"/>
+            <a:ext cx="2199132" cy="658368"/>
           </a:xfrm>
           <a:prstGeom prst="rect">
             <a:avLst/>
@@ -27204,7 +27204,7 @@
               </a:spcAft>
             </a:pPr>
             <a:r>
-              <a:rPr sz="1250" b="0" i="0">
+              <a:rPr sz="1350" b="0" i="0">
                 <a:solidFill>
                   <a:srgbClr val="111827"/>
                 </a:solidFill>
@@ -27223,8 +27223,8 @@
         </p:nvSpPr>
         <p:spPr>
           <a:xfrm>
-            <a:off x="2727655" y="4160520"/>
-            <a:ext cx="1537106" cy="502920"/>
+            <a:off x="2930652" y="4937760"/>
+            <a:ext cx="1677924" cy="658368"/>
           </a:xfrm>
           <a:prstGeom prst="roundRect">
             <a:avLst>
@@ -27271,8 +27271,8 @@
         </p:nvSpPr>
         <p:spPr>
           <a:xfrm>
-            <a:off x="2727655" y="4160520"/>
-            <a:ext cx="1537106" cy="502920"/>
+            <a:off x="2930652" y="4937760"/>
+            <a:ext cx="1677924" cy="658368"/>
           </a:xfrm>
           <a:prstGeom prst="rect">
             <a:avLst/>
@@ -27294,7 +27294,7 @@
               </a:spcAft>
             </a:pPr>
             <a:r>
-              <a:rPr sz="1250" b="0" i="0">
+              <a:rPr sz="1350" b="0" i="0">
                 <a:solidFill>
                   <a:srgbClr val="111827"/>
                 </a:solidFill>
@@ -27313,8 +27313,8 @@
         </p:nvSpPr>
         <p:spPr>
           <a:xfrm>
-            <a:off x="4429353" y="4160520"/>
-            <a:ext cx="1855317" cy="502920"/>
+            <a:off x="4791456" y="4937760"/>
+            <a:ext cx="2025395" cy="658368"/>
           </a:xfrm>
           <a:prstGeom prst="roundRect">
             <a:avLst>
@@ -27361,8 +27361,8 @@
         </p:nvSpPr>
         <p:spPr>
           <a:xfrm>
-            <a:off x="4429353" y="4160520"/>
-            <a:ext cx="1855317" cy="502920"/>
+            <a:off x="4791456" y="4937760"/>
+            <a:ext cx="2025395" cy="658368"/>
           </a:xfrm>
           <a:prstGeom prst="rect">
             <a:avLst/>
@@ -27384,7 +27384,7 @@
               </a:spcAft>
             </a:pPr>
             <a:r>
-              <a:rPr sz="1250" b="0" i="0">
+              <a:rPr sz="1350" b="0" i="0">
                 <a:solidFill>
                   <a:srgbClr val="111827"/>
                 </a:solidFill>
@@ -27403,8 +27403,8 @@
         </p:nvSpPr>
         <p:spPr>
           <a:xfrm>
-            <a:off x="6449262" y="4160520"/>
-            <a:ext cx="2173528" cy="502920"/>
+            <a:off x="6999731" y="4937760"/>
+            <a:ext cx="2372868" cy="658368"/>
           </a:xfrm>
           <a:prstGeom prst="roundRect">
             <a:avLst>
@@ -27451,8 +27451,8 @@
         </p:nvSpPr>
         <p:spPr>
           <a:xfrm>
-            <a:off x="6449262" y="4160520"/>
-            <a:ext cx="2173528" cy="502920"/>
+            <a:off x="6999731" y="4937760"/>
+            <a:ext cx="2372868" cy="658368"/>
           </a:xfrm>
           <a:prstGeom prst="rect">
             <a:avLst/>
@@ -27474,7 +27474,7 @@
               </a:spcAft>
             </a:pPr>
             <a:r>
-              <a:rPr sz="1250" b="0" i="0">
+              <a:rPr sz="1350" b="0" i="0">
                 <a:solidFill>
                   <a:srgbClr val="111827"/>
                 </a:solidFill>
@@ -27493,8 +27493,8 @@
         </p:nvSpPr>
         <p:spPr>
           <a:xfrm>
-            <a:off x="8787382" y="4160520"/>
-            <a:ext cx="1696212" cy="502920"/>
+            <a:off x="9555479" y="4937760"/>
+            <a:ext cx="1851660" cy="658368"/>
           </a:xfrm>
           <a:prstGeom prst="roundRect">
             <a:avLst>
@@ -27541,8 +27541,8 @@
         </p:nvSpPr>
         <p:spPr>
           <a:xfrm>
-            <a:off x="8787382" y="4160520"/>
-            <a:ext cx="1696212" cy="502920"/>
+            <a:off x="9555479" y="4937760"/>
+            <a:ext cx="1851660" cy="658368"/>
           </a:xfrm>
           <a:prstGeom prst="rect">
             <a:avLst/>
@@ -27564,7 +27564,7 @@
               </a:spcAft>
             </a:pPr>
             <a:r>
-              <a:rPr sz="1250" b="0" i="0">
+              <a:rPr sz="1350" b="0" i="0">
                 <a:solidFill>
                   <a:srgbClr val="111827"/>
                 </a:solidFill>
@@ -33141,7 +33141,7 @@
         <p:spPr>
           <a:xfrm>
             <a:off x="548640" y="3063240"/>
-            <a:ext cx="4572000" cy="274320"/>
+            <a:ext cx="5669280" cy="274320"/>
           </a:xfrm>
           <a:prstGeom prst="rect">
             <a:avLst/>
@@ -33169,7 +33169,7 @@
                 </a:solidFill>
                 <a:latin typeface="Segoe UI Semibold"/>
               </a:rPr>
-              <a:t>PRODUCTION ROADMAP — DOCUMENTED, NOT BUILT THIS WEEK</a:t>
+              <a:t>PRODUCTION ROADMAP — CODE SCAFFOLDED, NOT DEPLOYED/VERIFIED</a:t>
             </a:r>
           </a:p>
         </p:txBody>
@@ -34121,8 +34121,8 @@
         </p:nvSpPr>
         <p:spPr>
           <a:xfrm>
-            <a:off x="548640" y="1508760"/>
-            <a:ext cx="2679192" cy="1965960"/>
+            <a:off x="548640" y="1554480"/>
+            <a:ext cx="2679192" cy="2286000"/>
           </a:xfrm>
           <a:prstGeom prst="roundRect">
             <a:avLst>
@@ -34167,7 +34167,7 @@
         </p:nvSpPr>
         <p:spPr>
           <a:xfrm>
-            <a:off x="548640" y="1508760"/>
+            <a:off x="548640" y="1554480"/>
             <a:ext cx="2679192" cy="64008"/>
           </a:xfrm>
           <a:prstGeom prst="rect">
@@ -34211,7 +34211,7 @@
         </p:nvSpPr>
         <p:spPr>
           <a:xfrm>
-            <a:off x="731520" y="1728216"/>
+            <a:off x="731520" y="1847088"/>
             <a:ext cx="2313432" cy="640080"/>
           </a:xfrm>
           <a:prstGeom prst="rect">
@@ -34234,7 +34234,7 @@
               </a:spcAft>
             </a:pPr>
             <a:r>
-              <a:rPr sz="1350" b="1" i="0">
+              <a:rPr sz="1400" b="1" i="0">
                 <a:solidFill>
                   <a:srgbClr val="111827"/>
                 </a:solidFill>
@@ -34253,8 +34253,8 @@
         </p:nvSpPr>
         <p:spPr>
           <a:xfrm>
-            <a:off x="731520" y="2377440"/>
-            <a:ext cx="2313432" cy="1005840"/>
+            <a:off x="731520" y="2542032"/>
+            <a:ext cx="2313432" cy="1188720"/>
           </a:xfrm>
           <a:prstGeom prst="rect">
             <a:avLst/>
@@ -34269,14 +34269,14 @@
           <a:p>
             <a:pPr algn="l">
               <a:lnSpc>
-                <a:spcPct val="120000"/>
+                <a:spcPct val="125000"/>
               </a:lnSpc>
               <a:spcAft>
                 <a:spcPts val="0"/>
               </a:spcAft>
             </a:pPr>
             <a:r>
-              <a:rPr sz="1050" b="0" i="0">
+              <a:rPr sz="1100" b="0" i="0">
                 <a:solidFill>
                   <a:srgbClr val="616E82"/>
                 </a:solidFill>
@@ -34295,8 +34295,8 @@
         </p:nvSpPr>
         <p:spPr>
           <a:xfrm>
-            <a:off x="3346704" y="1508760"/>
-            <a:ext cx="2679192" cy="1965960"/>
+            <a:off x="3346704" y="1554480"/>
+            <a:ext cx="2679192" cy="2286000"/>
           </a:xfrm>
           <a:prstGeom prst="roundRect">
             <a:avLst>
@@ -34341,7 +34341,7 @@
         </p:nvSpPr>
         <p:spPr>
           <a:xfrm>
-            <a:off x="3346704" y="1508760"/>
+            <a:off x="3346704" y="1554480"/>
             <a:ext cx="2679192" cy="64008"/>
           </a:xfrm>
           <a:prstGeom prst="rect">
@@ -34385,7 +34385,7 @@
         </p:nvSpPr>
         <p:spPr>
           <a:xfrm>
-            <a:off x="3529584" y="1728216"/>
+            <a:off x="3529584" y="1847088"/>
             <a:ext cx="2313432" cy="640080"/>
           </a:xfrm>
           <a:prstGeom prst="rect">
@@ -34408,7 +34408,7 @@
               </a:spcAft>
             </a:pPr>
             <a:r>
-              <a:rPr sz="1350" b="1" i="0">
+              <a:rPr sz="1400" b="1" i="0">
                 <a:solidFill>
                   <a:srgbClr val="111827"/>
                 </a:solidFill>
@@ -34427,8 +34427,8 @@
         </p:nvSpPr>
         <p:spPr>
           <a:xfrm>
-            <a:off x="3529584" y="2377440"/>
-            <a:ext cx="2313432" cy="1005840"/>
+            <a:off x="3529584" y="2542032"/>
+            <a:ext cx="2313432" cy="1188720"/>
           </a:xfrm>
           <a:prstGeom prst="rect">
             <a:avLst/>
@@ -34443,14 +34443,14 @@
           <a:p>
             <a:pPr algn="l">
               <a:lnSpc>
-                <a:spcPct val="120000"/>
+                <a:spcPct val="125000"/>
               </a:lnSpc>
               <a:spcAft>
                 <a:spcPts val="0"/>
               </a:spcAft>
             </a:pPr>
             <a:r>
-              <a:rPr sz="1050" b="0" i="0">
+              <a:rPr sz="1100" b="0" i="0">
                 <a:solidFill>
                   <a:srgbClr val="616E82"/>
                 </a:solidFill>
@@ -34469,8 +34469,8 @@
         </p:nvSpPr>
         <p:spPr>
           <a:xfrm>
-            <a:off x="6144768" y="1508760"/>
-            <a:ext cx="2679192" cy="1965960"/>
+            <a:off x="6144768" y="1554480"/>
+            <a:ext cx="2679192" cy="2286000"/>
           </a:xfrm>
           <a:prstGeom prst="roundRect">
             <a:avLst>
@@ -34515,7 +34515,7 @@
         </p:nvSpPr>
         <p:spPr>
           <a:xfrm>
-            <a:off x="6144768" y="1508760"/>
+            <a:off x="6144768" y="1554480"/>
             <a:ext cx="2679192" cy="64008"/>
           </a:xfrm>
           <a:prstGeom prst="rect">
@@ -34559,7 +34559,7 @@
         </p:nvSpPr>
         <p:spPr>
           <a:xfrm>
-            <a:off x="6327648" y="1728216"/>
+            <a:off x="6327648" y="1847088"/>
             <a:ext cx="2313432" cy="640080"/>
           </a:xfrm>
           <a:prstGeom prst="rect">
@@ -34582,7 +34582,7 @@
               </a:spcAft>
             </a:pPr>
             <a:r>
-              <a:rPr sz="1350" b="1" i="0">
+              <a:rPr sz="1400" b="1" i="0">
                 <a:solidFill>
                   <a:srgbClr val="111827"/>
                 </a:solidFill>
@@ -34601,8 +34601,8 @@
         </p:nvSpPr>
         <p:spPr>
           <a:xfrm>
-            <a:off x="6327648" y="2377440"/>
-            <a:ext cx="2313432" cy="1005840"/>
+            <a:off x="6327648" y="2542032"/>
+            <a:ext cx="2313432" cy="1188720"/>
           </a:xfrm>
           <a:prstGeom prst="rect">
             <a:avLst/>
@@ -34617,14 +34617,14 @@
           <a:p>
             <a:pPr algn="l">
               <a:lnSpc>
-                <a:spcPct val="120000"/>
+                <a:spcPct val="125000"/>
               </a:lnSpc>
               <a:spcAft>
                 <a:spcPts val="0"/>
               </a:spcAft>
             </a:pPr>
             <a:r>
-              <a:rPr sz="1050" b="0" i="0">
+              <a:rPr sz="1100" b="0" i="0">
                 <a:solidFill>
                   <a:srgbClr val="616E82"/>
                 </a:solidFill>
@@ -34643,8 +34643,8 @@
         </p:nvSpPr>
         <p:spPr>
           <a:xfrm>
-            <a:off x="8942832" y="1508760"/>
-            <a:ext cx="2679192" cy="1965960"/>
+            <a:off x="8942832" y="1554480"/>
+            <a:ext cx="2679192" cy="2286000"/>
           </a:xfrm>
           <a:prstGeom prst="roundRect">
             <a:avLst>
@@ -34689,7 +34689,7 @@
         </p:nvSpPr>
         <p:spPr>
           <a:xfrm>
-            <a:off x="8942832" y="1508760"/>
+            <a:off x="8942832" y="1554480"/>
             <a:ext cx="2679192" cy="64008"/>
           </a:xfrm>
           <a:prstGeom prst="rect">
@@ -34733,7 +34733,7 @@
         </p:nvSpPr>
         <p:spPr>
           <a:xfrm>
-            <a:off x="9125712" y="1728216"/>
+            <a:off x="9125712" y="1847088"/>
             <a:ext cx="2313432" cy="640080"/>
           </a:xfrm>
           <a:prstGeom prst="rect">
@@ -34756,7 +34756,7 @@
               </a:spcAft>
             </a:pPr>
             <a:r>
-              <a:rPr sz="1350" b="1" i="0">
+              <a:rPr sz="1400" b="1" i="0">
                 <a:solidFill>
                   <a:srgbClr val="111827"/>
                 </a:solidFill>
@@ -34775,8 +34775,8 @@
         </p:nvSpPr>
         <p:spPr>
           <a:xfrm>
-            <a:off x="9125712" y="2377440"/>
-            <a:ext cx="2313432" cy="1005840"/>
+            <a:off x="9125712" y="2542032"/>
+            <a:ext cx="2313432" cy="1188720"/>
           </a:xfrm>
           <a:prstGeom prst="rect">
             <a:avLst/>
@@ -34791,14 +34791,14 @@
           <a:p>
             <a:pPr algn="l">
               <a:lnSpc>
-                <a:spcPct val="120000"/>
+                <a:spcPct val="125000"/>
               </a:lnSpc>
               <a:spcAft>
                 <a:spcPts val="0"/>
               </a:spcAft>
             </a:pPr>
             <a:r>
-              <a:rPr sz="1050" b="0" i="0">
+              <a:rPr sz="1100" b="0" i="0">
                 <a:solidFill>
                   <a:srgbClr val="616E82"/>
                 </a:solidFill>
@@ -34817,8 +34817,8 @@
         </p:nvSpPr>
         <p:spPr>
           <a:xfrm>
-            <a:off x="548640" y="3611880"/>
-            <a:ext cx="2679192" cy="1965960"/>
+            <a:off x="548640" y="4023360"/>
+            <a:ext cx="2679192" cy="2286000"/>
           </a:xfrm>
           <a:prstGeom prst="roundRect">
             <a:avLst>
@@ -34863,7 +34863,7 @@
         </p:nvSpPr>
         <p:spPr>
           <a:xfrm>
-            <a:off x="548640" y="3611880"/>
+            <a:off x="548640" y="4023360"/>
             <a:ext cx="2679192" cy="64008"/>
           </a:xfrm>
           <a:prstGeom prst="rect">
@@ -34907,7 +34907,7 @@
         </p:nvSpPr>
         <p:spPr>
           <a:xfrm>
-            <a:off x="731520" y="3831336"/>
+            <a:off x="731520" y="4315968"/>
             <a:ext cx="2313432" cy="640080"/>
           </a:xfrm>
           <a:prstGeom prst="rect">
@@ -34930,7 +34930,7 @@
               </a:spcAft>
             </a:pPr>
             <a:r>
-              <a:rPr sz="1350" b="1" i="0">
+              <a:rPr sz="1400" b="1" i="0">
                 <a:solidFill>
                   <a:srgbClr val="111827"/>
                 </a:solidFill>
@@ -34949,8 +34949,8 @@
         </p:nvSpPr>
         <p:spPr>
           <a:xfrm>
-            <a:off x="731520" y="4480560"/>
-            <a:ext cx="2313432" cy="1005840"/>
+            <a:off x="731520" y="5010912"/>
+            <a:ext cx="2313432" cy="1188720"/>
           </a:xfrm>
           <a:prstGeom prst="rect">
             <a:avLst/>
@@ -34965,14 +34965,14 @@
           <a:p>
             <a:pPr algn="l">
               <a:lnSpc>
-                <a:spcPct val="120000"/>
+                <a:spcPct val="125000"/>
               </a:lnSpc>
               <a:spcAft>
                 <a:spcPts val="0"/>
               </a:spcAft>
             </a:pPr>
             <a:r>
-              <a:rPr sz="1050" b="0" i="0">
+              <a:rPr sz="1100" b="0" i="0">
                 <a:solidFill>
                   <a:srgbClr val="616E82"/>
                 </a:solidFill>
@@ -34991,8 +34991,8 @@
         </p:nvSpPr>
         <p:spPr>
           <a:xfrm>
-            <a:off x="3346704" y="3611880"/>
-            <a:ext cx="2679192" cy="1965960"/>
+            <a:off x="3346704" y="4023360"/>
+            <a:ext cx="2679192" cy="2286000"/>
           </a:xfrm>
           <a:prstGeom prst="roundRect">
             <a:avLst>
@@ -35037,7 +35037,7 @@
         </p:nvSpPr>
         <p:spPr>
           <a:xfrm>
-            <a:off x="3346704" y="3611880"/>
+            <a:off x="3346704" y="4023360"/>
             <a:ext cx="2679192" cy="64008"/>
           </a:xfrm>
           <a:prstGeom prst="rect">
@@ -35081,7 +35081,7 @@
         </p:nvSpPr>
         <p:spPr>
           <a:xfrm>
-            <a:off x="3529584" y="3831336"/>
+            <a:off x="3529584" y="4315968"/>
             <a:ext cx="2313432" cy="640080"/>
           </a:xfrm>
           <a:prstGeom prst="rect">
@@ -35104,7 +35104,7 @@
               </a:spcAft>
             </a:pPr>
             <a:r>
-              <a:rPr sz="1350" b="1" i="0">
+              <a:rPr sz="1400" b="1" i="0">
                 <a:solidFill>
                   <a:srgbClr val="111827"/>
                 </a:solidFill>
@@ -35123,8 +35123,8 @@
         </p:nvSpPr>
         <p:spPr>
           <a:xfrm>
-            <a:off x="3529584" y="4480560"/>
-            <a:ext cx="2313432" cy="1005840"/>
+            <a:off x="3529584" y="5010912"/>
+            <a:ext cx="2313432" cy="1188720"/>
           </a:xfrm>
           <a:prstGeom prst="rect">
             <a:avLst/>
@@ -35139,14 +35139,14 @@
           <a:p>
             <a:pPr algn="l">
               <a:lnSpc>
-                <a:spcPct val="120000"/>
+                <a:spcPct val="125000"/>
               </a:lnSpc>
               <a:spcAft>
                 <a:spcPts val="0"/>
               </a:spcAft>
             </a:pPr>
             <a:r>
-              <a:rPr sz="1050" b="0" i="0">
+              <a:rPr sz="1100" b="0" i="0">
                 <a:solidFill>
                   <a:srgbClr val="616E82"/>
                 </a:solidFill>
@@ -35165,8 +35165,8 @@
         </p:nvSpPr>
         <p:spPr>
           <a:xfrm>
-            <a:off x="6144768" y="3611880"/>
-            <a:ext cx="2679192" cy="1965960"/>
+            <a:off x="6144768" y="4023360"/>
+            <a:ext cx="2679192" cy="2286000"/>
           </a:xfrm>
           <a:prstGeom prst="roundRect">
             <a:avLst>
@@ -35211,7 +35211,7 @@
         </p:nvSpPr>
         <p:spPr>
           <a:xfrm>
-            <a:off x="6144768" y="3611880"/>
+            <a:off x="6144768" y="4023360"/>
             <a:ext cx="2679192" cy="64008"/>
           </a:xfrm>
           <a:prstGeom prst="rect">
@@ -35255,7 +35255,7 @@
         </p:nvSpPr>
         <p:spPr>
           <a:xfrm>
-            <a:off x="6327648" y="3831336"/>
+            <a:off x="6327648" y="4315968"/>
             <a:ext cx="2313432" cy="640080"/>
           </a:xfrm>
           <a:prstGeom prst="rect">
@@ -35278,7 +35278,7 @@
               </a:spcAft>
             </a:pPr>
             <a:r>
-              <a:rPr sz="1350" b="1" i="0">
+              <a:rPr sz="1400" b="1" i="0">
                 <a:solidFill>
                   <a:srgbClr val="111827"/>
                 </a:solidFill>
@@ -35297,8 +35297,8 @@
         </p:nvSpPr>
         <p:spPr>
           <a:xfrm>
-            <a:off x="6327648" y="4480560"/>
-            <a:ext cx="2313432" cy="1005840"/>
+            <a:off x="6327648" y="5010912"/>
+            <a:ext cx="2313432" cy="1188720"/>
           </a:xfrm>
           <a:prstGeom prst="rect">
             <a:avLst/>
@@ -35313,14 +35313,14 @@
           <a:p>
             <a:pPr algn="l">
               <a:lnSpc>
-                <a:spcPct val="120000"/>
+                <a:spcPct val="125000"/>
               </a:lnSpc>
               <a:spcAft>
                 <a:spcPts val="0"/>
               </a:spcAft>
             </a:pPr>
             <a:r>
-              <a:rPr sz="1050" b="0" i="0">
+              <a:rPr sz="1100" b="0" i="0">
                 <a:solidFill>
                   <a:srgbClr val="616E82"/>
                 </a:solidFill>
@@ -35339,8 +35339,8 @@
         </p:nvSpPr>
         <p:spPr>
           <a:xfrm>
-            <a:off x="8942832" y="3611880"/>
-            <a:ext cx="2679192" cy="1965960"/>
+            <a:off x="8942832" y="4023360"/>
+            <a:ext cx="2679192" cy="2286000"/>
           </a:xfrm>
           <a:prstGeom prst="roundRect">
             <a:avLst>
@@ -35385,7 +35385,7 @@
         </p:nvSpPr>
         <p:spPr>
           <a:xfrm>
-            <a:off x="8942832" y="3611880"/>
+            <a:off x="8942832" y="4023360"/>
             <a:ext cx="2679192" cy="64008"/>
           </a:xfrm>
           <a:prstGeom prst="rect">
@@ -35429,7 +35429,7 @@
         </p:nvSpPr>
         <p:spPr>
           <a:xfrm>
-            <a:off x="9125712" y="3831336"/>
+            <a:off x="9125712" y="4315968"/>
             <a:ext cx="2313432" cy="640080"/>
           </a:xfrm>
           <a:prstGeom prst="rect">
@@ -35452,7 +35452,7 @@
               </a:spcAft>
             </a:pPr>
             <a:r>
-              <a:rPr sz="1350" b="1" i="0">
+              <a:rPr sz="1400" b="1" i="0">
                 <a:solidFill>
                   <a:srgbClr val="111827"/>
                 </a:solidFill>
@@ -35471,8 +35471,8 @@
         </p:nvSpPr>
         <p:spPr>
           <a:xfrm>
-            <a:off x="9125712" y="4480560"/>
-            <a:ext cx="2313432" cy="1005840"/>
+            <a:off x="9125712" y="5010912"/>
+            <a:ext cx="2313432" cy="1188720"/>
           </a:xfrm>
           <a:prstGeom prst="rect">
             <a:avLst/>
@@ -35487,14 +35487,14 @@
           <a:p>
             <a:pPr algn="l">
               <a:lnSpc>
-                <a:spcPct val="120000"/>
+                <a:spcPct val="125000"/>
               </a:lnSpc>
               <a:spcAft>
                 <a:spcPts val="0"/>
               </a:spcAft>
             </a:pPr>
             <a:r>
-              <a:rPr sz="1050" b="0" i="0">
+              <a:rPr sz="1100" b="0" i="0">
                 <a:solidFill>
                   <a:srgbClr val="616E82"/>
                 </a:solidFill>

--- a/docs/assets/Sentinel_Solution_Presentation.pptx
+++ b/docs/assets/Sentinel_Solution_Presentation.pptx
@@ -10848,7 +10848,7 @@
         <p:spPr>
           <a:xfrm>
             <a:off x="548640" y="1554480"/>
-            <a:ext cx="3611880" cy="1965960"/>
+            <a:ext cx="2679192" cy="1965960"/>
           </a:xfrm>
           <a:prstGeom prst="roundRect">
             <a:avLst>
@@ -10893,8 +10893,8 @@
         </p:nvSpPr>
         <p:spPr>
           <a:xfrm>
-            <a:off x="804672" y="1828800"/>
-            <a:ext cx="420624" cy="420624"/>
+            <a:off x="777240" y="1792224"/>
+            <a:ext cx="384048" cy="384048"/>
           </a:xfrm>
           <a:prstGeom prst="ellipse">
             <a:avLst/>
@@ -10937,8 +10937,8 @@
         </p:nvSpPr>
         <p:spPr>
           <a:xfrm>
-            <a:off x="1417320" y="1773936"/>
-            <a:ext cx="2514600" cy="502920"/>
+            <a:off x="777240" y="2304288"/>
+            <a:ext cx="2221992" cy="457200"/>
           </a:xfrm>
           <a:prstGeom prst="rect">
             <a:avLst/>
@@ -10946,21 +10946,21 @@
           <a:noFill/>
         </p:spPr>
         <p:txBody>
-          <a:bodyPr wrap="square" anchor="ctr" lIns="0" rIns="0" tIns="0" bIns="0">
+          <a:bodyPr wrap="square" anchor="t" lIns="0" rIns="0" tIns="0" bIns="0">
             <a:spAutoFit/>
           </a:bodyPr>
           <a:lstStyle/>
           <a:p>
             <a:pPr algn="l">
               <a:lnSpc>
-                <a:spcPct val="100000"/>
+                <a:spcPct val="110000"/>
               </a:lnSpc>
               <a:spcAft>
                 <a:spcPts val="0"/>
               </a:spcAft>
             </a:pPr>
             <a:r>
-              <a:rPr sz="1500" b="1" i="0">
+              <a:rPr sz="1350" b="1" i="0">
                 <a:solidFill>
                   <a:srgbClr val="111827"/>
                 </a:solidFill>
@@ -10979,8 +10979,8 @@
         </p:nvSpPr>
         <p:spPr>
           <a:xfrm>
-            <a:off x="804672" y="2514600"/>
-            <a:ext cx="3099816" cy="822960"/>
+            <a:off x="777240" y="2788920"/>
+            <a:ext cx="2221992" cy="658368"/>
           </a:xfrm>
           <a:prstGeom prst="rect">
             <a:avLst/>
@@ -10995,14 +10995,14 @@
           <a:p>
             <a:pPr algn="l">
               <a:lnSpc>
-                <a:spcPct val="125000"/>
+                <a:spcPct val="120000"/>
               </a:lnSpc>
               <a:spcAft>
                 <a:spcPts val="0"/>
               </a:spcAft>
             </a:pPr>
             <a:r>
-              <a:rPr sz="1200" b="0" i="0">
+              <a:rPr sz="1050" b="0" i="0">
                 <a:solidFill>
                   <a:srgbClr val="616E82"/>
                 </a:solidFill>
@@ -11021,8 +11021,8 @@
         </p:nvSpPr>
         <p:spPr>
           <a:xfrm>
-            <a:off x="4297680" y="1554480"/>
-            <a:ext cx="3611880" cy="1965960"/>
+            <a:off x="3346704" y="1554480"/>
+            <a:ext cx="2679192" cy="1965960"/>
           </a:xfrm>
           <a:prstGeom prst="roundRect">
             <a:avLst>
@@ -11067,8 +11067,8 @@
         </p:nvSpPr>
         <p:spPr>
           <a:xfrm>
-            <a:off x="4553712" y="1828800"/>
-            <a:ext cx="420624" cy="420624"/>
+            <a:off x="3575304" y="1792224"/>
+            <a:ext cx="384048" cy="384048"/>
           </a:xfrm>
           <a:prstGeom prst="ellipse">
             <a:avLst/>
@@ -11111,8 +11111,8 @@
         </p:nvSpPr>
         <p:spPr>
           <a:xfrm>
-            <a:off x="5166360" y="1773936"/>
-            <a:ext cx="2514600" cy="502920"/>
+            <a:off x="3575304" y="2304288"/>
+            <a:ext cx="2221992" cy="457200"/>
           </a:xfrm>
           <a:prstGeom prst="rect">
             <a:avLst/>
@@ -11120,27 +11120,27 @@
           <a:noFill/>
         </p:spPr>
         <p:txBody>
-          <a:bodyPr wrap="square" anchor="ctr" lIns="0" rIns="0" tIns="0" bIns="0">
+          <a:bodyPr wrap="square" anchor="t" lIns="0" rIns="0" tIns="0" bIns="0">
             <a:spAutoFit/>
           </a:bodyPr>
           <a:lstStyle/>
           <a:p>
             <a:pPr algn="l">
               <a:lnSpc>
-                <a:spcPct val="100000"/>
+                <a:spcPct val="110000"/>
               </a:lnSpc>
               <a:spcAft>
                 <a:spcPts val="0"/>
               </a:spcAft>
             </a:pPr>
             <a:r>
-              <a:rPr sz="1500" b="1" i="0">
+              <a:rPr sz="1350" b="1" i="0">
                 <a:solidFill>
                   <a:srgbClr val="111827"/>
                 </a:solidFill>
                 <a:latin typeface="Segoe UI Semibold"/>
               </a:rPr>
-              <a:t>No face recognition</a:t>
+              <a:t>Purpose-bound audit</a:t>
             </a:r>
           </a:p>
         </p:txBody>
@@ -11153,8 +11153,8 @@
         </p:nvSpPr>
         <p:spPr>
           <a:xfrm>
-            <a:off x="4553712" y="2514600"/>
-            <a:ext cx="3099816" cy="822960"/>
+            <a:off x="3575304" y="2788920"/>
+            <a:ext cx="2221992" cy="658368"/>
           </a:xfrm>
           <a:prstGeom prst="rect">
             <a:avLst/>
@@ -11169,20 +11169,20 @@
           <a:p>
             <a:pPr algn="l">
               <a:lnSpc>
-                <a:spcPct val="125000"/>
+                <a:spcPct val="120000"/>
               </a:lnSpc>
               <a:spcAft>
                 <a:spcPts val="0"/>
               </a:spcAft>
             </a:pPr>
             <a:r>
-              <a:rPr sz="1200" b="0" i="0">
+              <a:rPr sz="1050" b="0" i="0">
                 <a:solidFill>
                   <a:srgbClr val="616E82"/>
                 </a:solidFill>
                 <a:latin typeface="Segoe UI Semilight"/>
               </a:rPr>
-              <a:t>Deliberate — DPDP risk + documented bias</a:t>
+              <a:t>Every query logs user, purpose, case</a:t>
             </a:r>
           </a:p>
         </p:txBody>
@@ -11195,8 +11195,8 @@
         </p:nvSpPr>
         <p:spPr>
           <a:xfrm>
-            <a:off x="8046720" y="1554480"/>
-            <a:ext cx="3611880" cy="1965960"/>
+            <a:off x="6144768" y="1554480"/>
+            <a:ext cx="2679192" cy="1965960"/>
           </a:xfrm>
           <a:prstGeom prst="roundRect">
             <a:avLst>
@@ -11241,8 +11241,8 @@
         </p:nvSpPr>
         <p:spPr>
           <a:xfrm>
-            <a:off x="8302752" y="1828800"/>
-            <a:ext cx="420624" cy="420624"/>
+            <a:off x="6373368" y="1792224"/>
+            <a:ext cx="384048" cy="384048"/>
           </a:xfrm>
           <a:prstGeom prst="ellipse">
             <a:avLst/>
@@ -11285,8 +11285,8 @@
         </p:nvSpPr>
         <p:spPr>
           <a:xfrm>
-            <a:off x="8915400" y="1773936"/>
-            <a:ext cx="2514600" cy="502920"/>
+            <a:off x="6373368" y="2304288"/>
+            <a:ext cx="2221992" cy="457200"/>
           </a:xfrm>
           <a:prstGeom prst="rect">
             <a:avLst/>
@@ -11294,27 +11294,27 @@
           <a:noFill/>
         </p:spPr>
         <p:txBody>
-          <a:bodyPr wrap="square" anchor="ctr" lIns="0" rIns="0" tIns="0" bIns="0">
+          <a:bodyPr wrap="square" anchor="t" lIns="0" rIns="0" tIns="0" bIns="0">
             <a:spAutoFit/>
           </a:bodyPr>
           <a:lstStyle/>
           <a:p>
             <a:pPr algn="l">
               <a:lnSpc>
-                <a:spcPct val="100000"/>
+                <a:spcPct val="110000"/>
               </a:lnSpc>
               <a:spcAft>
                 <a:spcPts val="0"/>
               </a:spcAft>
             </a:pPr>
             <a:r>
-              <a:rPr sz="1500" b="1" i="0">
+              <a:rPr sz="1350" b="1" i="0">
                 <a:solidFill>
                   <a:srgbClr val="111827"/>
                 </a:solidFill>
                 <a:latin typeface="Segoe UI Semibold"/>
               </a:rPr>
-              <a:t>Purpose-bound audit</a:t>
+              <a:t>Evidence hash-at-write</a:t>
             </a:r>
           </a:p>
         </p:txBody>
@@ -11327,8 +11327,8 @@
         </p:nvSpPr>
         <p:spPr>
           <a:xfrm>
-            <a:off x="8302752" y="2514600"/>
-            <a:ext cx="3099816" cy="822960"/>
+            <a:off x="6373368" y="2788920"/>
+            <a:ext cx="2221992" cy="658368"/>
           </a:xfrm>
           <a:prstGeom prst="rect">
             <a:avLst/>
@@ -11343,20 +11343,20 @@
           <a:p>
             <a:pPr algn="l">
               <a:lnSpc>
-                <a:spcPct val="125000"/>
+                <a:spcPct val="120000"/>
               </a:lnSpc>
               <a:spcAft>
                 <a:spcPts val="0"/>
               </a:spcAft>
             </a:pPr>
             <a:r>
-              <a:rPr sz="1200" b="0" i="0">
+              <a:rPr sz="1050" b="0" i="0">
                 <a:solidFill>
                   <a:srgbClr val="616E82"/>
                 </a:solidFill>
                 <a:latin typeface="Segoe UI Semilight"/>
               </a:rPr>
-              <a:t>Every query logs user, purpose, case</a:t>
+              <a:t>SHA-256 at capture — a later edit shows as a mismatch</a:t>
             </a:r>
           </a:p>
         </p:txBody>
@@ -11369,8 +11369,8 @@
         </p:nvSpPr>
         <p:spPr>
           <a:xfrm>
-            <a:off x="548640" y="3703320"/>
-            <a:ext cx="3611880" cy="1965960"/>
+            <a:off x="8942832" y="1554480"/>
+            <a:ext cx="2679192" cy="1965960"/>
           </a:xfrm>
           <a:prstGeom prst="roundRect">
             <a:avLst>
@@ -11415,8 +11415,8 @@
         </p:nvSpPr>
         <p:spPr>
           <a:xfrm>
-            <a:off x="804672" y="3977640"/>
-            <a:ext cx="420624" cy="420624"/>
+            <a:off x="9171432" y="1792224"/>
+            <a:ext cx="384048" cy="384048"/>
           </a:xfrm>
           <a:prstGeom prst="ellipse">
             <a:avLst/>
@@ -11459,8 +11459,8 @@
         </p:nvSpPr>
         <p:spPr>
           <a:xfrm>
-            <a:off x="1417320" y="3922776"/>
-            <a:ext cx="2514600" cy="502920"/>
+            <a:off x="9171432" y="2304288"/>
+            <a:ext cx="2221992" cy="457200"/>
           </a:xfrm>
           <a:prstGeom prst="rect">
             <a:avLst/>
@@ -11468,27 +11468,27 @@
           <a:noFill/>
         </p:spPr>
         <p:txBody>
-          <a:bodyPr wrap="square" anchor="ctr" lIns="0" rIns="0" tIns="0" bIns="0">
+          <a:bodyPr wrap="square" anchor="t" lIns="0" rIns="0" tIns="0" bIns="0">
             <a:spAutoFit/>
           </a:bodyPr>
           <a:lstStyle/>
           <a:p>
             <a:pPr algn="l">
               <a:lnSpc>
-                <a:spcPct val="100000"/>
+                <a:spcPct val="110000"/>
               </a:lnSpc>
               <a:spcAft>
                 <a:spcPts val="0"/>
               </a:spcAft>
             </a:pPr>
             <a:r>
-              <a:rPr sz="1500" b="1" i="0">
+              <a:rPr sz="1350" b="1" i="0">
                 <a:solidFill>
                   <a:srgbClr val="111827"/>
                 </a:solidFill>
                 <a:latin typeface="Segoe UI Semibold"/>
               </a:rPr>
-              <a:t>Data minimization</a:t>
+              <a:t>§63-oriented export</a:t>
             </a:r>
           </a:p>
         </p:txBody>
@@ -11501,8 +11501,8 @@
         </p:nvSpPr>
         <p:spPr>
           <a:xfrm>
-            <a:off x="804672" y="4663440"/>
-            <a:ext cx="3099816" cy="822960"/>
+            <a:off x="9171432" y="2788920"/>
+            <a:ext cx="2221992" cy="658368"/>
           </a:xfrm>
           <a:prstGeom prst="rect">
             <a:avLst/>
@@ -11517,20 +11517,20 @@
           <a:p>
             <a:pPr algn="l">
               <a:lnSpc>
-                <a:spcPct val="125000"/>
+                <a:spcPct val="120000"/>
               </a:lnSpc>
               <a:spcAft>
                 <a:spcPts val="0"/>
               </a:spcAft>
             </a:pPr>
             <a:r>
-              <a:rPr sz="1200" b="0" i="0">
+              <a:rPr sz="1050" b="0" i="0">
                 <a:solidFill>
                   <a:srgbClr val="616E82"/>
                 </a:solidFill>
                 <a:latin typeface="Segoe UI Semilight"/>
               </a:rPr>
-              <a:t>No face embeddings, anywhere</a:t>
+              <a:t>Provenance + Part A/B form, CONFIRMED tier only</a:t>
             </a:r>
           </a:p>
         </p:txBody>
@@ -11543,8 +11543,8 @@
         </p:nvSpPr>
         <p:spPr>
           <a:xfrm>
-            <a:off x="4297680" y="3703320"/>
-            <a:ext cx="3611880" cy="1965960"/>
+            <a:off x="548640" y="3703320"/>
+            <a:ext cx="2679192" cy="1965960"/>
           </a:xfrm>
           <a:prstGeom prst="roundRect">
             <a:avLst>
@@ -11589,8 +11589,8 @@
         </p:nvSpPr>
         <p:spPr>
           <a:xfrm>
-            <a:off x="4553712" y="3977640"/>
-            <a:ext cx="420624" cy="420624"/>
+            <a:off x="777240" y="3941064"/>
+            <a:ext cx="384048" cy="384048"/>
           </a:xfrm>
           <a:prstGeom prst="ellipse">
             <a:avLst/>
@@ -11633,8 +11633,8 @@
         </p:nvSpPr>
         <p:spPr>
           <a:xfrm>
-            <a:off x="5166360" y="3922776"/>
-            <a:ext cx="2514600" cy="502920"/>
+            <a:off x="777240" y="4453128"/>
+            <a:ext cx="2221992" cy="457200"/>
           </a:xfrm>
           <a:prstGeom prst="rect">
             <a:avLst/>
@@ -11642,27 +11642,27 @@
           <a:noFill/>
         </p:spPr>
         <p:txBody>
-          <a:bodyPr wrap="square" anchor="ctr" lIns="0" rIns="0" tIns="0" bIns="0">
+          <a:bodyPr wrap="square" anchor="t" lIns="0" rIns="0" tIns="0" bIns="0">
             <a:spAutoFit/>
           </a:bodyPr>
           <a:lstStyle/>
           <a:p>
             <a:pPr algn="l">
               <a:lnSpc>
-                <a:spcPct val="100000"/>
+                <a:spcPct val="110000"/>
               </a:lnSpc>
               <a:spcAft>
                 <a:spcPts val="0"/>
               </a:spcAft>
             </a:pPr>
             <a:r>
-              <a:rPr sz="1500" b="1" i="0">
+              <a:rPr sz="1350" b="1" i="0">
                 <a:solidFill>
                   <a:srgbClr val="111827"/>
                 </a:solidFill>
                 <a:latin typeface="Segoe UI Semibold"/>
               </a:rPr>
-              <a:t>Enforced retention</a:t>
+              <a:t>No face recognition</a:t>
             </a:r>
           </a:p>
         </p:txBody>
@@ -11675,8 +11675,8 @@
         </p:nvSpPr>
         <p:spPr>
           <a:xfrm>
-            <a:off x="4553712" y="4663440"/>
-            <a:ext cx="3099816" cy="822960"/>
+            <a:off x="777240" y="4937760"/>
+            <a:ext cx="2221992" cy="658368"/>
           </a:xfrm>
           <a:prstGeom prst="rect">
             <a:avLst/>
@@ -11691,20 +11691,20 @@
           <a:p>
             <a:pPr algn="l">
               <a:lnSpc>
-                <a:spcPct val="125000"/>
+                <a:spcPct val="120000"/>
               </a:lnSpc>
               <a:spcAft>
                 <a:spcPts val="0"/>
               </a:spcAft>
             </a:pPr>
             <a:r>
-              <a:rPr sz="1200" b="0" i="0">
+              <a:rPr sz="1050" b="0" i="0">
                 <a:solidFill>
                   <a:srgbClr val="616E82"/>
                 </a:solidFill>
                 <a:latin typeface="Segoe UI Semilight"/>
               </a:rPr>
-              <a:t>Purges in code, not policy-on-paper</a:t>
+              <a:t>Deliberate — DPDP risk + documented bias</a:t>
             </a:r>
           </a:p>
         </p:txBody>
@@ -11717,8 +11717,8 @@
         </p:nvSpPr>
         <p:spPr>
           <a:xfrm>
-            <a:off x="8046720" y="3703320"/>
-            <a:ext cx="3611880" cy="1965960"/>
+            <a:off x="3346704" y="3703320"/>
+            <a:ext cx="2679192" cy="1965960"/>
           </a:xfrm>
           <a:prstGeom prst="roundRect">
             <a:avLst>
@@ -11763,8 +11763,8 @@
         </p:nvSpPr>
         <p:spPr>
           <a:xfrm>
-            <a:off x="8302752" y="3977640"/>
-            <a:ext cx="420624" cy="420624"/>
+            <a:off x="3575304" y="3941064"/>
+            <a:ext cx="384048" cy="384048"/>
           </a:xfrm>
           <a:prstGeom prst="ellipse">
             <a:avLst/>
@@ -11807,8 +11807,8 @@
         </p:nvSpPr>
         <p:spPr>
           <a:xfrm>
-            <a:off x="8915400" y="3922776"/>
-            <a:ext cx="2514600" cy="502920"/>
+            <a:off x="3575304" y="4453128"/>
+            <a:ext cx="2221992" cy="457200"/>
           </a:xfrm>
           <a:prstGeom prst="rect">
             <a:avLst/>
@@ -11816,27 +11816,27 @@
           <a:noFill/>
         </p:spPr>
         <p:txBody>
-          <a:bodyPr wrap="square" anchor="ctr" lIns="0" rIns="0" tIns="0" bIns="0">
+          <a:bodyPr wrap="square" anchor="t" lIns="0" rIns="0" tIns="0" bIns="0">
             <a:spAutoFit/>
           </a:bodyPr>
           <a:lstStyle/>
           <a:p>
             <a:pPr algn="l">
               <a:lnSpc>
-                <a:spcPct val="100000"/>
+                <a:spcPct val="110000"/>
               </a:lnSpc>
               <a:spcAft>
                 <a:spcPts val="0"/>
               </a:spcAft>
             </a:pPr>
             <a:r>
-              <a:rPr sz="1500" b="1" i="0">
+              <a:rPr sz="1350" b="1" i="0">
                 <a:solidFill>
                   <a:srgbClr val="111827"/>
                 </a:solidFill>
                 <a:latin typeface="Segoe UI Semibold"/>
               </a:rPr>
-              <a:t>Found &amp; fixed</a:t>
+              <a:t>Data minimization</a:t>
             </a:r>
           </a:p>
         </p:txBody>
@@ -11849,8 +11849,8 @@
         </p:nvSpPr>
         <p:spPr>
           <a:xfrm>
-            <a:off x="8302752" y="4663440"/>
-            <a:ext cx="3099816" cy="822960"/>
+            <a:off x="3575304" y="4937760"/>
+            <a:ext cx="2221992" cy="658368"/>
           </a:xfrm>
           <a:prstGeom prst="rect">
             <a:avLst/>
@@ -11865,19 +11865,367 @@
           <a:p>
             <a:pPr algn="l">
               <a:lnSpc>
-                <a:spcPct val="125000"/>
+                <a:spcPct val="120000"/>
               </a:lnSpc>
               <a:spcAft>
                 <a:spcPts val="0"/>
               </a:spcAft>
             </a:pPr>
             <a:r>
-              <a:rPr sz="1200" b="0" i="0">
+              <a:rPr sz="1050" b="0" i="0">
                 <a:solidFill>
                   <a:srgbClr val="616E82"/>
                 </a:solidFill>
                 <a:latin typeface="Segoe UI Semilight"/>
               </a:rPr>
+              <a:t>No face embeddings, anywhere</a:t>
+            </a:r>
+          </a:p>
+        </p:txBody>
+      </p:sp>
+      <p:sp>
+        <p:nvSpPr>
+          <p:cNvPr id="36" name="Rounded Rectangle 35"/>
+          <p:cNvSpPr/>
+          <p:nvPr/>
+        </p:nvSpPr>
+        <p:spPr>
+          <a:xfrm>
+            <a:off x="6144768" y="3703320"/>
+            <a:ext cx="2679192" cy="1965960"/>
+          </a:xfrm>
+          <a:prstGeom prst="roundRect">
+            <a:avLst>
+              <a:gd name="adj" fmla="val 8000"/>
+            </a:avLst>
+          </a:prstGeom>
+          <a:solidFill>
+            <a:srgbClr val="F4F6FA"/>
+          </a:solidFill>
+          <a:ln>
+            <a:noFill/>
+          </a:ln>
+          <a:effectLst/>
+        </p:spPr>
+        <p:style>
+          <a:lnRef idx="1">
+            <a:schemeClr val="accent1"/>
+          </a:lnRef>
+          <a:fillRef idx="3">
+            <a:schemeClr val="accent1"/>
+          </a:fillRef>
+          <a:effectRef idx="2">
+            <a:schemeClr val="accent1"/>
+          </a:effectRef>
+          <a:fontRef idx="minor">
+            <a:schemeClr val="lt1"/>
+          </a:fontRef>
+        </p:style>
+        <p:txBody>
+          <a:bodyPr rtlCol="0" anchor="ctr"/>
+          <a:lstStyle/>
+          <a:p>
+            <a:pPr algn="ctr"/>
+          </a:p>
+        </p:txBody>
+      </p:sp>
+      <p:sp>
+        <p:nvSpPr>
+          <p:cNvPr id="37" name="Oval 36"/>
+          <p:cNvSpPr/>
+          <p:nvPr/>
+        </p:nvSpPr>
+        <p:spPr>
+          <a:xfrm>
+            <a:off x="6373368" y="3941064"/>
+            <a:ext cx="384048" cy="384048"/>
+          </a:xfrm>
+          <a:prstGeom prst="ellipse">
+            <a:avLst/>
+          </a:prstGeom>
+          <a:solidFill>
+            <a:srgbClr val="2F7AF2"/>
+          </a:solidFill>
+          <a:ln>
+            <a:noFill/>
+          </a:ln>
+          <a:effectLst/>
+        </p:spPr>
+        <p:style>
+          <a:lnRef idx="1">
+            <a:schemeClr val="accent1"/>
+          </a:lnRef>
+          <a:fillRef idx="3">
+            <a:schemeClr val="accent1"/>
+          </a:fillRef>
+          <a:effectRef idx="2">
+            <a:schemeClr val="accent1"/>
+          </a:effectRef>
+          <a:fontRef idx="minor">
+            <a:schemeClr val="lt1"/>
+          </a:fontRef>
+        </p:style>
+        <p:txBody>
+          <a:bodyPr rtlCol="0" anchor="ctr"/>
+          <a:lstStyle/>
+          <a:p>
+            <a:pPr algn="ctr"/>
+          </a:p>
+        </p:txBody>
+      </p:sp>
+      <p:sp>
+        <p:nvSpPr>
+          <p:cNvPr id="38" name="TextBox 37"/>
+          <p:cNvSpPr txBox="1"/>
+          <p:nvPr/>
+        </p:nvSpPr>
+        <p:spPr>
+          <a:xfrm>
+            <a:off x="6373368" y="4453128"/>
+            <a:ext cx="2221992" cy="457200"/>
+          </a:xfrm>
+          <a:prstGeom prst="rect">
+            <a:avLst/>
+          </a:prstGeom>
+          <a:noFill/>
+        </p:spPr>
+        <p:txBody>
+          <a:bodyPr wrap="square" anchor="t" lIns="0" rIns="0" tIns="0" bIns="0">
+            <a:spAutoFit/>
+          </a:bodyPr>
+          <a:lstStyle/>
+          <a:p>
+            <a:pPr algn="l">
+              <a:lnSpc>
+                <a:spcPct val="110000"/>
+              </a:lnSpc>
+              <a:spcAft>
+                <a:spcPts val="0"/>
+              </a:spcAft>
+            </a:pPr>
+            <a:r>
+              <a:rPr sz="1350" b="1" i="0">
+                <a:solidFill>
+                  <a:srgbClr val="111827"/>
+                </a:solidFill>
+                <a:latin typeface="Segoe UI Semibold"/>
+              </a:rPr>
+              <a:t>Enforced retention</a:t>
+            </a:r>
+          </a:p>
+        </p:txBody>
+      </p:sp>
+      <p:sp>
+        <p:nvSpPr>
+          <p:cNvPr id="39" name="TextBox 38"/>
+          <p:cNvSpPr txBox="1"/>
+          <p:nvPr/>
+        </p:nvSpPr>
+        <p:spPr>
+          <a:xfrm>
+            <a:off x="6373368" y="4937760"/>
+            <a:ext cx="2221992" cy="658368"/>
+          </a:xfrm>
+          <a:prstGeom prst="rect">
+            <a:avLst/>
+          </a:prstGeom>
+          <a:noFill/>
+        </p:spPr>
+        <p:txBody>
+          <a:bodyPr wrap="square" anchor="t" lIns="0" rIns="0" tIns="0" bIns="0">
+            <a:spAutoFit/>
+          </a:bodyPr>
+          <a:lstStyle/>
+          <a:p>
+            <a:pPr algn="l">
+              <a:lnSpc>
+                <a:spcPct val="120000"/>
+              </a:lnSpc>
+              <a:spcAft>
+                <a:spcPts val="0"/>
+              </a:spcAft>
+            </a:pPr>
+            <a:r>
+              <a:rPr sz="1050" b="0" i="0">
+                <a:solidFill>
+                  <a:srgbClr val="616E82"/>
+                </a:solidFill>
+                <a:latin typeface="Segoe UI Semilight"/>
+              </a:rPr>
+              <a:t>Purges in code, not policy-on-paper</a:t>
+            </a:r>
+          </a:p>
+        </p:txBody>
+      </p:sp>
+      <p:sp>
+        <p:nvSpPr>
+          <p:cNvPr id="40" name="Rounded Rectangle 39"/>
+          <p:cNvSpPr/>
+          <p:nvPr/>
+        </p:nvSpPr>
+        <p:spPr>
+          <a:xfrm>
+            <a:off x="8942832" y="3703320"/>
+            <a:ext cx="2679192" cy="1965960"/>
+          </a:xfrm>
+          <a:prstGeom prst="roundRect">
+            <a:avLst>
+              <a:gd name="adj" fmla="val 8000"/>
+            </a:avLst>
+          </a:prstGeom>
+          <a:solidFill>
+            <a:srgbClr val="F4F6FA"/>
+          </a:solidFill>
+          <a:ln>
+            <a:noFill/>
+          </a:ln>
+          <a:effectLst/>
+        </p:spPr>
+        <p:style>
+          <a:lnRef idx="1">
+            <a:schemeClr val="accent1"/>
+          </a:lnRef>
+          <a:fillRef idx="3">
+            <a:schemeClr val="accent1"/>
+          </a:fillRef>
+          <a:effectRef idx="2">
+            <a:schemeClr val="accent1"/>
+          </a:effectRef>
+          <a:fontRef idx="minor">
+            <a:schemeClr val="lt1"/>
+          </a:fontRef>
+        </p:style>
+        <p:txBody>
+          <a:bodyPr rtlCol="0" anchor="ctr"/>
+          <a:lstStyle/>
+          <a:p>
+            <a:pPr algn="ctr"/>
+          </a:p>
+        </p:txBody>
+      </p:sp>
+      <p:sp>
+        <p:nvSpPr>
+          <p:cNvPr id="41" name="Oval 40"/>
+          <p:cNvSpPr/>
+          <p:nvPr/>
+        </p:nvSpPr>
+        <p:spPr>
+          <a:xfrm>
+            <a:off x="9171432" y="3941064"/>
+            <a:ext cx="384048" cy="384048"/>
+          </a:xfrm>
+          <a:prstGeom prst="ellipse">
+            <a:avLst/>
+          </a:prstGeom>
+          <a:solidFill>
+            <a:srgbClr val="2F7AF2"/>
+          </a:solidFill>
+          <a:ln>
+            <a:noFill/>
+          </a:ln>
+          <a:effectLst/>
+        </p:spPr>
+        <p:style>
+          <a:lnRef idx="1">
+            <a:schemeClr val="accent1"/>
+          </a:lnRef>
+          <a:fillRef idx="3">
+            <a:schemeClr val="accent1"/>
+          </a:fillRef>
+          <a:effectRef idx="2">
+            <a:schemeClr val="accent1"/>
+          </a:effectRef>
+          <a:fontRef idx="minor">
+            <a:schemeClr val="lt1"/>
+          </a:fontRef>
+        </p:style>
+        <p:txBody>
+          <a:bodyPr rtlCol="0" anchor="ctr"/>
+          <a:lstStyle/>
+          <a:p>
+            <a:pPr algn="ctr"/>
+          </a:p>
+        </p:txBody>
+      </p:sp>
+      <p:sp>
+        <p:nvSpPr>
+          <p:cNvPr id="42" name="TextBox 41"/>
+          <p:cNvSpPr txBox="1"/>
+          <p:nvPr/>
+        </p:nvSpPr>
+        <p:spPr>
+          <a:xfrm>
+            <a:off x="9171432" y="4453128"/>
+            <a:ext cx="2221992" cy="457200"/>
+          </a:xfrm>
+          <a:prstGeom prst="rect">
+            <a:avLst/>
+          </a:prstGeom>
+          <a:noFill/>
+        </p:spPr>
+        <p:txBody>
+          <a:bodyPr wrap="square" anchor="t" lIns="0" rIns="0" tIns="0" bIns="0">
+            <a:spAutoFit/>
+          </a:bodyPr>
+          <a:lstStyle/>
+          <a:p>
+            <a:pPr algn="l">
+              <a:lnSpc>
+                <a:spcPct val="110000"/>
+              </a:lnSpc>
+              <a:spcAft>
+                <a:spcPts val="0"/>
+              </a:spcAft>
+            </a:pPr>
+            <a:r>
+              <a:rPr sz="1350" b="1" i="0">
+                <a:solidFill>
+                  <a:srgbClr val="111827"/>
+                </a:solidFill>
+                <a:latin typeface="Segoe UI Semibold"/>
+              </a:rPr>
+              <a:t>Found &amp; fixed</a:t>
+            </a:r>
+          </a:p>
+        </p:txBody>
+      </p:sp>
+      <p:sp>
+        <p:nvSpPr>
+          <p:cNvPr id="43" name="TextBox 42"/>
+          <p:cNvSpPr txBox="1"/>
+          <p:nvPr/>
+        </p:nvSpPr>
+        <p:spPr>
+          <a:xfrm>
+            <a:off x="9171432" y="4937760"/>
+            <a:ext cx="2221992" cy="658368"/>
+          </a:xfrm>
+          <a:prstGeom prst="rect">
+            <a:avLst/>
+          </a:prstGeom>
+          <a:noFill/>
+        </p:spPr>
+        <p:txBody>
+          <a:bodyPr wrap="square" anchor="t" lIns="0" rIns="0" tIns="0" bIns="0">
+            <a:spAutoFit/>
+          </a:bodyPr>
+          <a:lstStyle/>
+          <a:p>
+            <a:pPr algn="l">
+              <a:lnSpc>
+                <a:spcPct val="120000"/>
+              </a:lnSpc>
+              <a:spcAft>
+                <a:spcPts val="0"/>
+              </a:spcAft>
+            </a:pPr>
+            <a:r>
+              <a:rPr sz="1050" b="0" i="0">
+                <a:solidFill>
+                  <a:srgbClr val="616E82"/>
+                </a:solidFill>
+                <a:latin typeface="Segoe UI Semilight"/>
+              </a:rPr>
               <a:t>SSRF gap closed during development</a:t>
             </a:r>
           </a:p>
@@ -11885,7 +12233,7 @@
       </p:sp>
       <p:sp>
         <p:nvSpPr>
-          <p:cNvPr id="36" name="TextBox 35"/>
+          <p:cNvPr id="44" name="TextBox 43"/>
           <p:cNvSpPr txBox="1"/>
           <p:nvPr/>
         </p:nvSpPr>
@@ -17128,7 +17476,7 @@
             <a:avLst/>
           </a:prstGeom>
           <a:solidFill>
-            <a:srgbClr val="E04A4A"/>
+            <a:srgbClr val="F29A1E"/>
           </a:solidFill>
           <a:ln>
             <a:noFill/>
@@ -19133,7 +19481,7 @@
                 </a:solidFill>
                 <a:latin typeface="Segoe UI"/>
               </a:rPr>
-              <a:t>§63 evidence certificate export — not yet built</a:t>
+              <a:t>§63 export — built &amp; tested, no UI control or legal review yet</a:t>
             </a:r>
           </a:p>
         </p:txBody>
@@ -29920,13 +30268,13 @@
               </a:spcAft>
             </a:pPr>
             <a:r>
-              <a:rPr sz="3000" b="1" i="0">
+              <a:rPr sz="2500" b="1" i="0">
                 <a:solidFill>
                   <a:srgbClr val="FFFFFF"/>
                 </a:solidFill>
                 <a:latin typeface="Bahnschrift SemiBold"/>
               </a:rPr>
-              <a:t>Model 1 + Model 2 + Model 3 — a real hybrid, built and tested</a:t>
+              <a:t>Model 1 + 2 + 3 + a Model 4 pilot slice — a real hybrid, built and tested</a:t>
             </a:r>
           </a:p>
         </p:txBody>
@@ -30024,7 +30372,7 @@
         <p:spPr>
           <a:xfrm>
             <a:off x="548640" y="1508760"/>
-            <a:ext cx="3611880" cy="3063240"/>
+            <a:ext cx="2651760" cy="3291840"/>
           </a:xfrm>
           <a:prstGeom prst="roundRect">
             <a:avLst>
@@ -30069,8 +30417,8 @@
         </p:nvSpPr>
         <p:spPr>
           <a:xfrm>
-            <a:off x="822960" y="1737360"/>
-            <a:ext cx="1828800" cy="822960"/>
+            <a:off x="777240" y="1691640"/>
+            <a:ext cx="1645920" cy="685800"/>
           </a:xfrm>
           <a:prstGeom prst="rect">
             <a:avLst/>
@@ -30092,7 +30440,7 @@
               </a:spcAft>
             </a:pPr>
             <a:r>
-              <a:rPr sz="4400" b="1" i="0">
+              <a:rPr sz="3400" b="1" i="0">
                 <a:solidFill>
                   <a:srgbClr val="2F7AF2"/>
                 </a:solidFill>
@@ -30111,8 +30459,8 @@
         </p:nvSpPr>
         <p:spPr>
           <a:xfrm>
-            <a:off x="3694176" y="1819656"/>
-            <a:ext cx="201168" cy="201168"/>
+            <a:off x="2788920" y="1737360"/>
+            <a:ext cx="182880" cy="182880"/>
           </a:xfrm>
           <a:prstGeom prst="ellipse">
             <a:avLst/>
@@ -30155,8 +30503,8 @@
         </p:nvSpPr>
         <p:spPr>
           <a:xfrm>
-            <a:off x="822960" y="2606040"/>
-            <a:ext cx="3063240" cy="640080"/>
+            <a:off x="777240" y="2468880"/>
+            <a:ext cx="2194560" cy="548640"/>
           </a:xfrm>
           <a:prstGeom prst="rect">
             <a:avLst/>
@@ -30178,7 +30526,7 @@
               </a:spcAft>
             </a:pPr>
             <a:r>
-              <a:rPr sz="1900" b="1" i="0">
+              <a:rPr sz="1550" b="1" i="0">
                 <a:solidFill>
                   <a:srgbClr val="FFFFFF"/>
                 </a:solidFill>
@@ -30197,8 +30545,8 @@
         </p:nvSpPr>
         <p:spPr>
           <a:xfrm>
-            <a:off x="822960" y="3246120"/>
-            <a:ext cx="3063240" cy="1097280"/>
+            <a:off x="777240" y="3017520"/>
+            <a:ext cx="2194560" cy="1691640"/>
           </a:xfrm>
           <a:prstGeom prst="rect">
             <a:avLst/>
@@ -30213,14 +30561,14 @@
           <a:p>
             <a:pPr algn="l">
               <a:lnSpc>
-                <a:spcPct val="125000"/>
+                <a:spcPct val="120000"/>
               </a:lnSpc>
               <a:spcAft>
                 <a:spcPts val="0"/>
               </a:spcAft>
             </a:pPr>
             <a:r>
-              <a:rPr sz="1300" b="0" i="0">
+              <a:rPr sz="1050" b="0" i="0">
                 <a:solidFill>
                   <a:srgbClr val="B9C6DA"/>
                 </a:solidFill>
@@ -30239,8 +30587,8 @@
         </p:nvSpPr>
         <p:spPr>
           <a:xfrm>
-            <a:off x="4297680" y="1508760"/>
-            <a:ext cx="3611880" cy="3063240"/>
+            <a:off x="3337560" y="1508760"/>
+            <a:ext cx="2651760" cy="3291840"/>
           </a:xfrm>
           <a:prstGeom prst="roundRect">
             <a:avLst>
@@ -30285,8 +30633,8 @@
         </p:nvSpPr>
         <p:spPr>
           <a:xfrm>
-            <a:off x="4572000" y="1737360"/>
-            <a:ext cx="1828800" cy="822960"/>
+            <a:off x="3566160" y="1691640"/>
+            <a:ext cx="1645920" cy="685800"/>
           </a:xfrm>
           <a:prstGeom prst="rect">
             <a:avLst/>
@@ -30308,7 +30656,7 @@
               </a:spcAft>
             </a:pPr>
             <a:r>
-              <a:rPr sz="4400" b="1" i="0">
+              <a:rPr sz="3400" b="1" i="0">
                 <a:solidFill>
                   <a:srgbClr val="2F7AF2"/>
                 </a:solidFill>
@@ -30327,8 +30675,8 @@
         </p:nvSpPr>
         <p:spPr>
           <a:xfrm>
-            <a:off x="7443216" y="1819656"/>
-            <a:ext cx="201168" cy="201168"/>
+            <a:off x="5577840" y="1737360"/>
+            <a:ext cx="182880" cy="182880"/>
           </a:xfrm>
           <a:prstGeom prst="ellipse">
             <a:avLst/>
@@ -30371,8 +30719,8 @@
         </p:nvSpPr>
         <p:spPr>
           <a:xfrm>
-            <a:off x="4572000" y="2606040"/>
-            <a:ext cx="3063240" cy="640080"/>
+            <a:off x="3566160" y="2468880"/>
+            <a:ext cx="2194560" cy="548640"/>
           </a:xfrm>
           <a:prstGeom prst="rect">
             <a:avLst/>
@@ -30394,7 +30742,7 @@
               </a:spcAft>
             </a:pPr>
             <a:r>
-              <a:rPr sz="1900" b="1" i="0">
+              <a:rPr sz="1550" b="1" i="0">
                 <a:solidFill>
                   <a:srgbClr val="FFFFFF"/>
                 </a:solidFill>
@@ -30413,8 +30761,8 @@
         </p:nvSpPr>
         <p:spPr>
           <a:xfrm>
-            <a:off x="4572000" y="3246120"/>
-            <a:ext cx="3063240" cy="1097280"/>
+            <a:off x="3566160" y="3017520"/>
+            <a:ext cx="2194560" cy="1691640"/>
           </a:xfrm>
           <a:prstGeom prst="rect">
             <a:avLst/>
@@ -30429,14 +30777,14 @@
           <a:p>
             <a:pPr algn="l">
               <a:lnSpc>
-                <a:spcPct val="125000"/>
+                <a:spcPct val="120000"/>
               </a:lnSpc>
               <a:spcAft>
                 <a:spcPts val="0"/>
               </a:spcAft>
             </a:pPr>
             <a:r>
-              <a:rPr sz="1300" b="0" i="0">
+              <a:rPr sz="1050" b="0" i="0">
                 <a:solidFill>
                   <a:srgbClr val="B9C6DA"/>
                 </a:solidFill>
@@ -30455,8 +30803,8 @@
         </p:nvSpPr>
         <p:spPr>
           <a:xfrm>
-            <a:off x="8046720" y="1508760"/>
-            <a:ext cx="3611880" cy="3063240"/>
+            <a:off x="6126480" y="1508760"/>
+            <a:ext cx="2651760" cy="3291840"/>
           </a:xfrm>
           <a:prstGeom prst="roundRect">
             <a:avLst>
@@ -30501,8 +30849,8 @@
         </p:nvSpPr>
         <p:spPr>
           <a:xfrm>
-            <a:off x="8321040" y="1737360"/>
-            <a:ext cx="1828800" cy="822960"/>
+            <a:off x="6355080" y="1691640"/>
+            <a:ext cx="1645920" cy="685800"/>
           </a:xfrm>
           <a:prstGeom prst="rect">
             <a:avLst/>
@@ -30524,7 +30872,7 @@
               </a:spcAft>
             </a:pPr>
             <a:r>
-              <a:rPr sz="4400" b="1" i="0">
+              <a:rPr sz="3400" b="1" i="0">
                 <a:solidFill>
                   <a:srgbClr val="2F7AF2"/>
                 </a:solidFill>
@@ -30543,8 +30891,8 @@
         </p:nvSpPr>
         <p:spPr>
           <a:xfrm>
-            <a:off x="11192256" y="1819656"/>
-            <a:ext cx="201168" cy="201168"/>
+            <a:off x="8366760" y="1737360"/>
+            <a:ext cx="182880" cy="182880"/>
           </a:xfrm>
           <a:prstGeom prst="ellipse">
             <a:avLst/>
@@ -30587,8 +30935,8 @@
         </p:nvSpPr>
         <p:spPr>
           <a:xfrm>
-            <a:off x="8321040" y="2606040"/>
-            <a:ext cx="3063240" cy="640080"/>
+            <a:off x="6355080" y="2468880"/>
+            <a:ext cx="2194560" cy="548640"/>
           </a:xfrm>
           <a:prstGeom prst="rect">
             <a:avLst/>
@@ -30610,7 +30958,7 @@
               </a:spcAft>
             </a:pPr>
             <a:r>
-              <a:rPr sz="1900" b="1" i="0">
+              <a:rPr sz="1550" b="1" i="0">
                 <a:solidFill>
                   <a:srgbClr val="FFFFFF"/>
                 </a:solidFill>
@@ -30629,8 +30977,8 @@
         </p:nvSpPr>
         <p:spPr>
           <a:xfrm>
-            <a:off x="8321040" y="3246120"/>
-            <a:ext cx="3063240" cy="1097280"/>
+            <a:off x="6355080" y="3017520"/>
+            <a:ext cx="2194560" cy="1691640"/>
           </a:xfrm>
           <a:prstGeom prst="rect">
             <a:avLst/>
@@ -30645,14 +30993,14 @@
           <a:p>
             <a:pPr algn="l">
               <a:lnSpc>
-                <a:spcPct val="125000"/>
+                <a:spcPct val="120000"/>
               </a:lnSpc>
               <a:spcAft>
                 <a:spcPts val="0"/>
               </a:spcAft>
             </a:pPr>
             <a:r>
-              <a:rPr sz="1300" b="0" i="0">
+              <a:rPr sz="1050" b="0" i="0">
                 <a:solidFill>
                   <a:srgbClr val="B9C6DA"/>
                 </a:solidFill>
@@ -30665,14 +31013,230 @@
       </p:sp>
       <p:sp>
         <p:nvSpPr>
-          <p:cNvPr id="27" name="TextBox 26"/>
+          <p:cNvPr id="27" name="Rounded Rectangle 26"/>
+          <p:cNvSpPr/>
+          <p:nvPr/>
+        </p:nvSpPr>
+        <p:spPr>
+          <a:xfrm>
+            <a:off x="8915400" y="1508760"/>
+            <a:ext cx="2651760" cy="3291840"/>
+          </a:xfrm>
+          <a:prstGeom prst="roundRect">
+            <a:avLst>
+              <a:gd name="adj" fmla="val 8000"/>
+            </a:avLst>
+          </a:prstGeom>
+          <a:solidFill>
+            <a:srgbClr val="F4F6FA"/>
+          </a:solidFill>
+          <a:ln>
+            <a:noFill/>
+          </a:ln>
+          <a:effectLst/>
+        </p:spPr>
+        <p:style>
+          <a:lnRef idx="1">
+            <a:schemeClr val="accent1"/>
+          </a:lnRef>
+          <a:fillRef idx="3">
+            <a:schemeClr val="accent1"/>
+          </a:fillRef>
+          <a:effectRef idx="2">
+            <a:schemeClr val="accent1"/>
+          </a:effectRef>
+          <a:fontRef idx="minor">
+            <a:schemeClr val="lt1"/>
+          </a:fontRef>
+        </p:style>
+        <p:txBody>
+          <a:bodyPr rtlCol="0" anchor="ctr"/>
+          <a:lstStyle/>
+          <a:p>
+            <a:pPr algn="ctr"/>
+          </a:p>
+        </p:txBody>
+      </p:sp>
+      <p:sp>
+        <p:nvSpPr>
+          <p:cNvPr id="28" name="TextBox 27"/>
           <p:cNvSpPr txBox="1"/>
           <p:nvPr/>
         </p:nvSpPr>
         <p:spPr>
           <a:xfrm>
-            <a:off x="548640" y="4937760"/>
-            <a:ext cx="11064240" cy="1188720"/>
+            <a:off x="9144000" y="1691640"/>
+            <a:ext cx="1645920" cy="685800"/>
+          </a:xfrm>
+          <a:prstGeom prst="rect">
+            <a:avLst/>
+          </a:prstGeom>
+          <a:noFill/>
+        </p:spPr>
+        <p:txBody>
+          <a:bodyPr wrap="square" anchor="t" lIns="0" rIns="0" tIns="0" bIns="0">
+            <a:spAutoFit/>
+          </a:bodyPr>
+          <a:lstStyle/>
+          <a:p>
+            <a:pPr algn="l">
+              <a:lnSpc>
+                <a:spcPct val="100000"/>
+              </a:lnSpc>
+              <a:spcAft>
+                <a:spcPts val="0"/>
+              </a:spcAft>
+            </a:pPr>
+            <a:r>
+              <a:rPr sz="3400" b="1" i="0">
+                <a:solidFill>
+                  <a:srgbClr val="EAEEF5"/>
+                </a:solidFill>
+                <a:latin typeface="Bahnschrift SemiBold"/>
+              </a:rPr>
+              <a:t>04</a:t>
+            </a:r>
+          </a:p>
+        </p:txBody>
+      </p:sp>
+      <p:sp>
+        <p:nvSpPr>
+          <p:cNvPr id="29" name="Oval 28"/>
+          <p:cNvSpPr/>
+          <p:nvPr/>
+        </p:nvSpPr>
+        <p:spPr>
+          <a:xfrm>
+            <a:off x="11155680" y="1737360"/>
+            <a:ext cx="182880" cy="182880"/>
+          </a:xfrm>
+          <a:prstGeom prst="ellipse">
+            <a:avLst/>
+          </a:prstGeom>
+          <a:solidFill>
+            <a:srgbClr val="F29A1E"/>
+          </a:solidFill>
+          <a:ln>
+            <a:noFill/>
+          </a:ln>
+          <a:effectLst/>
+        </p:spPr>
+        <p:style>
+          <a:lnRef idx="1">
+            <a:schemeClr val="accent1"/>
+          </a:lnRef>
+          <a:fillRef idx="3">
+            <a:schemeClr val="accent1"/>
+          </a:fillRef>
+          <a:effectRef idx="2">
+            <a:schemeClr val="accent1"/>
+          </a:effectRef>
+          <a:fontRef idx="minor">
+            <a:schemeClr val="lt1"/>
+          </a:fontRef>
+        </p:style>
+        <p:txBody>
+          <a:bodyPr rtlCol="0" anchor="ctr"/>
+          <a:lstStyle/>
+          <a:p>
+            <a:pPr algn="ctr"/>
+          </a:p>
+        </p:txBody>
+      </p:sp>
+      <p:sp>
+        <p:nvSpPr>
+          <p:cNvPr id="30" name="TextBox 29"/>
+          <p:cNvSpPr txBox="1"/>
+          <p:nvPr/>
+        </p:nvSpPr>
+        <p:spPr>
+          <a:xfrm>
+            <a:off x="9144000" y="2468880"/>
+            <a:ext cx="2194560" cy="548640"/>
+          </a:xfrm>
+          <a:prstGeom prst="rect">
+            <a:avLst/>
+          </a:prstGeom>
+          <a:noFill/>
+        </p:spPr>
+        <p:txBody>
+          <a:bodyPr wrap="square" anchor="t" lIns="0" rIns="0" tIns="0" bIns="0">
+            <a:spAutoFit/>
+          </a:bodyPr>
+          <a:lstStyle/>
+          <a:p>
+            <a:pPr algn="l">
+              <a:lnSpc>
+                <a:spcPct val="105000"/>
+              </a:lnSpc>
+              <a:spcAft>
+                <a:spcPts val="0"/>
+              </a:spcAft>
+            </a:pPr>
+            <a:r>
+              <a:rPr sz="1550" b="1" i="0">
+                <a:solidFill>
+                  <a:srgbClr val="111827"/>
+                </a:solidFill>
+                <a:latin typeface="Segoe UI Semibold"/>
+              </a:rPr>
+              <a:t>Model 4 — Pilot Slice</a:t>
+            </a:r>
+          </a:p>
+        </p:txBody>
+      </p:sp>
+      <p:sp>
+        <p:nvSpPr>
+          <p:cNvPr id="31" name="TextBox 30"/>
+          <p:cNvSpPr txBox="1"/>
+          <p:nvPr/>
+        </p:nvSpPr>
+        <p:spPr>
+          <a:xfrm>
+            <a:off x="9144000" y="3017520"/>
+            <a:ext cx="2194560" cy="1691640"/>
+          </a:xfrm>
+          <a:prstGeom prst="rect">
+            <a:avLst/>
+          </a:prstGeom>
+          <a:noFill/>
+        </p:spPr>
+        <p:txBody>
+          <a:bodyPr wrap="square" anchor="t" lIns="0" rIns="0" tIns="0" bIns="0">
+            <a:spAutoFit/>
+          </a:bodyPr>
+          <a:lstStyle/>
+          <a:p>
+            <a:pPr algn="l">
+              <a:lnSpc>
+                <a:spcPct val="120000"/>
+              </a:lnSpc>
+              <a:spcAft>
+                <a:spcPts val="0"/>
+              </a:spcAft>
+            </a:pPr>
+            <a:r>
+              <a:rPr sz="1050" b="0" i="0">
+                <a:solidFill>
+                  <a:srgbClr val="616E82"/>
+                </a:solidFill>
+                <a:latin typeface="Segoe UI Semilight"/>
+              </a:rPr>
+              <a:t>Density aggregation, storage tiers, central rollup, ANPR-suitability — tested on master. Not the full statewide platform.</a:t>
+            </a:r>
+          </a:p>
+        </p:txBody>
+      </p:sp>
+      <p:sp>
+        <p:nvSpPr>
+          <p:cNvPr id="32" name="TextBox 31"/>
+          <p:cNvSpPr txBox="1"/>
+          <p:nvPr/>
+        </p:nvSpPr>
+        <p:spPr>
+          <a:xfrm>
+            <a:off x="548640" y="4983480"/>
+            <a:ext cx="11064240" cy="1280160"/>
           </a:xfrm>
           <a:prstGeom prst="rect">
             <a:avLst/>
@@ -30694,13 +31258,13 @@
               </a:spcAft>
             </a:pPr>
             <a:r>
-              <a:rPr sz="1350" b="0" i="0">
+              <a:rPr sz="1300" b="0" i="0">
                 <a:solidFill>
                   <a:srgbClr val="616E82"/>
                 </a:solidFill>
                 <a:latin typeface="Segoe UI Semilight"/>
               </a:rPr>
-              <a:t>“Combine two or more models” is the problem statement's own definition of a hybrid — we claim credit only for what is built and verified. Model 3 federates our own data with a second, real, independently-operated public dataset (not a second Gujarat system); Model 4 (state-level central VMS/command centre) stays a documented roadmap, not built this cycle.</a:t>
+              <a:t>“Combine two or more models” is the problem statement's own definition of a hybrid — credit claimed only for what's built and verified. Model 3 federates our own data with a second, real, independently-operated public dataset (not a second Gujarat system). Model 4's density/storage-tier/central-rollup/ANPR-suitability pilot is tested on master; the full statewide central VMS (Kafka, Kubernetes, government-DB integration) remains roadmap, not built this cycle.</a:t>
             </a:r>
           </a:p>
         </p:txBody>
@@ -33602,7 +34166,49 @@
         </p:nvSpPr>
         <p:spPr>
           <a:xfrm>
-            <a:off x="548640" y="5029200"/>
+            <a:off x="548640" y="4754880"/>
+            <a:ext cx="11064240" cy="256032"/>
+          </a:xfrm>
+          <a:prstGeom prst="rect">
+            <a:avLst/>
+          </a:prstGeom>
+          <a:noFill/>
+        </p:spPr>
+        <p:txBody>
+          <a:bodyPr wrap="square" anchor="t" lIns="0" rIns="0" tIns="0" bIns="0">
+            <a:spAutoFit/>
+          </a:bodyPr>
+          <a:lstStyle/>
+          <a:p>
+            <a:pPr algn="l">
+              <a:lnSpc>
+                <a:spcPct val="100000"/>
+              </a:lnSpc>
+              <a:spcAft>
+                <a:spcPts val="0"/>
+              </a:spcAft>
+            </a:pPr>
+            <a:r>
+              <a:rPr sz="1050" b="0" i="1">
+                <a:solidFill>
+                  <a:srgbClr val="12A16B"/>
+                </a:solidFill>
+                <a:latin typeface="Segoe UI Semilight"/>
+              </a:rPr>
+              <a:t>A scoped Model 4 pilot slice — density aggregation, storage tiers, central rollup, ANPR-suitability score — is already tested on master, not this diagram's full regional/central build-out.</a:t>
+            </a:r>
+          </a:p>
+        </p:txBody>
+      </p:sp>
+      <p:sp>
+        <p:nvSpPr>
+          <p:cNvPr id="34" name="TextBox 33"/>
+          <p:cNvSpPr txBox="1"/>
+          <p:nvPr/>
+        </p:nvSpPr>
+        <p:spPr>
+          <a:xfrm>
+            <a:off x="548640" y="5120640"/>
             <a:ext cx="11064240" cy="1097280"/>
           </a:xfrm>
           <a:prstGeom prst="rect">
